--- a/docs/HanView_Business_Plan_2026Q2.pptx
+++ b/docs/HanView_Business_Plan_2026Q2.pptx
@@ -5,26 +5,26 @@
     <p:sldMasterId id="2147483648" r:id="rId1"/>
   </p:sldMasterIdLst>
   <p:sldIdLst>
-    <p:sldId id="256" r:id="rId7"/>
-    <p:sldId id="257" r:id="rId8"/>
-    <p:sldId id="258" r:id="rId9"/>
-    <p:sldId id="259" r:id="rId10"/>
-    <p:sldId id="260" r:id="rId11"/>
-    <p:sldId id="261" r:id="rId12"/>
-    <p:sldId id="262" r:id="rId13"/>
-    <p:sldId id="263" r:id="rId14"/>
-    <p:sldId id="264" r:id="rId15"/>
-    <p:sldId id="265" r:id="rId16"/>
-    <p:sldId id="266" r:id="rId17"/>
-    <p:sldId id="267" r:id="rId18"/>
-    <p:sldId id="268" r:id="rId19"/>
-    <p:sldId id="269" r:id="rId20"/>
-    <p:sldId id="270" r:id="rId21"/>
-    <p:sldId id="271" r:id="rId22"/>
-    <p:sldId id="272" r:id="rId23"/>
-    <p:sldId id="273" r:id="rId24"/>
+    <p:sldId id="256" r:id="rId2"/>
+    <p:sldId id="257" r:id="rId3"/>
+    <p:sldId id="258" r:id="rId4"/>
+    <p:sldId id="259" r:id="rId5"/>
+    <p:sldId id="260" r:id="rId6"/>
+    <p:sldId id="261" r:id="rId7"/>
+    <p:sldId id="262" r:id="rId8"/>
+    <p:sldId id="263" r:id="rId9"/>
+    <p:sldId id="264" r:id="rId10"/>
+    <p:sldId id="265" r:id="rId11"/>
+    <p:sldId id="266" r:id="rId12"/>
+    <p:sldId id="267" r:id="rId13"/>
+    <p:sldId id="268" r:id="rId14"/>
+    <p:sldId id="269" r:id="rId15"/>
+    <p:sldId id="270" r:id="rId16"/>
+    <p:sldId id="271" r:id="rId17"/>
+    <p:sldId id="272" r:id="rId18"/>
+    <p:sldId id="273" r:id="rId19"/>
   </p:sldIdLst>
-  <p:sldSz cx="12191695" cy="6858000" type="screen4x3"/>
+  <p:sldSz cx="12192000" cy="6858000"/>
   <p:notesSz cx="6858000" cy="9144000"/>
   <p:defaultTextStyle>
     <a:defPPr>
@@ -121,6 +121,22 @@
       </a:defRPr>
     </a:lvl9pPr>
   </p:defaultTextStyle>
+  <p:extLst>
+    <p:ext uri="{EFAFB233-063F-42B5-8137-9DF3F51BA10A}">
+      <p15:sldGuideLst xmlns:p15="http://schemas.microsoft.com/office/powerpoint/2012/main">
+        <p15:guide id="1" orient="horz" pos="2160">
+          <p15:clr>
+            <a:srgbClr val="A4A3A4"/>
+          </p15:clr>
+        </p15:guide>
+        <p15:guide id="2" pos="2880">
+          <p15:clr>
+            <a:srgbClr val="A4A3A4"/>
+          </p15:clr>
+        </p15:guide>
+      </p15:sldGuideLst>
+    </p:ext>
+  </p:extLst>
 </p:presentation>
 </file>
 
@@ -162,10 +178,9 @@
           <a:lstStyle/>
           <a:p>
             <a:r>
-              <a:rPr lang="en-US" smtClean="0"/>
+              <a:rPr lang="en-US"/>
               <a:t>Click to edit Master title style</a:t>
             </a:r>
-            <a:endParaRPr lang="en-US"/>
           </a:p>
         </p:txBody>
       </p:sp>
@@ -281,10 +296,9 @@
           </a:lstStyle>
           <a:p>
             <a:r>
-              <a:rPr lang="en-US" smtClean="0"/>
+              <a:rPr lang="en-US"/>
               <a:t>Click to edit Master subtitle style</a:t>
             </a:r>
-            <a:endParaRPr lang="en-US"/>
           </a:p>
         </p:txBody>
       </p:sp>
@@ -305,7 +319,7 @@
           <a:p>
             <a:fld id="{5BCAD085-E8A6-8845-BD4E-CB4CCA059FC4}" type="datetimeFigureOut">
               <a:rPr lang="en-US" smtClean="0"/>
-              <a:t>1/27/13</a:t>
+              <a:t>4/15/26</a:t>
             </a:fld>
             <a:endParaRPr lang="en-US"/>
           </a:p>
@@ -399,10 +413,9 @@
           <a:lstStyle/>
           <a:p>
             <a:r>
-              <a:rPr lang="en-US" smtClean="0"/>
+              <a:rPr lang="en-US"/>
               <a:t>Click to edit Master title style</a:t>
             </a:r>
-            <a:endParaRPr lang="en-US"/>
           </a:p>
         </p:txBody>
       </p:sp>
@@ -423,38 +436,37 @@
           <a:p>
             <a:pPr lvl="0"/>
             <a:r>
-              <a:rPr lang="en-US" smtClean="0"/>
+              <a:rPr lang="en-US"/>
               <a:t>Click to edit Master text styles</a:t>
             </a:r>
           </a:p>
           <a:p>
             <a:pPr lvl="1"/>
             <a:r>
-              <a:rPr lang="en-US" smtClean="0"/>
+              <a:rPr lang="en-US"/>
               <a:t>Second level</a:t>
             </a:r>
           </a:p>
           <a:p>
             <a:pPr lvl="2"/>
             <a:r>
-              <a:rPr lang="en-US" smtClean="0"/>
+              <a:rPr lang="en-US"/>
               <a:t>Third level</a:t>
             </a:r>
           </a:p>
           <a:p>
             <a:pPr lvl="3"/>
             <a:r>
-              <a:rPr lang="en-US" smtClean="0"/>
+              <a:rPr lang="en-US"/>
               <a:t>Fourth level</a:t>
             </a:r>
           </a:p>
           <a:p>
             <a:pPr lvl="4"/>
             <a:r>
-              <a:rPr lang="en-US" smtClean="0"/>
+              <a:rPr lang="en-US"/>
               <a:t>Fifth level</a:t>
             </a:r>
-            <a:endParaRPr lang="en-US"/>
           </a:p>
         </p:txBody>
       </p:sp>
@@ -475,7 +487,7 @@
           <a:p>
             <a:fld id="{5BCAD085-E8A6-8845-BD4E-CB4CCA059FC4}" type="datetimeFigureOut">
               <a:rPr lang="en-US" smtClean="0"/>
-              <a:t>1/27/13</a:t>
+              <a:t>4/15/26</a:t>
             </a:fld>
             <a:endParaRPr lang="en-US"/>
           </a:p>
@@ -574,10 +586,9 @@
           <a:lstStyle/>
           <a:p>
             <a:r>
-              <a:rPr lang="en-US" smtClean="0"/>
+              <a:rPr lang="en-US"/>
               <a:t>Click to edit Master title style</a:t>
             </a:r>
-            <a:endParaRPr lang="en-US"/>
           </a:p>
         </p:txBody>
       </p:sp>
@@ -603,38 +614,37 @@
           <a:p>
             <a:pPr lvl="0"/>
             <a:r>
-              <a:rPr lang="en-US" smtClean="0"/>
+              <a:rPr lang="en-US"/>
               <a:t>Click to edit Master text styles</a:t>
             </a:r>
           </a:p>
           <a:p>
             <a:pPr lvl="1"/>
             <a:r>
-              <a:rPr lang="en-US" smtClean="0"/>
+              <a:rPr lang="en-US"/>
               <a:t>Second level</a:t>
             </a:r>
           </a:p>
           <a:p>
             <a:pPr lvl="2"/>
             <a:r>
-              <a:rPr lang="en-US" smtClean="0"/>
+              <a:rPr lang="en-US"/>
               <a:t>Third level</a:t>
             </a:r>
           </a:p>
           <a:p>
             <a:pPr lvl="3"/>
             <a:r>
-              <a:rPr lang="en-US" smtClean="0"/>
+              <a:rPr lang="en-US"/>
               <a:t>Fourth level</a:t>
             </a:r>
           </a:p>
           <a:p>
             <a:pPr lvl="4"/>
             <a:r>
-              <a:rPr lang="en-US" smtClean="0"/>
+              <a:rPr lang="en-US"/>
               <a:t>Fifth level</a:t>
             </a:r>
-            <a:endParaRPr lang="en-US"/>
           </a:p>
         </p:txBody>
       </p:sp>
@@ -655,7 +665,7 @@
           <a:p>
             <a:fld id="{5BCAD085-E8A6-8845-BD4E-CB4CCA059FC4}" type="datetimeFigureOut">
               <a:rPr lang="en-US" smtClean="0"/>
-              <a:t>1/27/13</a:t>
+              <a:t>4/15/26</a:t>
             </a:fld>
             <a:endParaRPr lang="en-US"/>
           </a:p>
@@ -749,10 +759,9 @@
           <a:lstStyle/>
           <a:p>
             <a:r>
-              <a:rPr lang="en-US" smtClean="0"/>
+              <a:rPr lang="en-US"/>
               <a:t>Click to edit Master title style</a:t>
             </a:r>
-            <a:endParaRPr lang="en-US"/>
           </a:p>
         </p:txBody>
       </p:sp>
@@ -773,38 +782,37 @@
           <a:p>
             <a:pPr lvl="0"/>
             <a:r>
-              <a:rPr lang="en-US" smtClean="0"/>
+              <a:rPr lang="en-US"/>
               <a:t>Click to edit Master text styles</a:t>
             </a:r>
           </a:p>
           <a:p>
             <a:pPr lvl="1"/>
             <a:r>
-              <a:rPr lang="en-US" smtClean="0"/>
+              <a:rPr lang="en-US"/>
               <a:t>Second level</a:t>
             </a:r>
           </a:p>
           <a:p>
             <a:pPr lvl="2"/>
             <a:r>
-              <a:rPr lang="en-US" smtClean="0"/>
+              <a:rPr lang="en-US"/>
               <a:t>Third level</a:t>
             </a:r>
           </a:p>
           <a:p>
             <a:pPr lvl="3"/>
             <a:r>
-              <a:rPr lang="en-US" smtClean="0"/>
+              <a:rPr lang="en-US"/>
               <a:t>Fourth level</a:t>
             </a:r>
           </a:p>
           <a:p>
             <a:pPr lvl="4"/>
             <a:r>
-              <a:rPr lang="en-US" smtClean="0"/>
+              <a:rPr lang="en-US"/>
               <a:t>Fifth level</a:t>
             </a:r>
-            <a:endParaRPr lang="en-US"/>
           </a:p>
         </p:txBody>
       </p:sp>
@@ -825,7 +833,7 @@
           <a:p>
             <a:fld id="{5BCAD085-E8A6-8845-BD4E-CB4CCA059FC4}" type="datetimeFigureOut">
               <a:rPr lang="en-US" smtClean="0"/>
-              <a:t>1/27/13</a:t>
+              <a:t>4/15/26</a:t>
             </a:fld>
             <a:endParaRPr lang="en-US"/>
           </a:p>
@@ -928,10 +936,9 @@
           </a:lstStyle>
           <a:p>
             <a:r>
-              <a:rPr lang="en-US" smtClean="0"/>
+              <a:rPr lang="en-US"/>
               <a:t>Click to edit Master title style</a:t>
             </a:r>
-            <a:endParaRPr lang="en-US"/>
           </a:p>
         </p:txBody>
       </p:sp>
@@ -1048,7 +1055,7 @@
           <a:p>
             <a:pPr lvl="0"/>
             <a:r>
-              <a:rPr lang="en-US" smtClean="0"/>
+              <a:rPr lang="en-US"/>
               <a:t>Click to edit Master text styles</a:t>
             </a:r>
           </a:p>
@@ -1071,7 +1078,7 @@
           <a:p>
             <a:fld id="{5BCAD085-E8A6-8845-BD4E-CB4CCA059FC4}" type="datetimeFigureOut">
               <a:rPr lang="en-US" smtClean="0"/>
-              <a:t>1/27/13</a:t>
+              <a:t>4/15/26</a:t>
             </a:fld>
             <a:endParaRPr lang="en-US"/>
           </a:p>
@@ -1165,10 +1172,9 @@
           <a:lstStyle/>
           <a:p>
             <a:r>
-              <a:rPr lang="en-US" smtClean="0"/>
+              <a:rPr lang="en-US"/>
               <a:t>Click to edit Master title style</a:t>
             </a:r>
-            <a:endParaRPr lang="en-US"/>
           </a:p>
         </p:txBody>
       </p:sp>
@@ -1222,38 +1228,37 @@
           <a:p>
             <a:pPr lvl="0"/>
             <a:r>
-              <a:rPr lang="en-US" smtClean="0"/>
+              <a:rPr lang="en-US"/>
               <a:t>Click to edit Master text styles</a:t>
             </a:r>
           </a:p>
           <a:p>
             <a:pPr lvl="1"/>
             <a:r>
-              <a:rPr lang="en-US" smtClean="0"/>
+              <a:rPr lang="en-US"/>
               <a:t>Second level</a:t>
             </a:r>
           </a:p>
           <a:p>
             <a:pPr lvl="2"/>
             <a:r>
-              <a:rPr lang="en-US" smtClean="0"/>
+              <a:rPr lang="en-US"/>
               <a:t>Third level</a:t>
             </a:r>
           </a:p>
           <a:p>
             <a:pPr lvl="3"/>
             <a:r>
-              <a:rPr lang="en-US" smtClean="0"/>
+              <a:rPr lang="en-US"/>
               <a:t>Fourth level</a:t>
             </a:r>
           </a:p>
           <a:p>
             <a:pPr lvl="4"/>
             <a:r>
-              <a:rPr lang="en-US" smtClean="0"/>
+              <a:rPr lang="en-US"/>
               <a:t>Fifth level</a:t>
             </a:r>
-            <a:endParaRPr lang="en-US"/>
           </a:p>
         </p:txBody>
       </p:sp>
@@ -1307,38 +1312,37 @@
           <a:p>
             <a:pPr lvl="0"/>
             <a:r>
-              <a:rPr lang="en-US" smtClean="0"/>
+              <a:rPr lang="en-US"/>
               <a:t>Click to edit Master text styles</a:t>
             </a:r>
           </a:p>
           <a:p>
             <a:pPr lvl="1"/>
             <a:r>
-              <a:rPr lang="en-US" smtClean="0"/>
+              <a:rPr lang="en-US"/>
               <a:t>Second level</a:t>
             </a:r>
           </a:p>
           <a:p>
             <a:pPr lvl="2"/>
             <a:r>
-              <a:rPr lang="en-US" smtClean="0"/>
+              <a:rPr lang="en-US"/>
               <a:t>Third level</a:t>
             </a:r>
           </a:p>
           <a:p>
             <a:pPr lvl="3"/>
             <a:r>
-              <a:rPr lang="en-US" smtClean="0"/>
+              <a:rPr lang="en-US"/>
               <a:t>Fourth level</a:t>
             </a:r>
           </a:p>
           <a:p>
             <a:pPr lvl="4"/>
             <a:r>
-              <a:rPr lang="en-US" smtClean="0"/>
+              <a:rPr lang="en-US"/>
               <a:t>Fifth level</a:t>
             </a:r>
-            <a:endParaRPr lang="en-US"/>
           </a:p>
         </p:txBody>
       </p:sp>
@@ -1359,7 +1363,7 @@
           <a:p>
             <a:fld id="{5BCAD085-E8A6-8845-BD4E-CB4CCA059FC4}" type="datetimeFigureOut">
               <a:rPr lang="en-US" smtClean="0"/>
-              <a:t>1/27/13</a:t>
+              <a:t>4/15/26</a:t>
             </a:fld>
             <a:endParaRPr lang="en-US"/>
           </a:p>
@@ -1457,10 +1461,9 @@
           </a:lstStyle>
           <a:p>
             <a:r>
-              <a:rPr lang="en-US" smtClean="0"/>
+              <a:rPr lang="en-US"/>
               <a:t>Click to edit Master title style</a:t>
             </a:r>
-            <a:endParaRPr lang="en-US"/>
           </a:p>
         </p:txBody>
       </p:sp>
@@ -1523,7 +1526,7 @@
           <a:p>
             <a:pPr lvl="0"/>
             <a:r>
-              <a:rPr lang="en-US" smtClean="0"/>
+              <a:rPr lang="en-US"/>
               <a:t>Click to edit Master text styles</a:t>
             </a:r>
           </a:p>
@@ -1579,38 +1582,37 @@
           <a:p>
             <a:pPr lvl="0"/>
             <a:r>
-              <a:rPr lang="en-US" smtClean="0"/>
+              <a:rPr lang="en-US"/>
               <a:t>Click to edit Master text styles</a:t>
             </a:r>
           </a:p>
           <a:p>
             <a:pPr lvl="1"/>
             <a:r>
-              <a:rPr lang="en-US" smtClean="0"/>
+              <a:rPr lang="en-US"/>
               <a:t>Second level</a:t>
             </a:r>
           </a:p>
           <a:p>
             <a:pPr lvl="2"/>
             <a:r>
-              <a:rPr lang="en-US" smtClean="0"/>
+              <a:rPr lang="en-US"/>
               <a:t>Third level</a:t>
             </a:r>
           </a:p>
           <a:p>
             <a:pPr lvl="3"/>
             <a:r>
-              <a:rPr lang="en-US" smtClean="0"/>
+              <a:rPr lang="en-US"/>
               <a:t>Fourth level</a:t>
             </a:r>
           </a:p>
           <a:p>
             <a:pPr lvl="4"/>
             <a:r>
-              <a:rPr lang="en-US" smtClean="0"/>
+              <a:rPr lang="en-US"/>
               <a:t>Fifth level</a:t>
             </a:r>
-            <a:endParaRPr lang="en-US"/>
           </a:p>
         </p:txBody>
       </p:sp>
@@ -1673,7 +1675,7 @@
           <a:p>
             <a:pPr lvl="0"/>
             <a:r>
-              <a:rPr lang="en-US" smtClean="0"/>
+              <a:rPr lang="en-US"/>
               <a:t>Click to edit Master text styles</a:t>
             </a:r>
           </a:p>
@@ -1729,38 +1731,37 @@
           <a:p>
             <a:pPr lvl="0"/>
             <a:r>
-              <a:rPr lang="en-US" smtClean="0"/>
+              <a:rPr lang="en-US"/>
               <a:t>Click to edit Master text styles</a:t>
             </a:r>
           </a:p>
           <a:p>
             <a:pPr lvl="1"/>
             <a:r>
-              <a:rPr lang="en-US" smtClean="0"/>
+              <a:rPr lang="en-US"/>
               <a:t>Second level</a:t>
             </a:r>
           </a:p>
           <a:p>
             <a:pPr lvl="2"/>
             <a:r>
-              <a:rPr lang="en-US" smtClean="0"/>
+              <a:rPr lang="en-US"/>
               <a:t>Third level</a:t>
             </a:r>
           </a:p>
           <a:p>
             <a:pPr lvl="3"/>
             <a:r>
-              <a:rPr lang="en-US" smtClean="0"/>
+              <a:rPr lang="en-US"/>
               <a:t>Fourth level</a:t>
             </a:r>
           </a:p>
           <a:p>
             <a:pPr lvl="4"/>
             <a:r>
-              <a:rPr lang="en-US" smtClean="0"/>
+              <a:rPr lang="en-US"/>
               <a:t>Fifth level</a:t>
             </a:r>
-            <a:endParaRPr lang="en-US"/>
           </a:p>
         </p:txBody>
       </p:sp>
@@ -1781,7 +1782,7 @@
           <a:p>
             <a:fld id="{5BCAD085-E8A6-8845-BD4E-CB4CCA059FC4}" type="datetimeFigureOut">
               <a:rPr lang="en-US" smtClean="0"/>
-              <a:t>1/27/13</a:t>
+              <a:t>4/15/26</a:t>
             </a:fld>
             <a:endParaRPr lang="en-US"/>
           </a:p>
@@ -1875,10 +1876,9 @@
           <a:lstStyle/>
           <a:p>
             <a:r>
-              <a:rPr lang="en-US" smtClean="0"/>
+              <a:rPr lang="en-US"/>
               <a:t>Click to edit Master title style</a:t>
             </a:r>
-            <a:endParaRPr lang="en-US"/>
           </a:p>
         </p:txBody>
       </p:sp>
@@ -1899,7 +1899,7 @@
           <a:p>
             <a:fld id="{5BCAD085-E8A6-8845-BD4E-CB4CCA059FC4}" type="datetimeFigureOut">
               <a:rPr lang="en-US" smtClean="0"/>
-              <a:t>1/27/13</a:t>
+              <a:t>4/15/26</a:t>
             </a:fld>
             <a:endParaRPr lang="en-US"/>
           </a:p>
@@ -1994,7 +1994,7 @@
           <a:p>
             <a:fld id="{5BCAD085-E8A6-8845-BD4E-CB4CCA059FC4}" type="datetimeFigureOut">
               <a:rPr lang="en-US" smtClean="0"/>
-              <a:t>1/27/13</a:t>
+              <a:t>4/15/26</a:t>
             </a:fld>
             <a:endParaRPr lang="en-US"/>
           </a:p>
@@ -2097,10 +2097,9 @@
           </a:lstStyle>
           <a:p>
             <a:r>
-              <a:rPr lang="en-US" smtClean="0"/>
+              <a:rPr lang="en-US"/>
               <a:t>Click to edit Master title style</a:t>
             </a:r>
-            <a:endParaRPr lang="en-US"/>
           </a:p>
         </p:txBody>
       </p:sp>
@@ -2154,38 +2153,37 @@
           <a:p>
             <a:pPr lvl="0"/>
             <a:r>
-              <a:rPr lang="en-US" smtClean="0"/>
+              <a:rPr lang="en-US"/>
               <a:t>Click to edit Master text styles</a:t>
             </a:r>
           </a:p>
           <a:p>
             <a:pPr lvl="1"/>
             <a:r>
-              <a:rPr lang="en-US" smtClean="0"/>
+              <a:rPr lang="en-US"/>
               <a:t>Second level</a:t>
             </a:r>
           </a:p>
           <a:p>
             <a:pPr lvl="2"/>
             <a:r>
-              <a:rPr lang="en-US" smtClean="0"/>
+              <a:rPr lang="en-US"/>
               <a:t>Third level</a:t>
             </a:r>
           </a:p>
           <a:p>
             <a:pPr lvl="3"/>
             <a:r>
-              <a:rPr lang="en-US" smtClean="0"/>
+              <a:rPr lang="en-US"/>
               <a:t>Fourth level</a:t>
             </a:r>
           </a:p>
           <a:p>
             <a:pPr lvl="4"/>
             <a:r>
-              <a:rPr lang="en-US" smtClean="0"/>
+              <a:rPr lang="en-US"/>
               <a:t>Fifth level</a:t>
             </a:r>
-            <a:endParaRPr lang="en-US"/>
           </a:p>
         </p:txBody>
       </p:sp>
@@ -2248,7 +2246,7 @@
           <a:p>
             <a:pPr lvl="0"/>
             <a:r>
-              <a:rPr lang="en-US" smtClean="0"/>
+              <a:rPr lang="en-US"/>
               <a:t>Click to edit Master text styles</a:t>
             </a:r>
           </a:p>
@@ -2271,7 +2269,7 @@
           <a:p>
             <a:fld id="{5BCAD085-E8A6-8845-BD4E-CB4CCA059FC4}" type="datetimeFigureOut">
               <a:rPr lang="en-US" smtClean="0"/>
-              <a:t>1/27/13</a:t>
+              <a:t>4/15/26</a:t>
             </a:fld>
             <a:endParaRPr lang="en-US"/>
           </a:p>
@@ -2374,10 +2372,9 @@
           </a:lstStyle>
           <a:p>
             <a:r>
-              <a:rPr lang="en-US" smtClean="0"/>
+              <a:rPr lang="en-US"/>
               <a:t>Click to edit Master title style</a:t>
             </a:r>
-            <a:endParaRPr lang="en-US"/>
           </a:p>
         </p:txBody>
       </p:sp>
@@ -2501,7 +2498,7 @@
           <a:p>
             <a:pPr lvl="0"/>
             <a:r>
-              <a:rPr lang="en-US" smtClean="0"/>
+              <a:rPr lang="en-US"/>
               <a:t>Click to edit Master text styles</a:t>
             </a:r>
           </a:p>
@@ -2524,7 +2521,7 @@
           <a:p>
             <a:fld id="{5BCAD085-E8A6-8845-BD4E-CB4CCA059FC4}" type="datetimeFigureOut">
               <a:rPr lang="en-US" smtClean="0"/>
-              <a:t>1/27/13</a:t>
+              <a:t>4/15/26</a:t>
             </a:fld>
             <a:endParaRPr lang="en-US"/>
           </a:p>
@@ -2633,10 +2630,9 @@
           <a:lstStyle/>
           <a:p>
             <a:r>
-              <a:rPr lang="en-US" smtClean="0"/>
+              <a:rPr lang="en-US"/>
               <a:t>Click to edit Master title style</a:t>
             </a:r>
-            <a:endParaRPr lang="en-US"/>
           </a:p>
         </p:txBody>
       </p:sp>
@@ -2667,38 +2663,37 @@
           <a:p>
             <a:pPr lvl="0"/>
             <a:r>
-              <a:rPr lang="en-US" smtClean="0"/>
+              <a:rPr lang="en-US"/>
               <a:t>Click to edit Master text styles</a:t>
             </a:r>
           </a:p>
           <a:p>
             <a:pPr lvl="1"/>
             <a:r>
-              <a:rPr lang="en-US" smtClean="0"/>
+              <a:rPr lang="en-US"/>
               <a:t>Second level</a:t>
             </a:r>
           </a:p>
           <a:p>
             <a:pPr lvl="2"/>
             <a:r>
-              <a:rPr lang="en-US" smtClean="0"/>
+              <a:rPr lang="en-US"/>
               <a:t>Third level</a:t>
             </a:r>
           </a:p>
           <a:p>
             <a:pPr lvl="3"/>
             <a:r>
-              <a:rPr lang="en-US" smtClean="0"/>
+              <a:rPr lang="en-US"/>
               <a:t>Fourth level</a:t>
             </a:r>
           </a:p>
           <a:p>
             <a:pPr lvl="4"/>
             <a:r>
-              <a:rPr lang="en-US" smtClean="0"/>
+              <a:rPr lang="en-US"/>
               <a:t>Fifth level</a:t>
             </a:r>
-            <a:endParaRPr lang="en-US"/>
           </a:p>
         </p:txBody>
       </p:sp>
@@ -2737,7 +2732,7 @@
           <a:p>
             <a:fld id="{5BCAD085-E8A6-8845-BD4E-CB4CCA059FC4}" type="datetimeFigureOut">
               <a:rPr lang="en-US" smtClean="0"/>
-              <a:t>1/27/13</a:t>
+              <a:t>4/15/26</a:t>
             </a:fld>
             <a:endParaRPr lang="en-US"/>
           </a:p>
@@ -3096,7 +3091,7 @@
 </file>
 
 <file path=ppt/slides/slide1.xml><?xml version="1.0" encoding="utf-8"?>
-<p:sld xmlns:a="http://schemas.openxmlformats.org/drawingml/2006/main" xmlns:p="http://schemas.openxmlformats.org/presentationml/2006/main" xmlns:r="http://schemas.openxmlformats.org/officeDocument/2006/relationships">
+<p:sld xmlns:a="http://schemas.openxmlformats.org/drawingml/2006/main" xmlns:r="http://schemas.openxmlformats.org/officeDocument/2006/relationships" xmlns:p="http://schemas.openxmlformats.org/presentationml/2006/main">
   <p:cSld>
     <p:spTree>
       <p:nvGrpSpPr>
@@ -3104,7 +3099,14 @@
         <p:cNvGrpSpPr/>
         <p:nvPr/>
       </p:nvGrpSpPr>
-      <p:grpSpPr/>
+      <p:grpSpPr>
+        <a:xfrm>
+          <a:off x="0" y="0"/>
+          <a:ext cx="0" cy="0"/>
+          <a:chOff x="0" y="0"/>
+          <a:chExt cx="0" cy="0"/>
+        </a:xfrm>
+      </p:grpSpPr>
       <p:sp>
         <p:nvSpPr>
           <p:cNvPr id="2" name="Rectangle 1"/>
@@ -3113,7 +3115,7 @@
         </p:nvSpPr>
         <p:spPr>
           <a:xfrm>
-            <a:off x="0" y="0"/>
+            <a:off x="0" y="294290"/>
             <a:ext cx="12191695" cy="6858000"/>
           </a:xfrm>
           <a:prstGeom prst="rect">
@@ -3146,6 +3148,7 @@
           <a:lstStyle/>
           <a:p>
             <a:pPr algn="ctr"/>
+            <a:endParaRPr/>
           </a:p>
         </p:txBody>
       </p:sp>
@@ -3190,6 +3193,7 @@
           <a:lstStyle/>
           <a:p>
             <a:pPr algn="ctr"/>
+            <a:endParaRPr/>
           </a:p>
         </p:txBody>
       </p:sp>
@@ -3210,7 +3214,7 @@
           <a:noFill/>
         </p:spPr>
         <p:txBody>
-          <a:bodyPr wrap="square" lIns="0" rIns="0" tIns="0" bIns="0" anchor="t">
+          <a:bodyPr wrap="square" lIns="0" tIns="0" rIns="0" bIns="0" anchor="t">
             <a:spAutoFit/>
           </a:bodyPr>
           <a:lstStyle/>
@@ -3236,7 +3240,7 @@
         </p:nvSpPr>
         <p:spPr>
           <a:xfrm>
-            <a:off x="731520" y="1371600"/>
+            <a:off x="731520" y="814553"/>
             <a:ext cx="10972800" cy="1188720"/>
           </a:xfrm>
           <a:prstGeom prst="rect">
@@ -3245,14 +3249,14 @@
           <a:noFill/>
         </p:spPr>
         <p:txBody>
-          <a:bodyPr wrap="square" lIns="0" rIns="0" tIns="0" bIns="0" anchor="t">
+          <a:bodyPr wrap="square" lIns="0" tIns="0" rIns="0" bIns="0" anchor="t">
             <a:spAutoFit/>
           </a:bodyPr>
           <a:lstStyle/>
           <a:p>
             <a:pPr algn="l"/>
             <a:r>
-              <a:rPr sz="8000" b="1">
+              <a:rPr sz="8000" b="1" dirty="0" err="1">
                 <a:solidFill>
                   <a:srgbClr val="FFFFFF"/>
                 </a:solidFill>
@@ -3260,6 +3264,12 @@
               </a:rPr>
               <a:t>HanView</a:t>
             </a:r>
+            <a:endParaRPr sz="8000" b="1" dirty="0">
+              <a:solidFill>
+                <a:srgbClr val="FFFFFF"/>
+              </a:solidFill>
+              <a:latin typeface="맑은 고딕"/>
+            </a:endParaRPr>
           </a:p>
         </p:txBody>
       </p:sp>
@@ -3280,7 +3290,7 @@
           <a:noFill/>
         </p:spPr>
         <p:txBody>
-          <a:bodyPr wrap="square" lIns="0" rIns="0" tIns="0" bIns="0" anchor="t">
+          <a:bodyPr wrap="square" lIns="0" tIns="0" rIns="0" bIns="0" anchor="t">
             <a:spAutoFit/>
           </a:bodyPr>
           <a:lstStyle/>
@@ -3315,7 +3325,7 @@
           <a:noFill/>
         </p:spPr>
         <p:txBody>
-          <a:bodyPr wrap="square" lIns="0" rIns="0" tIns="0" bIns="0" anchor="t">
+          <a:bodyPr wrap="square" lIns="0" tIns="0" rIns="0" bIns="0" anchor="t">
             <a:spAutoFit/>
           </a:bodyPr>
           <a:lstStyle/>
@@ -3345,15 +3355,12 @@
           </a:p>
           <a:p>
             <a:pPr algn="l"/>
-            <a:r>
-              <a:rPr sz="1400" b="0">
-                <a:solidFill>
-                  <a:srgbClr val="E8ECF2"/>
-                </a:solidFill>
-                <a:latin typeface="맑은 고딕"/>
-              </a:rPr>
-              <a:t/>
-            </a:r>
+            <a:endParaRPr sz="1400" b="0">
+              <a:solidFill>
+                <a:srgbClr val="E8ECF2"/>
+              </a:solidFill>
+              <a:latin typeface="맑은 고딕"/>
+            </a:endParaRPr>
           </a:p>
           <a:p>
             <a:pPr algn="l"/>
@@ -3422,6 +3429,7 @@
           <a:lstStyle/>
           <a:p>
             <a:pPr algn="ctr"/>
+            <a:endParaRPr/>
           </a:p>
         </p:txBody>
       </p:sp>
@@ -3442,7 +3450,7 @@
           <a:noFill/>
         </p:spPr>
         <p:txBody>
-          <a:bodyPr wrap="square" lIns="0" rIns="0" tIns="0" bIns="0" anchor="t">
+          <a:bodyPr wrap="square" lIns="0" tIns="0" rIns="0" bIns="0" anchor="t">
             <a:spAutoFit/>
           </a:bodyPr>
           <a:lstStyle/>
@@ -3477,7 +3485,7 @@
           <a:noFill/>
         </p:spPr>
         <p:txBody>
-          <a:bodyPr wrap="square" lIns="0" rIns="0" tIns="0" bIns="0" anchor="t">
+          <a:bodyPr wrap="square" lIns="0" tIns="0" rIns="0" bIns="0" anchor="t">
             <a:spAutoFit/>
           </a:bodyPr>
           <a:lstStyle/>
@@ -3504,7 +3512,7 @@
 </file>
 
 <file path=ppt/slides/slide10.xml><?xml version="1.0" encoding="utf-8"?>
-<p:sld xmlns:a="http://schemas.openxmlformats.org/drawingml/2006/main" xmlns:p="http://schemas.openxmlformats.org/presentationml/2006/main" xmlns:r="http://schemas.openxmlformats.org/officeDocument/2006/relationships">
+<p:sld xmlns:a="http://schemas.openxmlformats.org/drawingml/2006/main" xmlns:r="http://schemas.openxmlformats.org/officeDocument/2006/relationships" xmlns:p="http://schemas.openxmlformats.org/presentationml/2006/main">
   <p:cSld>
     <p:spTree>
       <p:nvGrpSpPr>
@@ -3512,7 +3520,14 @@
         <p:cNvGrpSpPr/>
         <p:nvPr/>
       </p:nvGrpSpPr>
-      <p:grpSpPr/>
+      <p:grpSpPr>
+        <a:xfrm>
+          <a:off x="0" y="0"/>
+          <a:ext cx="0" cy="0"/>
+          <a:chOff x="0" y="0"/>
+          <a:chExt cx="0" cy="0"/>
+        </a:xfrm>
+      </p:grpSpPr>
       <p:sp>
         <p:nvSpPr>
           <p:cNvPr id="2" name="Rectangle 1"/>
@@ -3554,6 +3569,7 @@
           <a:lstStyle/>
           <a:p>
             <a:pPr algn="ctr"/>
+            <a:endParaRPr/>
           </a:p>
         </p:txBody>
       </p:sp>
@@ -3574,7 +3590,7 @@
           <a:noFill/>
         </p:spPr>
         <p:txBody>
-          <a:bodyPr wrap="square" lIns="0" rIns="0" tIns="0" bIns="0" anchor="ctr">
+          <a:bodyPr wrap="square" lIns="0" tIns="0" rIns="0" bIns="0" anchor="ctr">
             <a:spAutoFit/>
           </a:bodyPr>
           <a:lstStyle/>
@@ -3609,7 +3625,7 @@
           <a:noFill/>
         </p:spPr>
         <p:txBody>
-          <a:bodyPr wrap="square" lIns="0" rIns="0" tIns="0" bIns="0" anchor="ctr">
+          <a:bodyPr wrap="square" lIns="0" tIns="0" rIns="0" bIns="0" anchor="ctr">
             <a:spAutoFit/>
           </a:bodyPr>
           <a:lstStyle/>
@@ -3644,7 +3660,7 @@
           <a:noFill/>
         </p:spPr>
         <p:txBody>
-          <a:bodyPr wrap="square" lIns="0" rIns="0" tIns="0" bIns="0" anchor="t">
+          <a:bodyPr wrap="square" lIns="0" tIns="0" rIns="0" bIns="0" anchor="t">
             <a:spAutoFit/>
           </a:bodyPr>
           <a:lstStyle/>
@@ -3679,7 +3695,7 @@
           <a:noFill/>
         </p:spPr>
         <p:txBody>
-          <a:bodyPr wrap="square" lIns="0" rIns="0" tIns="0" bIns="0" anchor="t">
+          <a:bodyPr wrap="square" lIns="0" tIns="0" rIns="0" bIns="0" anchor="t">
             <a:spAutoFit/>
           </a:bodyPr>
           <a:lstStyle/>
@@ -3714,7 +3730,7 @@
           <a:noFill/>
         </p:spPr>
         <p:txBody>
-          <a:bodyPr wrap="square" lIns="0" rIns="0" tIns="0" bIns="0" anchor="t">
+          <a:bodyPr wrap="square" lIns="0" tIns="0" rIns="0" bIns="0" anchor="t">
             <a:spAutoFit/>
           </a:bodyPr>
           <a:lstStyle/>
@@ -3773,6 +3789,7 @@
           <a:lstStyle/>
           <a:p>
             <a:pPr algn="ctr"/>
+            <a:endParaRPr/>
           </a:p>
         </p:txBody>
       </p:sp>
@@ -3817,6 +3834,7 @@
           <a:lstStyle/>
           <a:p>
             <a:pPr algn="ctr"/>
+            <a:endParaRPr/>
           </a:p>
         </p:txBody>
       </p:sp>
@@ -3837,7 +3855,7 @@
           <a:noFill/>
         </p:spPr>
         <p:txBody>
-          <a:bodyPr wrap="square" lIns="0" rIns="0" tIns="0" bIns="0" anchor="ctr">
+          <a:bodyPr wrap="square" lIns="0" tIns="0" rIns="0" bIns="0" anchor="ctr">
             <a:spAutoFit/>
           </a:bodyPr>
           <a:lstStyle/>
@@ -3874,10 +3892,34 @@
                 <a:tableStyleId>{5C22544A-7EE6-4342-B048-85BDC9FD1C3A}</a:tableStyleId>
               </a:tblPr>
               <a:tblGrid>
-                <a:gridCol w="1757362"/>
-                <a:gridCol w="3514725"/>
-                <a:gridCol w="3954065"/>
-                <a:gridCol w="2020966"/>
+                <a:gridCol w="1757362">
+                  <a:extLst>
+                    <a:ext uri="{9D8B030D-6E8A-4147-A177-3AD203B41FA5}">
+                      <a16:colId xmlns:a16="http://schemas.microsoft.com/office/drawing/2014/main" val="20000"/>
+                    </a:ext>
+                  </a:extLst>
+                </a:gridCol>
+                <a:gridCol w="3514725">
+                  <a:extLst>
+                    <a:ext uri="{9D8B030D-6E8A-4147-A177-3AD203B41FA5}">
+                      <a16:colId xmlns:a16="http://schemas.microsoft.com/office/drawing/2014/main" val="20001"/>
+                    </a:ext>
+                  </a:extLst>
+                </a:gridCol>
+                <a:gridCol w="3954065">
+                  <a:extLst>
+                    <a:ext uri="{9D8B030D-6E8A-4147-A177-3AD203B41FA5}">
+                      <a16:colId xmlns:a16="http://schemas.microsoft.com/office/drawing/2014/main" val="20002"/>
+                    </a:ext>
+                  </a:extLst>
+                </a:gridCol>
+                <a:gridCol w="2020966">
+                  <a:extLst>
+                    <a:ext uri="{9D8B030D-6E8A-4147-A177-3AD203B41FA5}">
+                      <a16:colId xmlns:a16="http://schemas.microsoft.com/office/drawing/2014/main" val="20003"/>
+                    </a:ext>
+                  </a:extLst>
+                </a:gridCol>
               </a:tblGrid>
               <a:tr h="457200">
                 <a:tc>
@@ -3972,11 +4014,16 @@
                     </a:solidFill>
                   </a:tcPr>
                 </a:tc>
+                <a:extLst>
+                  <a:ext uri="{0D108BD9-81ED-4DB2-BD59-A6C34878D82A}">
+                    <a16:rowId xmlns:a16="http://schemas.microsoft.com/office/drawing/2014/main" val="10000"/>
+                  </a:ext>
+                </a:extLst>
               </a:tr>
               <a:tr h="457200">
                 <a:tc>
                   <a:txBody>
-                    <a:bodyPr tIns="36576" bIns="36576"/>
+                    <a:bodyPr/>
                     <a:lstStyle/>
                     <a:p>
                       <a:pPr algn="l"/>
@@ -3999,7 +4046,7 @@
                 </a:tc>
                 <a:tc>
                   <a:txBody>
-                    <a:bodyPr tIns="36576" bIns="36576"/>
+                    <a:bodyPr/>
                     <a:lstStyle/>
                     <a:p>
                       <a:pPr algn="l"/>
@@ -4022,7 +4069,7 @@
                 </a:tc>
                 <a:tc>
                   <a:txBody>
-                    <a:bodyPr tIns="36576" bIns="36576"/>
+                    <a:bodyPr/>
                     <a:lstStyle/>
                     <a:p>
                       <a:pPr algn="l"/>
@@ -4045,7 +4092,7 @@
                 </a:tc>
                 <a:tc>
                   <a:txBody>
-                    <a:bodyPr tIns="36576" bIns="36576"/>
+                    <a:bodyPr/>
                     <a:lstStyle/>
                     <a:p>
                       <a:pPr algn="l"/>
@@ -4066,11 +4113,16 @@
                     </a:solidFill>
                   </a:tcPr>
                 </a:tc>
+                <a:extLst>
+                  <a:ext uri="{0D108BD9-81ED-4DB2-BD59-A6C34878D82A}">
+                    <a16:rowId xmlns:a16="http://schemas.microsoft.com/office/drawing/2014/main" val="10001"/>
+                  </a:ext>
+                </a:extLst>
               </a:tr>
               <a:tr h="457200">
                 <a:tc>
                   <a:txBody>
-                    <a:bodyPr tIns="36576" bIns="36576"/>
+                    <a:bodyPr/>
                     <a:lstStyle/>
                     <a:p>
                       <a:pPr algn="l"/>
@@ -4093,7 +4145,7 @@
                 </a:tc>
                 <a:tc>
                   <a:txBody>
-                    <a:bodyPr tIns="36576" bIns="36576"/>
+                    <a:bodyPr/>
                     <a:lstStyle/>
                     <a:p>
                       <a:pPr algn="l"/>
@@ -4116,7 +4168,7 @@
                 </a:tc>
                 <a:tc>
                   <a:txBody>
-                    <a:bodyPr tIns="36576" bIns="36576"/>
+                    <a:bodyPr/>
                     <a:lstStyle/>
                     <a:p>
                       <a:pPr algn="l"/>
@@ -4139,7 +4191,7 @@
                 </a:tc>
                 <a:tc>
                   <a:txBody>
-                    <a:bodyPr tIns="36576" bIns="36576"/>
+                    <a:bodyPr/>
                     <a:lstStyle/>
                     <a:p>
                       <a:pPr algn="l"/>
@@ -4160,11 +4212,16 @@
                     </a:solidFill>
                   </a:tcPr>
                 </a:tc>
+                <a:extLst>
+                  <a:ext uri="{0D108BD9-81ED-4DB2-BD59-A6C34878D82A}">
+                    <a16:rowId xmlns:a16="http://schemas.microsoft.com/office/drawing/2014/main" val="10002"/>
+                  </a:ext>
+                </a:extLst>
               </a:tr>
               <a:tr h="457200">
                 <a:tc>
                   <a:txBody>
-                    <a:bodyPr tIns="36576" bIns="36576"/>
+                    <a:bodyPr/>
                     <a:lstStyle/>
                     <a:p>
                       <a:pPr algn="l"/>
@@ -4187,7 +4244,7 @@
                 </a:tc>
                 <a:tc>
                   <a:txBody>
-                    <a:bodyPr tIns="36576" bIns="36576"/>
+                    <a:bodyPr/>
                     <a:lstStyle/>
                     <a:p>
                       <a:pPr algn="l"/>
@@ -4210,7 +4267,7 @@
                 </a:tc>
                 <a:tc>
                   <a:txBody>
-                    <a:bodyPr tIns="36576" bIns="36576"/>
+                    <a:bodyPr/>
                     <a:lstStyle/>
                     <a:p>
                       <a:pPr algn="l"/>
@@ -4233,7 +4290,7 @@
                 </a:tc>
                 <a:tc>
                   <a:txBody>
-                    <a:bodyPr tIns="36576" bIns="36576"/>
+                    <a:bodyPr/>
                     <a:lstStyle/>
                     <a:p>
                       <a:pPr algn="l"/>
@@ -4254,11 +4311,16 @@
                     </a:solidFill>
                   </a:tcPr>
                 </a:tc>
+                <a:extLst>
+                  <a:ext uri="{0D108BD9-81ED-4DB2-BD59-A6C34878D82A}">
+                    <a16:rowId xmlns:a16="http://schemas.microsoft.com/office/drawing/2014/main" val="10003"/>
+                  </a:ext>
+                </a:extLst>
               </a:tr>
               <a:tr h="457200">
                 <a:tc>
                   <a:txBody>
-                    <a:bodyPr tIns="36576" bIns="36576"/>
+                    <a:bodyPr/>
                     <a:lstStyle/>
                     <a:p>
                       <a:pPr algn="l"/>
@@ -4281,7 +4343,7 @@
                 </a:tc>
                 <a:tc>
                   <a:txBody>
-                    <a:bodyPr tIns="36576" bIns="36576"/>
+                    <a:bodyPr/>
                     <a:lstStyle/>
                     <a:p>
                       <a:pPr algn="l"/>
@@ -4304,7 +4366,7 @@
                 </a:tc>
                 <a:tc>
                   <a:txBody>
-                    <a:bodyPr tIns="36576" bIns="36576"/>
+                    <a:bodyPr/>
                     <a:lstStyle/>
                     <a:p>
                       <a:pPr algn="l"/>
@@ -4327,7 +4389,7 @@
                 </a:tc>
                 <a:tc>
                   <a:txBody>
-                    <a:bodyPr tIns="36576" bIns="36576"/>
+                    <a:bodyPr/>
                     <a:lstStyle/>
                     <a:p>
                       <a:pPr algn="l"/>
@@ -4348,11 +4410,16 @@
                     </a:solidFill>
                   </a:tcPr>
                 </a:tc>
+                <a:extLst>
+                  <a:ext uri="{0D108BD9-81ED-4DB2-BD59-A6C34878D82A}">
+                    <a16:rowId xmlns:a16="http://schemas.microsoft.com/office/drawing/2014/main" val="10004"/>
+                  </a:ext>
+                </a:extLst>
               </a:tr>
               <a:tr h="457200">
                 <a:tc>
                   <a:txBody>
-                    <a:bodyPr tIns="36576" bIns="36576"/>
+                    <a:bodyPr/>
                     <a:lstStyle/>
                     <a:p>
                       <a:pPr algn="l"/>
@@ -4375,7 +4442,7 @@
                 </a:tc>
                 <a:tc>
                   <a:txBody>
-                    <a:bodyPr tIns="36576" bIns="36576"/>
+                    <a:bodyPr/>
                     <a:lstStyle/>
                     <a:p>
                       <a:pPr algn="l"/>
@@ -4398,7 +4465,7 @@
                 </a:tc>
                 <a:tc>
                   <a:txBody>
-                    <a:bodyPr tIns="36576" bIns="36576"/>
+                    <a:bodyPr/>
                     <a:lstStyle/>
                     <a:p>
                       <a:pPr algn="l"/>
@@ -4421,7 +4488,7 @@
                 </a:tc>
                 <a:tc>
                   <a:txBody>
-                    <a:bodyPr tIns="36576" bIns="36576"/>
+                    <a:bodyPr/>
                     <a:lstStyle/>
                     <a:p>
                       <a:pPr algn="l"/>
@@ -4442,11 +4509,16 @@
                     </a:solidFill>
                   </a:tcPr>
                 </a:tc>
+                <a:extLst>
+                  <a:ext uri="{0D108BD9-81ED-4DB2-BD59-A6C34878D82A}">
+                    <a16:rowId xmlns:a16="http://schemas.microsoft.com/office/drawing/2014/main" val="10005"/>
+                  </a:ext>
+                </a:extLst>
               </a:tr>
               <a:tr h="457200">
                 <a:tc>
                   <a:txBody>
-                    <a:bodyPr tIns="36576" bIns="36576"/>
+                    <a:bodyPr/>
                     <a:lstStyle/>
                     <a:p>
                       <a:pPr algn="l"/>
@@ -4469,7 +4541,7 @@
                 </a:tc>
                 <a:tc>
                   <a:txBody>
-                    <a:bodyPr tIns="36576" bIns="36576"/>
+                    <a:bodyPr/>
                     <a:lstStyle/>
                     <a:p>
                       <a:pPr algn="l"/>
@@ -4492,7 +4564,7 @@
                 </a:tc>
                 <a:tc>
                   <a:txBody>
-                    <a:bodyPr tIns="36576" bIns="36576"/>
+                    <a:bodyPr/>
                     <a:lstStyle/>
                     <a:p>
                       <a:pPr algn="l"/>
@@ -4515,7 +4587,7 @@
                 </a:tc>
                 <a:tc>
                   <a:txBody>
-                    <a:bodyPr tIns="36576" bIns="36576"/>
+                    <a:bodyPr/>
                     <a:lstStyle/>
                     <a:p>
                       <a:pPr algn="l"/>
@@ -4536,6 +4608,11 @@
                     </a:solidFill>
                   </a:tcPr>
                 </a:tc>
+                <a:extLst>
+                  <a:ext uri="{0D108BD9-81ED-4DB2-BD59-A6C34878D82A}">
+                    <a16:rowId xmlns:a16="http://schemas.microsoft.com/office/drawing/2014/main" val="10006"/>
+                  </a:ext>
+                </a:extLst>
               </a:tr>
             </a:tbl>
           </a:graphicData>
@@ -4582,6 +4659,7 @@
           <a:lstStyle/>
           <a:p>
             <a:pPr algn="ctr"/>
+            <a:endParaRPr/>
           </a:p>
         </p:txBody>
       </p:sp>
@@ -4602,7 +4680,7 @@
           <a:noFill/>
         </p:spPr>
         <p:txBody>
-          <a:bodyPr wrap="square" lIns="0" rIns="0" tIns="0" bIns="0" anchor="t">
+          <a:bodyPr wrap="square" lIns="0" tIns="0" rIns="0" bIns="0" anchor="t">
             <a:spAutoFit/>
           </a:bodyPr>
           <a:lstStyle/>
@@ -4637,7 +4715,7 @@
           <a:noFill/>
         </p:spPr>
         <p:txBody>
-          <a:bodyPr wrap="square" lIns="0" rIns="0" tIns="0" bIns="0" anchor="t">
+          <a:bodyPr wrap="square" lIns="0" tIns="0" rIns="0" bIns="0" anchor="t">
             <a:spAutoFit/>
           </a:bodyPr>
           <a:lstStyle/>
@@ -4664,7 +4742,7 @@
 </file>
 
 <file path=ppt/slides/slide11.xml><?xml version="1.0" encoding="utf-8"?>
-<p:sld xmlns:a="http://schemas.openxmlformats.org/drawingml/2006/main" xmlns:p="http://schemas.openxmlformats.org/presentationml/2006/main" xmlns:r="http://schemas.openxmlformats.org/officeDocument/2006/relationships">
+<p:sld xmlns:a="http://schemas.openxmlformats.org/drawingml/2006/main" xmlns:r="http://schemas.openxmlformats.org/officeDocument/2006/relationships" xmlns:p="http://schemas.openxmlformats.org/presentationml/2006/main">
   <p:cSld>
     <p:spTree>
       <p:nvGrpSpPr>
@@ -4672,7 +4750,14 @@
         <p:cNvGrpSpPr/>
         <p:nvPr/>
       </p:nvGrpSpPr>
-      <p:grpSpPr/>
+      <p:grpSpPr>
+        <a:xfrm>
+          <a:off x="0" y="0"/>
+          <a:ext cx="0" cy="0"/>
+          <a:chOff x="0" y="0"/>
+          <a:chExt cx="0" cy="0"/>
+        </a:xfrm>
+      </p:grpSpPr>
       <p:sp>
         <p:nvSpPr>
           <p:cNvPr id="2" name="Rectangle 1"/>
@@ -4714,6 +4799,7 @@
           <a:lstStyle/>
           <a:p>
             <a:pPr algn="ctr"/>
+            <a:endParaRPr/>
           </a:p>
         </p:txBody>
       </p:sp>
@@ -4734,7 +4820,7 @@
           <a:noFill/>
         </p:spPr>
         <p:txBody>
-          <a:bodyPr wrap="square" lIns="0" rIns="0" tIns="0" bIns="0" anchor="ctr">
+          <a:bodyPr wrap="square" lIns="0" tIns="0" rIns="0" bIns="0" anchor="ctr">
             <a:spAutoFit/>
           </a:bodyPr>
           <a:lstStyle/>
@@ -4769,7 +4855,7 @@
           <a:noFill/>
         </p:spPr>
         <p:txBody>
-          <a:bodyPr wrap="square" lIns="0" rIns="0" tIns="0" bIns="0" anchor="ctr">
+          <a:bodyPr wrap="square" lIns="0" tIns="0" rIns="0" bIns="0" anchor="ctr">
             <a:spAutoFit/>
           </a:bodyPr>
           <a:lstStyle/>
@@ -4804,7 +4890,7 @@
           <a:noFill/>
         </p:spPr>
         <p:txBody>
-          <a:bodyPr wrap="square" lIns="0" rIns="0" tIns="0" bIns="0" anchor="t">
+          <a:bodyPr wrap="square" lIns="0" tIns="0" rIns="0" bIns="0" anchor="t">
             <a:spAutoFit/>
           </a:bodyPr>
           <a:lstStyle/>
@@ -4831,7 +4917,7 @@
         <p:spPr>
           <a:xfrm>
             <a:off x="457200" y="914400"/>
-            <a:ext cx="10972800" cy="548640"/>
+            <a:ext cx="10972800" cy="430887"/>
           </a:xfrm>
           <a:prstGeom prst="rect">
             <a:avLst/>
@@ -4839,21 +4925,72 @@
           <a:noFill/>
         </p:spPr>
         <p:txBody>
-          <a:bodyPr wrap="square" lIns="0" rIns="0" tIns="0" bIns="0" anchor="t">
+          <a:bodyPr wrap="square" lIns="0" tIns="0" rIns="0" bIns="0" anchor="t">
             <a:spAutoFit/>
           </a:bodyPr>
           <a:lstStyle/>
           <a:p>
             <a:pPr algn="l"/>
             <a:r>
-              <a:rPr sz="2800" b="1">
+              <a:rPr sz="2800" b="1" dirty="0">
                 <a:solidFill>
                   <a:srgbClr val="0B1F3A"/>
                 </a:solidFill>
                 <a:latin typeface="맑은 고딕"/>
               </a:rPr>
-              <a:t>Product Roadmap — 12개월 추가 개발 계획</a:t>
-            </a:r>
+              <a:t>Product Roadmap —</a:t>
+            </a:r>
+            <a:r>
+              <a:rPr sz="2800" b="1" dirty="0" err="1">
+                <a:solidFill>
+                  <a:srgbClr val="0B1F3A"/>
+                </a:solidFill>
+                <a:latin typeface="맑은 고딕"/>
+              </a:rPr>
+              <a:t>추가</a:t>
+            </a:r>
+            <a:r>
+              <a:rPr sz="2800" b="1" dirty="0">
+                <a:solidFill>
+                  <a:srgbClr val="0B1F3A"/>
+                </a:solidFill>
+                <a:latin typeface="맑은 고딕"/>
+              </a:rPr>
+              <a:t> </a:t>
+            </a:r>
+            <a:r>
+              <a:rPr sz="2800" b="1" dirty="0" err="1">
+                <a:solidFill>
+                  <a:srgbClr val="0B1F3A"/>
+                </a:solidFill>
+                <a:latin typeface="맑은 고딕"/>
+              </a:rPr>
+              <a:t>개발</a:t>
+            </a:r>
+            <a:r>
+              <a:rPr sz="2800" b="1" dirty="0">
+                <a:solidFill>
+                  <a:srgbClr val="0B1F3A"/>
+                </a:solidFill>
+                <a:latin typeface="맑은 고딕"/>
+              </a:rPr>
+              <a:t> </a:t>
+            </a:r>
+            <a:r>
+              <a:rPr sz="2800" b="1" dirty="0" err="1">
+                <a:solidFill>
+                  <a:srgbClr val="0B1F3A"/>
+                </a:solidFill>
+                <a:latin typeface="맑은 고딕"/>
+              </a:rPr>
+              <a:t>계획</a:t>
+            </a:r>
+            <a:endParaRPr sz="2800" b="1" dirty="0">
+              <a:solidFill>
+                <a:srgbClr val="0B1F3A"/>
+              </a:solidFill>
+              <a:latin typeface="맑은 고딕"/>
+            </a:endParaRPr>
           </a:p>
         </p:txBody>
       </p:sp>
@@ -4874,7 +5011,7 @@
           <a:noFill/>
         </p:spPr>
         <p:txBody>
-          <a:bodyPr wrap="square" lIns="0" rIns="0" tIns="0" bIns="0" anchor="t">
+          <a:bodyPr wrap="square" lIns="0" tIns="0" rIns="0" bIns="0" anchor="t">
             <a:spAutoFit/>
           </a:bodyPr>
           <a:lstStyle/>
@@ -4933,6 +5070,7 @@
           <a:lstStyle/>
           <a:p>
             <a:pPr algn="ctr"/>
+            <a:endParaRPr/>
           </a:p>
         </p:txBody>
       </p:sp>
@@ -4977,6 +5115,7 @@
           <a:lstStyle/>
           <a:p>
             <a:pPr algn="ctr"/>
+            <a:endParaRPr/>
           </a:p>
         </p:txBody>
       </p:sp>
@@ -4997,7 +5136,7 @@
           <a:noFill/>
         </p:spPr>
         <p:txBody>
-          <a:bodyPr wrap="square" lIns="0" rIns="0" tIns="0" bIns="0" anchor="ctr">
+          <a:bodyPr wrap="square" lIns="0" tIns="0" rIns="0" bIns="0" anchor="ctr">
             <a:spAutoFit/>
           </a:bodyPr>
           <a:lstStyle/>
@@ -5021,11 +5160,17 @@
           <p:cNvGraphicFramePr>
             <a:graphicFrameLocks noGrp="1"/>
           </p:cNvGraphicFramePr>
-          <p:nvPr/>
+          <p:nvPr>
+            <p:extLst>
+              <p:ext uri="{D42A27DB-BD31-4B8C-83A1-F6EECF244321}">
+                <p14:modId xmlns:p14="http://schemas.microsoft.com/office/powerpoint/2010/main" val="1887834739"/>
+              </p:ext>
+            </p:extLst>
+          </p:nvPr>
         </p:nvGraphicFramePr>
         <p:xfrm>
           <a:off x="457200" y="2194560"/>
-          <a:ext cx="11247120" cy="4114800"/>
+          <a:ext cx="10058400" cy="4114800"/>
         </p:xfrm>
         <a:graphic>
           <a:graphicData uri="http://schemas.openxmlformats.org/drawingml/2006/table">
@@ -5034,35 +5179,29 @@
                 <a:tableStyleId>{5C22544A-7EE6-4342-B048-85BDC9FD1C3A}</a:tableStyleId>
               </a:tblPr>
               <a:tblGrid>
-                <a:gridCol w="1188720"/>
-                <a:gridCol w="1645920"/>
-                <a:gridCol w="6126480"/>
-                <a:gridCol w="2286000"/>
+                <a:gridCol w="1645920">
+                  <a:extLst>
+                    <a:ext uri="{9D8B030D-6E8A-4147-A177-3AD203B41FA5}">
+                      <a16:colId xmlns:a16="http://schemas.microsoft.com/office/drawing/2014/main" val="20001"/>
+                    </a:ext>
+                  </a:extLst>
+                </a:gridCol>
+                <a:gridCol w="6126480">
+                  <a:extLst>
+                    <a:ext uri="{9D8B030D-6E8A-4147-A177-3AD203B41FA5}">
+                      <a16:colId xmlns:a16="http://schemas.microsoft.com/office/drawing/2014/main" val="20002"/>
+                    </a:ext>
+                  </a:extLst>
+                </a:gridCol>
+                <a:gridCol w="2286000">
+                  <a:extLst>
+                    <a:ext uri="{9D8B030D-6E8A-4147-A177-3AD203B41FA5}">
+                      <a16:colId xmlns:a16="http://schemas.microsoft.com/office/drawing/2014/main" val="20003"/>
+                    </a:ext>
+                  </a:extLst>
+                </a:gridCol>
               </a:tblGrid>
               <a:tr h="587828">
-                <a:tc>
-                  <a:txBody>
-                    <a:bodyPr/>
-                    <a:lstStyle/>
-                    <a:p>
-                      <a:pPr algn="l"/>
-                      <a:r>
-                        <a:rPr sz="1000" b="1">
-                          <a:solidFill>
-                            <a:srgbClr val="FFFFFF"/>
-                          </a:solidFill>
-                          <a:latin typeface="맑은 고딕"/>
-                        </a:rPr>
-                        <a:t>분기</a:t>
-                      </a:r>
-                    </a:p>
-                  </a:txBody>
-                  <a:tcPr>
-                    <a:solidFill>
-                      <a:srgbClr val="0B1F3A"/>
-                    </a:solidFill>
-                  </a:tcPr>
-                </a:tc>
                 <a:tc>
                   <a:txBody>
                     <a:bodyPr/>
@@ -5132,34 +5271,16 @@
                     </a:solidFill>
                   </a:tcPr>
                 </a:tc>
+                <a:extLst>
+                  <a:ext uri="{0D108BD9-81ED-4DB2-BD59-A6C34878D82A}">
+                    <a16:rowId xmlns:a16="http://schemas.microsoft.com/office/drawing/2014/main" val="10000"/>
+                  </a:ext>
+                </a:extLst>
               </a:tr>
               <a:tr h="587828">
                 <a:tc>
                   <a:txBody>
-                    <a:bodyPr tIns="36576" bIns="36576"/>
-                    <a:lstStyle/>
-                    <a:p>
-                      <a:pPr algn="l"/>
-                      <a:r>
-                        <a:rPr sz="950">
-                          <a:solidFill>
-                            <a:srgbClr val="1A1F2C"/>
-                          </a:solidFill>
-                          <a:latin typeface="맑은 고딕"/>
-                        </a:rPr>
-                        <a:t>Q2 2026</a:t>
-                      </a:r>
-                    </a:p>
-                  </a:txBody>
-                  <a:tcPr>
-                    <a:solidFill>
-                      <a:srgbClr val="FFFFFF"/>
-                    </a:solidFill>
-                  </a:tcPr>
-                </a:tc>
-                <a:tc>
-                  <a:txBody>
-                    <a:bodyPr tIns="36576" bIns="36576"/>
+                    <a:bodyPr/>
                     <a:lstStyle/>
                     <a:p>
                       <a:pPr algn="l"/>
@@ -5182,7 +5303,7 @@
                 </a:tc>
                 <a:tc>
                   <a:txBody>
-                    <a:bodyPr tIns="36576" bIns="36576"/>
+                    <a:bodyPr/>
                     <a:lstStyle/>
                     <a:p>
                       <a:pPr algn="l"/>
@@ -5205,7 +5326,7 @@
                 </a:tc>
                 <a:tc>
                   <a:txBody>
-                    <a:bodyPr tIns="36576" bIns="36576"/>
+                    <a:bodyPr/>
                     <a:lstStyle/>
                     <a:p>
                       <a:pPr algn="l"/>
@@ -5226,34 +5347,16 @@
                     </a:solidFill>
                   </a:tcPr>
                 </a:tc>
+                <a:extLst>
+                  <a:ext uri="{0D108BD9-81ED-4DB2-BD59-A6C34878D82A}">
+                    <a16:rowId xmlns:a16="http://schemas.microsoft.com/office/drawing/2014/main" val="10001"/>
+                  </a:ext>
+                </a:extLst>
               </a:tr>
               <a:tr h="587828">
                 <a:tc>
                   <a:txBody>
-                    <a:bodyPr tIns="36576" bIns="36576"/>
-                    <a:lstStyle/>
-                    <a:p>
-                      <a:pPr algn="l"/>
-                      <a:r>
-                        <a:rPr sz="950">
-                          <a:solidFill>
-                            <a:srgbClr val="1A1F2C"/>
-                          </a:solidFill>
-                          <a:latin typeface="맑은 고딕"/>
-                        </a:rPr>
-                        <a:t>Q3 2026</a:t>
-                      </a:r>
-                    </a:p>
-                  </a:txBody>
-                  <a:tcPr>
-                    <a:solidFill>
-                      <a:srgbClr val="F7F8FB"/>
-                    </a:solidFill>
-                  </a:tcPr>
-                </a:tc>
-                <a:tc>
-                  <a:txBody>
-                    <a:bodyPr tIns="36576" bIns="36576"/>
+                    <a:bodyPr/>
                     <a:lstStyle/>
                     <a:p>
                       <a:pPr algn="l"/>
@@ -5276,7 +5379,7 @@
                 </a:tc>
                 <a:tc>
                   <a:txBody>
-                    <a:bodyPr tIns="36576" bIns="36576"/>
+                    <a:bodyPr/>
                     <a:lstStyle/>
                     <a:p>
                       <a:pPr algn="l"/>
@@ -5299,7 +5402,7 @@
                 </a:tc>
                 <a:tc>
                   <a:txBody>
-                    <a:bodyPr tIns="36576" bIns="36576"/>
+                    <a:bodyPr/>
                     <a:lstStyle/>
                     <a:p>
                       <a:pPr algn="l"/>
@@ -5320,34 +5423,16 @@
                     </a:solidFill>
                   </a:tcPr>
                 </a:tc>
+                <a:extLst>
+                  <a:ext uri="{0D108BD9-81ED-4DB2-BD59-A6C34878D82A}">
+                    <a16:rowId xmlns:a16="http://schemas.microsoft.com/office/drawing/2014/main" val="10002"/>
+                  </a:ext>
+                </a:extLst>
               </a:tr>
               <a:tr h="587828">
                 <a:tc>
                   <a:txBody>
-                    <a:bodyPr tIns="36576" bIns="36576"/>
-                    <a:lstStyle/>
-                    <a:p>
-                      <a:pPr algn="l"/>
-                      <a:r>
-                        <a:rPr sz="950">
-                          <a:solidFill>
-                            <a:srgbClr val="1A1F2C"/>
-                          </a:solidFill>
-                          <a:latin typeface="맑은 고딕"/>
-                        </a:rPr>
-                        <a:t>Q4 2026</a:t>
-                      </a:r>
-                    </a:p>
-                  </a:txBody>
-                  <a:tcPr>
-                    <a:solidFill>
-                      <a:srgbClr val="FFFFFF"/>
-                    </a:solidFill>
-                  </a:tcPr>
-                </a:tc>
-                <a:tc>
-                  <a:txBody>
-                    <a:bodyPr tIns="36576" bIns="36576"/>
+                    <a:bodyPr/>
                     <a:lstStyle/>
                     <a:p>
                       <a:pPr algn="l"/>
@@ -5370,7 +5455,7 @@
                 </a:tc>
                 <a:tc>
                   <a:txBody>
-                    <a:bodyPr tIns="36576" bIns="36576"/>
+                    <a:bodyPr/>
                     <a:lstStyle/>
                     <a:p>
                       <a:pPr algn="l"/>
@@ -5393,7 +5478,7 @@
                 </a:tc>
                 <a:tc>
                   <a:txBody>
-                    <a:bodyPr tIns="36576" bIns="36576"/>
+                    <a:bodyPr/>
                     <a:lstStyle/>
                     <a:p>
                       <a:pPr algn="l"/>
@@ -5414,34 +5499,16 @@
                     </a:solidFill>
                   </a:tcPr>
                 </a:tc>
+                <a:extLst>
+                  <a:ext uri="{0D108BD9-81ED-4DB2-BD59-A6C34878D82A}">
+                    <a16:rowId xmlns:a16="http://schemas.microsoft.com/office/drawing/2014/main" val="10003"/>
+                  </a:ext>
+                </a:extLst>
               </a:tr>
               <a:tr h="587828">
                 <a:tc>
                   <a:txBody>
-                    <a:bodyPr tIns="36576" bIns="36576"/>
-                    <a:lstStyle/>
-                    <a:p>
-                      <a:pPr algn="l"/>
-                      <a:r>
-                        <a:rPr sz="950">
-                          <a:solidFill>
-                            <a:srgbClr val="1A1F2C"/>
-                          </a:solidFill>
-                          <a:latin typeface="맑은 고딕"/>
-                        </a:rPr>
-                        <a:t>Q1 2027</a:t>
-                      </a:r>
-                    </a:p>
-                  </a:txBody>
-                  <a:tcPr>
-                    <a:solidFill>
-                      <a:srgbClr val="F7F8FB"/>
-                    </a:solidFill>
-                  </a:tcPr>
-                </a:tc>
-                <a:tc>
-                  <a:txBody>
-                    <a:bodyPr tIns="36576" bIns="36576"/>
+                    <a:bodyPr/>
                     <a:lstStyle/>
                     <a:p>
                       <a:pPr algn="l"/>
@@ -5464,12 +5531,12 @@
                 </a:tc>
                 <a:tc>
                   <a:txBody>
-                    <a:bodyPr tIns="36576" bIns="36576"/>
+                    <a:bodyPr/>
                     <a:lstStyle/>
                     <a:p>
                       <a:pPr algn="l"/>
                       <a:r>
-                        <a:rPr sz="950">
+                        <a:rPr sz="950" dirty="0">
                           <a:solidFill>
                             <a:srgbClr val="1A1F2C"/>
                           </a:solidFill>
@@ -5487,7 +5554,7 @@
                 </a:tc>
                 <a:tc>
                   <a:txBody>
-                    <a:bodyPr tIns="36576" bIns="36576"/>
+                    <a:bodyPr/>
                     <a:lstStyle/>
                     <a:p>
                       <a:pPr algn="l"/>
@@ -5508,34 +5575,16 @@
                     </a:solidFill>
                   </a:tcPr>
                 </a:tc>
+                <a:extLst>
+                  <a:ext uri="{0D108BD9-81ED-4DB2-BD59-A6C34878D82A}">
+                    <a16:rowId xmlns:a16="http://schemas.microsoft.com/office/drawing/2014/main" val="10004"/>
+                  </a:ext>
+                </a:extLst>
               </a:tr>
               <a:tr h="587828">
                 <a:tc>
                   <a:txBody>
-                    <a:bodyPr tIns="36576" bIns="36576"/>
-                    <a:lstStyle/>
-                    <a:p>
-                      <a:pPr algn="l"/>
-                      <a:r>
-                        <a:rPr sz="950">
-                          <a:solidFill>
-                            <a:srgbClr val="1A1F2C"/>
-                          </a:solidFill>
-                          <a:latin typeface="맑은 고딕"/>
-                        </a:rPr>
-                        <a:t>Q2 2027</a:t>
-                      </a:r>
-                    </a:p>
-                  </a:txBody>
-                  <a:tcPr>
-                    <a:solidFill>
-                      <a:srgbClr val="FFFFFF"/>
-                    </a:solidFill>
-                  </a:tcPr>
-                </a:tc>
-                <a:tc>
-                  <a:txBody>
-                    <a:bodyPr tIns="36576" bIns="36576"/>
+                    <a:bodyPr/>
                     <a:lstStyle/>
                     <a:p>
                       <a:pPr algn="l"/>
@@ -5558,7 +5607,7 @@
                 </a:tc>
                 <a:tc>
                   <a:txBody>
-                    <a:bodyPr tIns="36576" bIns="36576"/>
+                    <a:bodyPr/>
                     <a:lstStyle/>
                     <a:p>
                       <a:pPr algn="l"/>
@@ -5581,7 +5630,7 @@
                 </a:tc>
                 <a:tc>
                   <a:txBody>
-                    <a:bodyPr tIns="36576" bIns="36576"/>
+                    <a:bodyPr/>
                     <a:lstStyle/>
                     <a:p>
                       <a:pPr algn="l"/>
@@ -5602,23 +5651,34 @@
                     </a:solidFill>
                   </a:tcPr>
                 </a:tc>
+                <a:extLst>
+                  <a:ext uri="{0D108BD9-81ED-4DB2-BD59-A6C34878D82A}">
+                    <a16:rowId xmlns:a16="http://schemas.microsoft.com/office/drawing/2014/main" val="10005"/>
+                  </a:ext>
+                </a:extLst>
               </a:tr>
               <a:tr h="587832">
                 <a:tc>
                   <a:txBody>
-                    <a:bodyPr tIns="36576" bIns="36576"/>
+                    <a:bodyPr/>
                     <a:lstStyle/>
                     <a:p>
                       <a:pPr algn="l"/>
                       <a:r>
-                        <a:rPr sz="950">
+                        <a:rPr sz="950" dirty="0" err="1">
                           <a:solidFill>
                             <a:srgbClr val="1A1F2C"/>
                           </a:solidFill>
                           <a:latin typeface="맑은 고딕"/>
                         </a:rPr>
-                        <a:t>Q3 2027+</a:t>
+                        <a:t>글로벌</a:t>
                       </a:r>
+                      <a:endParaRPr sz="950" dirty="0">
+                        <a:solidFill>
+                          <a:srgbClr val="1A1F2C"/>
+                        </a:solidFill>
+                        <a:latin typeface="맑은 고딕"/>
+                      </a:endParaRPr>
                     </a:p>
                   </a:txBody>
                   <a:tcPr>
@@ -5629,30 +5689,7 @@
                 </a:tc>
                 <a:tc>
                   <a:txBody>
-                    <a:bodyPr tIns="36576" bIns="36576"/>
-                    <a:lstStyle/>
-                    <a:p>
-                      <a:pPr algn="l"/>
-                      <a:r>
-                        <a:rPr sz="950">
-                          <a:solidFill>
-                            <a:srgbClr val="1A1F2C"/>
-                          </a:solidFill>
-                          <a:latin typeface="맑은 고딕"/>
-                        </a:rPr>
-                        <a:t>글로벌</a:t>
-                      </a:r>
-                    </a:p>
-                  </a:txBody>
-                  <a:tcPr>
-                    <a:solidFill>
-                      <a:srgbClr val="F7F8FB"/>
-                    </a:solidFill>
-                  </a:tcPr>
-                </a:tc>
-                <a:tc>
-                  <a:txBody>
-                    <a:bodyPr tIns="36576" bIns="36576"/>
+                    <a:bodyPr/>
                     <a:lstStyle/>
                     <a:p>
                       <a:pPr algn="l"/>
@@ -5675,19 +5712,43 @@
                 </a:tc>
                 <a:tc>
                   <a:txBody>
-                    <a:bodyPr tIns="36576" bIns="36576"/>
+                    <a:bodyPr/>
                     <a:lstStyle/>
                     <a:p>
                       <a:pPr algn="l"/>
                       <a:r>
-                        <a:rPr sz="950">
+                        <a:rPr sz="950" dirty="0" err="1">
                           <a:solidFill>
                             <a:srgbClr val="1A1F2C"/>
                           </a:solidFill>
                           <a:latin typeface="맑은 고딕"/>
                         </a:rPr>
-                        <a:t>일본 파일럿</a:t>
+                        <a:t>일본</a:t>
                       </a:r>
+                      <a:r>
+                        <a:rPr sz="950" dirty="0">
+                          <a:solidFill>
+                            <a:srgbClr val="1A1F2C"/>
+                          </a:solidFill>
+                          <a:latin typeface="맑은 고딕"/>
+                        </a:rPr>
+                        <a:t> </a:t>
+                      </a:r>
+                      <a:r>
+                        <a:rPr sz="950" dirty="0" err="1">
+                          <a:solidFill>
+                            <a:srgbClr val="1A1F2C"/>
+                          </a:solidFill>
+                          <a:latin typeface="맑은 고딕"/>
+                        </a:rPr>
+                        <a:t>파일럿</a:t>
+                      </a:r>
+                      <a:endParaRPr sz="950" dirty="0">
+                        <a:solidFill>
+                          <a:srgbClr val="1A1F2C"/>
+                        </a:solidFill>
+                        <a:latin typeface="맑은 고딕"/>
+                      </a:endParaRPr>
                     </a:p>
                   </a:txBody>
                   <a:tcPr>
@@ -5696,6 +5757,11 @@
                     </a:solidFill>
                   </a:tcPr>
                 </a:tc>
+                <a:extLst>
+                  <a:ext uri="{0D108BD9-81ED-4DB2-BD59-A6C34878D82A}">
+                    <a16:rowId xmlns:a16="http://schemas.microsoft.com/office/drawing/2014/main" val="10006"/>
+                  </a:ext>
+                </a:extLst>
               </a:tr>
             </a:tbl>
           </a:graphicData>
@@ -5710,7 +5776,7 @@
 </file>
 
 <file path=ppt/slides/slide12.xml><?xml version="1.0" encoding="utf-8"?>
-<p:sld xmlns:a="http://schemas.openxmlformats.org/drawingml/2006/main" xmlns:p="http://schemas.openxmlformats.org/presentationml/2006/main" xmlns:r="http://schemas.openxmlformats.org/officeDocument/2006/relationships">
+<p:sld xmlns:a="http://schemas.openxmlformats.org/drawingml/2006/main" xmlns:r="http://schemas.openxmlformats.org/officeDocument/2006/relationships" xmlns:p="http://schemas.openxmlformats.org/presentationml/2006/main">
   <p:cSld>
     <p:spTree>
       <p:nvGrpSpPr>
@@ -5718,7 +5784,14 @@
         <p:cNvGrpSpPr/>
         <p:nvPr/>
       </p:nvGrpSpPr>
-      <p:grpSpPr/>
+      <p:grpSpPr>
+        <a:xfrm>
+          <a:off x="0" y="0"/>
+          <a:ext cx="0" cy="0"/>
+          <a:chOff x="0" y="0"/>
+          <a:chExt cx="0" cy="0"/>
+        </a:xfrm>
+      </p:grpSpPr>
       <p:sp>
         <p:nvSpPr>
           <p:cNvPr id="2" name="Rectangle 1"/>
@@ -5760,6 +5833,7 @@
           <a:lstStyle/>
           <a:p>
             <a:pPr algn="ctr"/>
+            <a:endParaRPr/>
           </a:p>
         </p:txBody>
       </p:sp>
@@ -5780,7 +5854,7 @@
           <a:noFill/>
         </p:spPr>
         <p:txBody>
-          <a:bodyPr wrap="square" lIns="0" rIns="0" tIns="0" bIns="0" anchor="ctr">
+          <a:bodyPr wrap="square" lIns="0" tIns="0" rIns="0" bIns="0" anchor="ctr">
             <a:spAutoFit/>
           </a:bodyPr>
           <a:lstStyle/>
@@ -5815,7 +5889,7 @@
           <a:noFill/>
         </p:spPr>
         <p:txBody>
-          <a:bodyPr wrap="square" lIns="0" rIns="0" tIns="0" bIns="0" anchor="ctr">
+          <a:bodyPr wrap="square" lIns="0" tIns="0" rIns="0" bIns="0" anchor="ctr">
             <a:spAutoFit/>
           </a:bodyPr>
           <a:lstStyle/>
@@ -5850,7 +5924,7 @@
           <a:noFill/>
         </p:spPr>
         <p:txBody>
-          <a:bodyPr wrap="square" lIns="0" rIns="0" tIns="0" bIns="0" anchor="t">
+          <a:bodyPr wrap="square" lIns="0" tIns="0" rIns="0" bIns="0" anchor="t">
             <a:spAutoFit/>
           </a:bodyPr>
           <a:lstStyle/>
@@ -5885,7 +5959,7 @@
           <a:noFill/>
         </p:spPr>
         <p:txBody>
-          <a:bodyPr wrap="square" lIns="0" rIns="0" tIns="0" bIns="0" anchor="t">
+          <a:bodyPr wrap="square" lIns="0" tIns="0" rIns="0" bIns="0" anchor="t">
             <a:spAutoFit/>
           </a:bodyPr>
           <a:lstStyle/>
@@ -5920,7 +5994,7 @@
           <a:noFill/>
         </p:spPr>
         <p:txBody>
-          <a:bodyPr wrap="square" lIns="0" rIns="0" tIns="0" bIns="0" anchor="t">
+          <a:bodyPr wrap="square" lIns="0" tIns="0" rIns="0" bIns="0" anchor="t">
             <a:spAutoFit/>
           </a:bodyPr>
           <a:lstStyle/>
@@ -5979,6 +6053,7 @@
           <a:lstStyle/>
           <a:p>
             <a:pPr algn="ctr"/>
+            <a:endParaRPr/>
           </a:p>
         </p:txBody>
       </p:sp>
@@ -6023,6 +6098,7 @@
           <a:lstStyle/>
           <a:p>
             <a:pPr algn="ctr"/>
+            <a:endParaRPr/>
           </a:p>
         </p:txBody>
       </p:sp>
@@ -6043,7 +6119,7 @@
           <a:noFill/>
         </p:spPr>
         <p:txBody>
-          <a:bodyPr wrap="square" lIns="0" rIns="0" tIns="0" bIns="0" anchor="ctr">
+          <a:bodyPr wrap="square" lIns="0" tIns="0" rIns="0" bIns="0" anchor="ctr">
             <a:spAutoFit/>
           </a:bodyPr>
           <a:lstStyle/>
@@ -6104,6 +6180,7 @@
           <a:lstStyle/>
           <a:p>
             <a:pPr algn="ctr"/>
+            <a:endParaRPr/>
           </a:p>
         </p:txBody>
       </p:sp>
@@ -6148,6 +6225,7 @@
           <a:lstStyle/>
           <a:p>
             <a:pPr algn="ctr"/>
+            <a:endParaRPr/>
           </a:p>
         </p:txBody>
       </p:sp>
@@ -6168,7 +6246,7 @@
           <a:noFill/>
         </p:spPr>
         <p:txBody>
-          <a:bodyPr wrap="square" lIns="0" rIns="0" tIns="0" bIns="0" anchor="t">
+          <a:bodyPr wrap="square" lIns="0" tIns="0" rIns="0" bIns="0" anchor="t">
             <a:spAutoFit/>
           </a:bodyPr>
           <a:lstStyle/>
@@ -6364,6 +6442,7 @@
           <a:lstStyle/>
           <a:p>
             <a:pPr algn="ctr"/>
+            <a:endParaRPr/>
           </a:p>
         </p:txBody>
       </p:sp>
@@ -6408,6 +6487,7 @@
           <a:lstStyle/>
           <a:p>
             <a:pPr algn="ctr"/>
+            <a:endParaRPr/>
           </a:p>
         </p:txBody>
       </p:sp>
@@ -6420,7 +6500,7 @@
         <p:spPr>
           <a:xfrm>
             <a:off x="6355080" y="2359152"/>
-            <a:ext cx="5303520" cy="365760"/>
+            <a:ext cx="5303520" cy="200055"/>
           </a:xfrm>
           <a:prstGeom prst="rect">
             <a:avLst/>
@@ -6428,21 +6508,36 @@
           <a:noFill/>
         </p:spPr>
         <p:txBody>
-          <a:bodyPr wrap="square" lIns="0" rIns="0" tIns="0" bIns="0" anchor="t">
+          <a:bodyPr wrap="square" lIns="0" tIns="0" rIns="0" bIns="0" anchor="t">
             <a:spAutoFit/>
           </a:bodyPr>
           <a:lstStyle/>
           <a:p>
             <a:pPr algn="l"/>
             <a:r>
-              <a:rPr sz="1300" b="1">
+              <a:rPr sz="1300" b="1" dirty="0">
                 <a:solidFill>
                   <a:srgbClr val="0B1F3A"/>
                 </a:solidFill>
                 <a:latin typeface="맑은 고딕"/>
               </a:rPr>
-              <a:t>Next 12개월 보강</a:t>
-            </a:r>
+              <a:t>Next </a:t>
+            </a:r>
+            <a:r>
+              <a:rPr sz="1300" b="1" dirty="0" err="1">
+                <a:solidFill>
+                  <a:srgbClr val="0B1F3A"/>
+                </a:solidFill>
+                <a:latin typeface="맑은 고딕"/>
+              </a:rPr>
+              <a:t>보강</a:t>
+            </a:r>
+            <a:endParaRPr sz="1300" b="1" dirty="0">
+              <a:solidFill>
+                <a:srgbClr val="0B1F3A"/>
+              </a:solidFill>
+              <a:latin typeface="맑은 고딕"/>
+            </a:endParaRPr>
           </a:p>
         </p:txBody>
       </p:sp>
@@ -6590,7 +6685,7 @@
 </file>
 
 <file path=ppt/slides/slide13.xml><?xml version="1.0" encoding="utf-8"?>
-<p:sld xmlns:a="http://schemas.openxmlformats.org/drawingml/2006/main" xmlns:p="http://schemas.openxmlformats.org/presentationml/2006/main" xmlns:r="http://schemas.openxmlformats.org/officeDocument/2006/relationships">
+<p:sld xmlns:a="http://schemas.openxmlformats.org/drawingml/2006/main" xmlns:r="http://schemas.openxmlformats.org/officeDocument/2006/relationships" xmlns:p="http://schemas.openxmlformats.org/presentationml/2006/main">
   <p:cSld>
     <p:spTree>
       <p:nvGrpSpPr>
@@ -6598,7 +6693,14 @@
         <p:cNvGrpSpPr/>
         <p:nvPr/>
       </p:nvGrpSpPr>
-      <p:grpSpPr/>
+      <p:grpSpPr>
+        <a:xfrm>
+          <a:off x="0" y="0"/>
+          <a:ext cx="0" cy="0"/>
+          <a:chOff x="0" y="0"/>
+          <a:chExt cx="0" cy="0"/>
+        </a:xfrm>
+      </p:grpSpPr>
       <p:sp>
         <p:nvSpPr>
           <p:cNvPr id="2" name="Rectangle 1"/>
@@ -6640,6 +6742,7 @@
           <a:lstStyle/>
           <a:p>
             <a:pPr algn="ctr"/>
+            <a:endParaRPr/>
           </a:p>
         </p:txBody>
       </p:sp>
@@ -6660,7 +6763,7 @@
           <a:noFill/>
         </p:spPr>
         <p:txBody>
-          <a:bodyPr wrap="square" lIns="0" rIns="0" tIns="0" bIns="0" anchor="ctr">
+          <a:bodyPr wrap="square" lIns="0" tIns="0" rIns="0" bIns="0" anchor="ctr">
             <a:spAutoFit/>
           </a:bodyPr>
           <a:lstStyle/>
@@ -6695,7 +6798,7 @@
           <a:noFill/>
         </p:spPr>
         <p:txBody>
-          <a:bodyPr wrap="square" lIns="0" rIns="0" tIns="0" bIns="0" anchor="ctr">
+          <a:bodyPr wrap="square" lIns="0" tIns="0" rIns="0" bIns="0" anchor="ctr">
             <a:spAutoFit/>
           </a:bodyPr>
           <a:lstStyle/>
@@ -6730,7 +6833,7 @@
           <a:noFill/>
         </p:spPr>
         <p:txBody>
-          <a:bodyPr wrap="square" lIns="0" rIns="0" tIns="0" bIns="0" anchor="t">
+          <a:bodyPr wrap="square" lIns="0" tIns="0" rIns="0" bIns="0" anchor="t">
             <a:spAutoFit/>
           </a:bodyPr>
           <a:lstStyle/>
@@ -6765,7 +6868,7 @@
           <a:noFill/>
         </p:spPr>
         <p:txBody>
-          <a:bodyPr wrap="square" lIns="0" rIns="0" tIns="0" bIns="0" anchor="t">
+          <a:bodyPr wrap="square" lIns="0" tIns="0" rIns="0" bIns="0" anchor="t">
             <a:spAutoFit/>
           </a:bodyPr>
           <a:lstStyle/>
@@ -6800,7 +6903,7 @@
           <a:noFill/>
         </p:spPr>
         <p:txBody>
-          <a:bodyPr wrap="square" lIns="0" rIns="0" tIns="0" bIns="0" anchor="t">
+          <a:bodyPr wrap="square" lIns="0" tIns="0" rIns="0" bIns="0" anchor="t">
             <a:spAutoFit/>
           </a:bodyPr>
           <a:lstStyle/>
@@ -6859,6 +6962,7 @@
           <a:lstStyle/>
           <a:p>
             <a:pPr algn="ctr"/>
+            <a:endParaRPr/>
           </a:p>
         </p:txBody>
       </p:sp>
@@ -6903,6 +7007,7 @@
           <a:lstStyle/>
           <a:p>
             <a:pPr algn="ctr"/>
+            <a:endParaRPr/>
           </a:p>
         </p:txBody>
       </p:sp>
@@ -6923,7 +7028,7 @@
           <a:noFill/>
         </p:spPr>
         <p:txBody>
-          <a:bodyPr wrap="square" lIns="0" rIns="0" tIns="0" bIns="0" anchor="ctr">
+          <a:bodyPr wrap="square" lIns="0" tIns="0" rIns="0" bIns="0" anchor="ctr">
             <a:spAutoFit/>
           </a:bodyPr>
           <a:lstStyle/>
@@ -6960,10 +7065,34 @@
                 <a:tableStyleId>{5C22544A-7EE6-4342-B048-85BDC9FD1C3A}</a:tableStyleId>
               </a:tblPr>
               <a:tblGrid>
-                <a:gridCol w="1371600"/>
-                <a:gridCol w="2286000"/>
-                <a:gridCol w="5486400"/>
-                <a:gridCol w="2103119"/>
+                <a:gridCol w="1371600">
+                  <a:extLst>
+                    <a:ext uri="{9D8B030D-6E8A-4147-A177-3AD203B41FA5}">
+                      <a16:colId xmlns:a16="http://schemas.microsoft.com/office/drawing/2014/main" val="20000"/>
+                    </a:ext>
+                  </a:extLst>
+                </a:gridCol>
+                <a:gridCol w="2286000">
+                  <a:extLst>
+                    <a:ext uri="{9D8B030D-6E8A-4147-A177-3AD203B41FA5}">
+                      <a16:colId xmlns:a16="http://schemas.microsoft.com/office/drawing/2014/main" val="20001"/>
+                    </a:ext>
+                  </a:extLst>
+                </a:gridCol>
+                <a:gridCol w="5486400">
+                  <a:extLst>
+                    <a:ext uri="{9D8B030D-6E8A-4147-A177-3AD203B41FA5}">
+                      <a16:colId xmlns:a16="http://schemas.microsoft.com/office/drawing/2014/main" val="20002"/>
+                    </a:ext>
+                  </a:extLst>
+                </a:gridCol>
+                <a:gridCol w="2103119">
+                  <a:extLst>
+                    <a:ext uri="{9D8B030D-6E8A-4147-A177-3AD203B41FA5}">
+                      <a16:colId xmlns:a16="http://schemas.microsoft.com/office/drawing/2014/main" val="20003"/>
+                    </a:ext>
+                  </a:extLst>
+                </a:gridCol>
               </a:tblGrid>
               <a:tr h="491490">
                 <a:tc>
@@ -7058,11 +7187,16 @@
                     </a:solidFill>
                   </a:tcPr>
                 </a:tc>
+                <a:extLst>
+                  <a:ext uri="{0D108BD9-81ED-4DB2-BD59-A6C34878D82A}">
+                    <a16:rowId xmlns:a16="http://schemas.microsoft.com/office/drawing/2014/main" val="10000"/>
+                  </a:ext>
+                </a:extLst>
               </a:tr>
               <a:tr h="491490">
                 <a:tc>
                   <a:txBody>
-                    <a:bodyPr tIns="36576" bIns="36576"/>
+                    <a:bodyPr/>
                     <a:lstStyle/>
                     <a:p>
                       <a:pPr algn="l"/>
@@ -7085,7 +7219,7 @@
                 </a:tc>
                 <a:tc>
                   <a:txBody>
-                    <a:bodyPr tIns="36576" bIns="36576"/>
+                    <a:bodyPr/>
                     <a:lstStyle/>
                     <a:p>
                       <a:pPr algn="l"/>
@@ -7108,7 +7242,7 @@
                 </a:tc>
                 <a:tc>
                   <a:txBody>
-                    <a:bodyPr tIns="36576" bIns="36576"/>
+                    <a:bodyPr/>
                     <a:lstStyle/>
                     <a:p>
                       <a:pPr algn="l"/>
@@ -7131,7 +7265,7 @@
                 </a:tc>
                 <a:tc>
                   <a:txBody>
-                    <a:bodyPr tIns="36576" bIns="36576"/>
+                    <a:bodyPr/>
                     <a:lstStyle/>
                     <a:p>
                       <a:pPr algn="l"/>
@@ -7152,11 +7286,16 @@
                     </a:solidFill>
                   </a:tcPr>
                 </a:tc>
+                <a:extLst>
+                  <a:ext uri="{0D108BD9-81ED-4DB2-BD59-A6C34878D82A}">
+                    <a16:rowId xmlns:a16="http://schemas.microsoft.com/office/drawing/2014/main" val="10001"/>
+                  </a:ext>
+                </a:extLst>
               </a:tr>
               <a:tr h="491490">
                 <a:tc>
                   <a:txBody>
-                    <a:bodyPr tIns="36576" bIns="36576"/>
+                    <a:bodyPr/>
                     <a:lstStyle/>
                     <a:p>
                       <a:pPr algn="l"/>
@@ -7179,7 +7318,7 @@
                 </a:tc>
                 <a:tc>
                   <a:txBody>
-                    <a:bodyPr tIns="36576" bIns="36576"/>
+                    <a:bodyPr/>
                     <a:lstStyle/>
                     <a:p>
                       <a:pPr algn="l"/>
@@ -7202,7 +7341,7 @@
                 </a:tc>
                 <a:tc>
                   <a:txBody>
-                    <a:bodyPr tIns="36576" bIns="36576"/>
+                    <a:bodyPr/>
                     <a:lstStyle/>
                     <a:p>
                       <a:pPr algn="l"/>
@@ -7225,7 +7364,7 @@
                 </a:tc>
                 <a:tc>
                   <a:txBody>
-                    <a:bodyPr tIns="36576" bIns="36576"/>
+                    <a:bodyPr/>
                     <a:lstStyle/>
                     <a:p>
                       <a:pPr algn="l"/>
@@ -7246,11 +7385,16 @@
                     </a:solidFill>
                   </a:tcPr>
                 </a:tc>
+                <a:extLst>
+                  <a:ext uri="{0D108BD9-81ED-4DB2-BD59-A6C34878D82A}">
+                    <a16:rowId xmlns:a16="http://schemas.microsoft.com/office/drawing/2014/main" val="10002"/>
+                  </a:ext>
+                </a:extLst>
               </a:tr>
               <a:tr h="491490">
                 <a:tc>
                   <a:txBody>
-                    <a:bodyPr tIns="36576" bIns="36576"/>
+                    <a:bodyPr/>
                     <a:lstStyle/>
                     <a:p>
                       <a:pPr algn="l"/>
@@ -7273,7 +7417,7 @@
                 </a:tc>
                 <a:tc>
                   <a:txBody>
-                    <a:bodyPr tIns="36576" bIns="36576"/>
+                    <a:bodyPr/>
                     <a:lstStyle/>
                     <a:p>
                       <a:pPr algn="l"/>
@@ -7296,7 +7440,7 @@
                 </a:tc>
                 <a:tc>
                   <a:txBody>
-                    <a:bodyPr tIns="36576" bIns="36576"/>
+                    <a:bodyPr/>
                     <a:lstStyle/>
                     <a:p>
                       <a:pPr algn="l"/>
@@ -7319,7 +7463,7 @@
                 </a:tc>
                 <a:tc>
                   <a:txBody>
-                    <a:bodyPr tIns="36576" bIns="36576"/>
+                    <a:bodyPr/>
                     <a:lstStyle/>
                     <a:p>
                       <a:pPr algn="l"/>
@@ -7340,11 +7484,16 @@
                     </a:solidFill>
                   </a:tcPr>
                 </a:tc>
+                <a:extLst>
+                  <a:ext uri="{0D108BD9-81ED-4DB2-BD59-A6C34878D82A}">
+                    <a16:rowId xmlns:a16="http://schemas.microsoft.com/office/drawing/2014/main" val="10003"/>
+                  </a:ext>
+                </a:extLst>
               </a:tr>
               <a:tr h="491490">
                 <a:tc>
                   <a:txBody>
-                    <a:bodyPr tIns="36576" bIns="36576"/>
+                    <a:bodyPr/>
                     <a:lstStyle/>
                     <a:p>
                       <a:pPr algn="l"/>
@@ -7367,7 +7516,7 @@
                 </a:tc>
                 <a:tc>
                   <a:txBody>
-                    <a:bodyPr tIns="36576" bIns="36576"/>
+                    <a:bodyPr/>
                     <a:lstStyle/>
                     <a:p>
                       <a:pPr algn="l"/>
@@ -7390,7 +7539,7 @@
                 </a:tc>
                 <a:tc>
                   <a:txBody>
-                    <a:bodyPr tIns="36576" bIns="36576"/>
+                    <a:bodyPr/>
                     <a:lstStyle/>
                     <a:p>
                       <a:pPr algn="l"/>
@@ -7413,7 +7562,7 @@
                 </a:tc>
                 <a:tc>
                   <a:txBody>
-                    <a:bodyPr tIns="36576" bIns="36576"/>
+                    <a:bodyPr/>
                     <a:lstStyle/>
                     <a:p>
                       <a:pPr algn="l"/>
@@ -7434,11 +7583,16 @@
                     </a:solidFill>
                   </a:tcPr>
                 </a:tc>
+                <a:extLst>
+                  <a:ext uri="{0D108BD9-81ED-4DB2-BD59-A6C34878D82A}">
+                    <a16:rowId xmlns:a16="http://schemas.microsoft.com/office/drawing/2014/main" val="10004"/>
+                  </a:ext>
+                </a:extLst>
               </a:tr>
               <a:tr h="491490">
                 <a:tc>
                   <a:txBody>
-                    <a:bodyPr tIns="36576" bIns="36576"/>
+                    <a:bodyPr/>
                     <a:lstStyle/>
                     <a:p>
                       <a:pPr algn="l"/>
@@ -7461,7 +7615,7 @@
                 </a:tc>
                 <a:tc>
                   <a:txBody>
-                    <a:bodyPr tIns="36576" bIns="36576"/>
+                    <a:bodyPr/>
                     <a:lstStyle/>
                     <a:p>
                       <a:pPr algn="l"/>
@@ -7484,7 +7638,7 @@
                 </a:tc>
                 <a:tc>
                   <a:txBody>
-                    <a:bodyPr tIns="36576" bIns="36576"/>
+                    <a:bodyPr/>
                     <a:lstStyle/>
                     <a:p>
                       <a:pPr algn="l"/>
@@ -7507,7 +7661,7 @@
                 </a:tc>
                 <a:tc>
                   <a:txBody>
-                    <a:bodyPr tIns="36576" bIns="36576"/>
+                    <a:bodyPr/>
                     <a:lstStyle/>
                     <a:p>
                       <a:pPr algn="l"/>
@@ -7528,11 +7682,16 @@
                     </a:solidFill>
                   </a:tcPr>
                 </a:tc>
+                <a:extLst>
+                  <a:ext uri="{0D108BD9-81ED-4DB2-BD59-A6C34878D82A}">
+                    <a16:rowId xmlns:a16="http://schemas.microsoft.com/office/drawing/2014/main" val="10005"/>
+                  </a:ext>
+                </a:extLst>
               </a:tr>
               <a:tr h="491490">
                 <a:tc>
                   <a:txBody>
-                    <a:bodyPr tIns="36576" bIns="36576"/>
+                    <a:bodyPr/>
                     <a:lstStyle/>
                     <a:p>
                       <a:pPr algn="l"/>
@@ -7555,7 +7714,7 @@
                 </a:tc>
                 <a:tc>
                   <a:txBody>
-                    <a:bodyPr tIns="36576" bIns="36576"/>
+                    <a:bodyPr/>
                     <a:lstStyle/>
                     <a:p>
                       <a:pPr algn="l"/>
@@ -7578,7 +7737,7 @@
                 </a:tc>
                 <a:tc>
                   <a:txBody>
-                    <a:bodyPr tIns="36576" bIns="36576"/>
+                    <a:bodyPr/>
                     <a:lstStyle/>
                     <a:p>
                       <a:pPr algn="l"/>
@@ -7601,7 +7760,7 @@
                 </a:tc>
                 <a:tc>
                   <a:txBody>
-                    <a:bodyPr tIns="36576" bIns="36576"/>
+                    <a:bodyPr/>
                     <a:lstStyle/>
                     <a:p>
                       <a:pPr algn="l"/>
@@ -7622,11 +7781,16 @@
                     </a:solidFill>
                   </a:tcPr>
                 </a:tc>
+                <a:extLst>
+                  <a:ext uri="{0D108BD9-81ED-4DB2-BD59-A6C34878D82A}">
+                    <a16:rowId xmlns:a16="http://schemas.microsoft.com/office/drawing/2014/main" val="10006"/>
+                  </a:ext>
+                </a:extLst>
               </a:tr>
               <a:tr h="491490">
                 <a:tc>
                   <a:txBody>
-                    <a:bodyPr tIns="36576" bIns="36576"/>
+                    <a:bodyPr/>
                     <a:lstStyle/>
                     <a:p>
                       <a:pPr algn="l"/>
@@ -7649,7 +7813,7 @@
                 </a:tc>
                 <a:tc>
                   <a:txBody>
-                    <a:bodyPr tIns="36576" bIns="36576"/>
+                    <a:bodyPr/>
                     <a:lstStyle/>
                     <a:p>
                       <a:pPr algn="l"/>
@@ -7672,7 +7836,7 @@
                 </a:tc>
                 <a:tc>
                   <a:txBody>
-                    <a:bodyPr tIns="36576" bIns="36576"/>
+                    <a:bodyPr/>
                     <a:lstStyle/>
                     <a:p>
                       <a:pPr algn="l"/>
@@ -7695,7 +7859,7 @@
                 </a:tc>
                 <a:tc>
                   <a:txBody>
-                    <a:bodyPr tIns="36576" bIns="36576"/>
+                    <a:bodyPr/>
                     <a:lstStyle/>
                     <a:p>
                       <a:pPr algn="l"/>
@@ -7716,6 +7880,11 @@
                     </a:solidFill>
                   </a:tcPr>
                 </a:tc>
+                <a:extLst>
+                  <a:ext uri="{0D108BD9-81ED-4DB2-BD59-A6C34878D82A}">
+                    <a16:rowId xmlns:a16="http://schemas.microsoft.com/office/drawing/2014/main" val="10007"/>
+                  </a:ext>
+                </a:extLst>
               </a:tr>
             </a:tbl>
           </a:graphicData>
@@ -7762,6 +7931,7 @@
           <a:lstStyle/>
           <a:p>
             <a:pPr algn="ctr"/>
+            <a:endParaRPr/>
           </a:p>
         </p:txBody>
       </p:sp>
@@ -7782,7 +7952,7 @@
           <a:noFill/>
         </p:spPr>
         <p:txBody>
-          <a:bodyPr wrap="square" lIns="0" rIns="0" tIns="0" bIns="0" anchor="t">
+          <a:bodyPr wrap="square" lIns="0" tIns="0" rIns="0" bIns="0" anchor="t">
             <a:spAutoFit/>
           </a:bodyPr>
           <a:lstStyle/>
@@ -7809,7 +7979,7 @@
 </file>
 
 <file path=ppt/slides/slide14.xml><?xml version="1.0" encoding="utf-8"?>
-<p:sld xmlns:a="http://schemas.openxmlformats.org/drawingml/2006/main" xmlns:p="http://schemas.openxmlformats.org/presentationml/2006/main" xmlns:r="http://schemas.openxmlformats.org/officeDocument/2006/relationships">
+<p:sld xmlns:a="http://schemas.openxmlformats.org/drawingml/2006/main" xmlns:r="http://schemas.openxmlformats.org/officeDocument/2006/relationships" xmlns:p="http://schemas.openxmlformats.org/presentationml/2006/main">
   <p:cSld>
     <p:spTree>
       <p:nvGrpSpPr>
@@ -7817,7 +7987,14 @@
         <p:cNvGrpSpPr/>
         <p:nvPr/>
       </p:nvGrpSpPr>
-      <p:grpSpPr/>
+      <p:grpSpPr>
+        <a:xfrm>
+          <a:off x="0" y="0"/>
+          <a:ext cx="0" cy="0"/>
+          <a:chOff x="0" y="0"/>
+          <a:chExt cx="0" cy="0"/>
+        </a:xfrm>
+      </p:grpSpPr>
       <p:sp>
         <p:nvSpPr>
           <p:cNvPr id="2" name="Rectangle 1"/>
@@ -7859,6 +8036,7 @@
           <a:lstStyle/>
           <a:p>
             <a:pPr algn="ctr"/>
+            <a:endParaRPr/>
           </a:p>
         </p:txBody>
       </p:sp>
@@ -7879,7 +8057,7 @@
           <a:noFill/>
         </p:spPr>
         <p:txBody>
-          <a:bodyPr wrap="square" lIns="0" rIns="0" tIns="0" bIns="0" anchor="ctr">
+          <a:bodyPr wrap="square" lIns="0" tIns="0" rIns="0" bIns="0" anchor="ctr">
             <a:spAutoFit/>
           </a:bodyPr>
           <a:lstStyle/>
@@ -7914,7 +8092,7 @@
           <a:noFill/>
         </p:spPr>
         <p:txBody>
-          <a:bodyPr wrap="square" lIns="0" rIns="0" tIns="0" bIns="0" anchor="ctr">
+          <a:bodyPr wrap="square" lIns="0" tIns="0" rIns="0" bIns="0" anchor="ctr">
             <a:spAutoFit/>
           </a:bodyPr>
           <a:lstStyle/>
@@ -7949,7 +8127,7 @@
           <a:noFill/>
         </p:spPr>
         <p:txBody>
-          <a:bodyPr wrap="square" lIns="0" rIns="0" tIns="0" bIns="0" anchor="t">
+          <a:bodyPr wrap="square" lIns="0" tIns="0" rIns="0" bIns="0" anchor="t">
             <a:spAutoFit/>
           </a:bodyPr>
           <a:lstStyle/>
@@ -7984,7 +8162,7 @@
           <a:noFill/>
         </p:spPr>
         <p:txBody>
-          <a:bodyPr wrap="square" lIns="0" rIns="0" tIns="0" bIns="0" anchor="t">
+          <a:bodyPr wrap="square" lIns="0" tIns="0" rIns="0" bIns="0" anchor="t">
             <a:spAutoFit/>
           </a:bodyPr>
           <a:lstStyle/>
@@ -8019,7 +8197,7 @@
           <a:noFill/>
         </p:spPr>
         <p:txBody>
-          <a:bodyPr wrap="square" lIns="0" rIns="0" tIns="0" bIns="0" anchor="t">
+          <a:bodyPr wrap="square" lIns="0" tIns="0" rIns="0" bIns="0" anchor="t">
             <a:spAutoFit/>
           </a:bodyPr>
           <a:lstStyle/>
@@ -8078,6 +8256,7 @@
           <a:lstStyle/>
           <a:p>
             <a:pPr algn="ctr"/>
+            <a:endParaRPr/>
           </a:p>
         </p:txBody>
       </p:sp>
@@ -8122,6 +8301,7 @@
           <a:lstStyle/>
           <a:p>
             <a:pPr algn="ctr"/>
+            <a:endParaRPr/>
           </a:p>
         </p:txBody>
       </p:sp>
@@ -8142,7 +8322,7 @@
           <a:noFill/>
         </p:spPr>
         <p:txBody>
-          <a:bodyPr wrap="square" lIns="0" rIns="0" tIns="0" bIns="0" anchor="ctr">
+          <a:bodyPr wrap="square" lIns="0" tIns="0" rIns="0" bIns="0" anchor="ctr">
             <a:spAutoFit/>
           </a:bodyPr>
           <a:lstStyle/>
@@ -8179,11 +8359,41 @@
                 <a:tableStyleId>{5C22544A-7EE6-4342-B048-85BDC9FD1C3A}</a:tableStyleId>
               </a:tblPr>
               <a:tblGrid>
-                <a:gridCol w="3749040"/>
-                <a:gridCol w="1874520"/>
-                <a:gridCol w="1874520"/>
-                <a:gridCol w="1874520"/>
-                <a:gridCol w="1874520"/>
+                <a:gridCol w="3749040">
+                  <a:extLst>
+                    <a:ext uri="{9D8B030D-6E8A-4147-A177-3AD203B41FA5}">
+                      <a16:colId xmlns:a16="http://schemas.microsoft.com/office/drawing/2014/main" val="20000"/>
+                    </a:ext>
+                  </a:extLst>
+                </a:gridCol>
+                <a:gridCol w="1874520">
+                  <a:extLst>
+                    <a:ext uri="{9D8B030D-6E8A-4147-A177-3AD203B41FA5}">
+                      <a16:colId xmlns:a16="http://schemas.microsoft.com/office/drawing/2014/main" val="20001"/>
+                    </a:ext>
+                  </a:extLst>
+                </a:gridCol>
+                <a:gridCol w="1874520">
+                  <a:extLst>
+                    <a:ext uri="{9D8B030D-6E8A-4147-A177-3AD203B41FA5}">
+                      <a16:colId xmlns:a16="http://schemas.microsoft.com/office/drawing/2014/main" val="20002"/>
+                    </a:ext>
+                  </a:extLst>
+                </a:gridCol>
+                <a:gridCol w="1874520">
+                  <a:extLst>
+                    <a:ext uri="{9D8B030D-6E8A-4147-A177-3AD203B41FA5}">
+                      <a16:colId xmlns:a16="http://schemas.microsoft.com/office/drawing/2014/main" val="20003"/>
+                    </a:ext>
+                  </a:extLst>
+                </a:gridCol>
+                <a:gridCol w="1874520">
+                  <a:extLst>
+                    <a:ext uri="{9D8B030D-6E8A-4147-A177-3AD203B41FA5}">
+                      <a16:colId xmlns:a16="http://schemas.microsoft.com/office/drawing/2014/main" val="20004"/>
+                    </a:ext>
+                  </a:extLst>
+                </a:gridCol>
               </a:tblGrid>
               <a:tr h="386080">
                 <a:tc>
@@ -8301,11 +8511,16 @@
                     </a:solidFill>
                   </a:tcPr>
                 </a:tc>
+                <a:extLst>
+                  <a:ext uri="{0D108BD9-81ED-4DB2-BD59-A6C34878D82A}">
+                    <a16:rowId xmlns:a16="http://schemas.microsoft.com/office/drawing/2014/main" val="10000"/>
+                  </a:ext>
+                </a:extLst>
               </a:tr>
               <a:tr h="386080">
                 <a:tc>
                   <a:txBody>
-                    <a:bodyPr tIns="36576" bIns="36576"/>
+                    <a:bodyPr/>
                     <a:lstStyle/>
                     <a:p>
                       <a:pPr algn="l"/>
@@ -8328,7 +8543,7 @@
                 </a:tc>
                 <a:tc>
                   <a:txBody>
-                    <a:bodyPr tIns="36576" bIns="36576"/>
+                    <a:bodyPr/>
                     <a:lstStyle/>
                     <a:p>
                       <a:pPr algn="l"/>
@@ -8351,7 +8566,7 @@
                 </a:tc>
                 <a:tc>
                   <a:txBody>
-                    <a:bodyPr tIns="36576" bIns="36576"/>
+                    <a:bodyPr/>
                     <a:lstStyle/>
                     <a:p>
                       <a:pPr algn="l"/>
@@ -8374,7 +8589,7 @@
                 </a:tc>
                 <a:tc>
                   <a:txBody>
-                    <a:bodyPr tIns="36576" bIns="36576"/>
+                    <a:bodyPr/>
                     <a:lstStyle/>
                     <a:p>
                       <a:pPr algn="l"/>
@@ -8397,7 +8612,7 @@
                 </a:tc>
                 <a:tc>
                   <a:txBody>
-                    <a:bodyPr tIns="36576" bIns="36576"/>
+                    <a:bodyPr/>
                     <a:lstStyle/>
                     <a:p>
                       <a:pPr algn="l"/>
@@ -8418,11 +8633,16 @@
                     </a:solidFill>
                   </a:tcPr>
                 </a:tc>
+                <a:extLst>
+                  <a:ext uri="{0D108BD9-81ED-4DB2-BD59-A6C34878D82A}">
+                    <a16:rowId xmlns:a16="http://schemas.microsoft.com/office/drawing/2014/main" val="10001"/>
+                  </a:ext>
+                </a:extLst>
               </a:tr>
               <a:tr h="386080">
                 <a:tc>
                   <a:txBody>
-                    <a:bodyPr tIns="36576" bIns="36576"/>
+                    <a:bodyPr/>
                     <a:lstStyle/>
                     <a:p>
                       <a:pPr algn="l"/>
@@ -8445,7 +8665,7 @@
                 </a:tc>
                 <a:tc>
                   <a:txBody>
-                    <a:bodyPr tIns="36576" bIns="36576"/>
+                    <a:bodyPr/>
                     <a:lstStyle/>
                     <a:p>
                       <a:pPr algn="l"/>
@@ -8468,7 +8688,7 @@
                 </a:tc>
                 <a:tc>
                   <a:txBody>
-                    <a:bodyPr tIns="36576" bIns="36576"/>
+                    <a:bodyPr/>
                     <a:lstStyle/>
                     <a:p>
                       <a:pPr algn="l"/>
@@ -8491,7 +8711,7 @@
                 </a:tc>
                 <a:tc>
                   <a:txBody>
-                    <a:bodyPr tIns="36576" bIns="36576"/>
+                    <a:bodyPr/>
                     <a:lstStyle/>
                     <a:p>
                       <a:pPr algn="l"/>
@@ -8514,7 +8734,7 @@
                 </a:tc>
                 <a:tc>
                   <a:txBody>
-                    <a:bodyPr tIns="36576" bIns="36576"/>
+                    <a:bodyPr/>
                     <a:lstStyle/>
                     <a:p>
                       <a:pPr algn="l"/>
@@ -8535,11 +8755,16 @@
                     </a:solidFill>
                   </a:tcPr>
                 </a:tc>
+                <a:extLst>
+                  <a:ext uri="{0D108BD9-81ED-4DB2-BD59-A6C34878D82A}">
+                    <a16:rowId xmlns:a16="http://schemas.microsoft.com/office/drawing/2014/main" val="10002"/>
+                  </a:ext>
+                </a:extLst>
               </a:tr>
               <a:tr h="386080">
                 <a:tc>
                   <a:txBody>
-                    <a:bodyPr tIns="36576" bIns="36576"/>
+                    <a:bodyPr/>
                     <a:lstStyle/>
                     <a:p>
                       <a:pPr algn="l"/>
@@ -8562,7 +8787,7 @@
                 </a:tc>
                 <a:tc>
                   <a:txBody>
-                    <a:bodyPr tIns="36576" bIns="36576"/>
+                    <a:bodyPr/>
                     <a:lstStyle/>
                     <a:p>
                       <a:pPr algn="l"/>
@@ -8585,7 +8810,7 @@
                 </a:tc>
                 <a:tc>
                   <a:txBody>
-                    <a:bodyPr tIns="36576" bIns="36576"/>
+                    <a:bodyPr/>
                     <a:lstStyle/>
                     <a:p>
                       <a:pPr algn="l"/>
@@ -8608,7 +8833,7 @@
                 </a:tc>
                 <a:tc>
                   <a:txBody>
-                    <a:bodyPr tIns="36576" bIns="36576"/>
+                    <a:bodyPr/>
                     <a:lstStyle/>
                     <a:p>
                       <a:pPr algn="l"/>
@@ -8631,7 +8856,7 @@
                 </a:tc>
                 <a:tc>
                   <a:txBody>
-                    <a:bodyPr tIns="36576" bIns="36576"/>
+                    <a:bodyPr/>
                     <a:lstStyle/>
                     <a:p>
                       <a:pPr algn="l"/>
@@ -8652,11 +8877,16 @@
                     </a:solidFill>
                   </a:tcPr>
                 </a:tc>
+                <a:extLst>
+                  <a:ext uri="{0D108BD9-81ED-4DB2-BD59-A6C34878D82A}">
+                    <a16:rowId xmlns:a16="http://schemas.microsoft.com/office/drawing/2014/main" val="10003"/>
+                  </a:ext>
+                </a:extLst>
               </a:tr>
               <a:tr h="386080">
                 <a:tc>
                   <a:txBody>
-                    <a:bodyPr tIns="36576" bIns="36576"/>
+                    <a:bodyPr/>
                     <a:lstStyle/>
                     <a:p>
                       <a:pPr algn="l"/>
@@ -8679,7 +8909,7 @@
                 </a:tc>
                 <a:tc>
                   <a:txBody>
-                    <a:bodyPr tIns="36576" bIns="36576"/>
+                    <a:bodyPr/>
                     <a:lstStyle/>
                     <a:p>
                       <a:pPr algn="l"/>
@@ -8702,7 +8932,7 @@
                 </a:tc>
                 <a:tc>
                   <a:txBody>
-                    <a:bodyPr tIns="36576" bIns="36576"/>
+                    <a:bodyPr/>
                     <a:lstStyle/>
                     <a:p>
                       <a:pPr algn="l"/>
@@ -8725,7 +8955,7 @@
                 </a:tc>
                 <a:tc>
                   <a:txBody>
-                    <a:bodyPr tIns="36576" bIns="36576"/>
+                    <a:bodyPr/>
                     <a:lstStyle/>
                     <a:p>
                       <a:pPr algn="l"/>
@@ -8748,7 +8978,7 @@
                 </a:tc>
                 <a:tc>
                   <a:txBody>
-                    <a:bodyPr tIns="36576" bIns="36576"/>
+                    <a:bodyPr/>
                     <a:lstStyle/>
                     <a:p>
                       <a:pPr algn="l"/>
@@ -8769,11 +8999,16 @@
                     </a:solidFill>
                   </a:tcPr>
                 </a:tc>
+                <a:extLst>
+                  <a:ext uri="{0D108BD9-81ED-4DB2-BD59-A6C34878D82A}">
+                    <a16:rowId xmlns:a16="http://schemas.microsoft.com/office/drawing/2014/main" val="10004"/>
+                  </a:ext>
+                </a:extLst>
               </a:tr>
               <a:tr h="386080">
                 <a:tc>
                   <a:txBody>
-                    <a:bodyPr tIns="36576" bIns="36576"/>
+                    <a:bodyPr/>
                     <a:lstStyle/>
                     <a:p>
                       <a:pPr algn="l"/>
@@ -8796,7 +9031,7 @@
                 </a:tc>
                 <a:tc>
                   <a:txBody>
-                    <a:bodyPr tIns="36576" bIns="36576"/>
+                    <a:bodyPr/>
                     <a:lstStyle/>
                     <a:p>
                       <a:pPr algn="l"/>
@@ -8819,7 +9054,7 @@
                 </a:tc>
                 <a:tc>
                   <a:txBody>
-                    <a:bodyPr tIns="36576" bIns="36576"/>
+                    <a:bodyPr/>
                     <a:lstStyle/>
                     <a:p>
                       <a:pPr algn="l"/>
@@ -8842,7 +9077,7 @@
                 </a:tc>
                 <a:tc>
                   <a:txBody>
-                    <a:bodyPr tIns="36576" bIns="36576"/>
+                    <a:bodyPr/>
                     <a:lstStyle/>
                     <a:p>
                       <a:pPr algn="l"/>
@@ -8865,7 +9100,7 @@
                 </a:tc>
                 <a:tc>
                   <a:txBody>
-                    <a:bodyPr tIns="36576" bIns="36576"/>
+                    <a:bodyPr/>
                     <a:lstStyle/>
                     <a:p>
                       <a:pPr algn="l"/>
@@ -8886,11 +9121,16 @@
                     </a:solidFill>
                   </a:tcPr>
                 </a:tc>
+                <a:extLst>
+                  <a:ext uri="{0D108BD9-81ED-4DB2-BD59-A6C34878D82A}">
+                    <a16:rowId xmlns:a16="http://schemas.microsoft.com/office/drawing/2014/main" val="10005"/>
+                  </a:ext>
+                </a:extLst>
               </a:tr>
               <a:tr h="386080">
                 <a:tc>
                   <a:txBody>
-                    <a:bodyPr tIns="36576" bIns="36576"/>
+                    <a:bodyPr/>
                     <a:lstStyle/>
                     <a:p>
                       <a:pPr algn="l"/>
@@ -8913,7 +9153,7 @@
                 </a:tc>
                 <a:tc>
                   <a:txBody>
-                    <a:bodyPr tIns="36576" bIns="36576"/>
+                    <a:bodyPr/>
                     <a:lstStyle/>
                     <a:p>
                       <a:pPr algn="l"/>
@@ -8936,7 +9176,7 @@
                 </a:tc>
                 <a:tc>
                   <a:txBody>
-                    <a:bodyPr tIns="36576" bIns="36576"/>
+                    <a:bodyPr/>
                     <a:lstStyle/>
                     <a:p>
                       <a:pPr algn="l"/>
@@ -8959,7 +9199,7 @@
                 </a:tc>
                 <a:tc>
                   <a:txBody>
-                    <a:bodyPr tIns="36576" bIns="36576"/>
+                    <a:bodyPr/>
                     <a:lstStyle/>
                     <a:p>
                       <a:pPr algn="l"/>
@@ -8982,7 +9222,7 @@
                 </a:tc>
                 <a:tc>
                   <a:txBody>
-                    <a:bodyPr tIns="36576" bIns="36576"/>
+                    <a:bodyPr/>
                     <a:lstStyle/>
                     <a:p>
                       <a:pPr algn="l"/>
@@ -9003,11 +9243,16 @@
                     </a:solidFill>
                   </a:tcPr>
                 </a:tc>
+                <a:extLst>
+                  <a:ext uri="{0D108BD9-81ED-4DB2-BD59-A6C34878D82A}">
+                    <a16:rowId xmlns:a16="http://schemas.microsoft.com/office/drawing/2014/main" val="10006"/>
+                  </a:ext>
+                </a:extLst>
               </a:tr>
               <a:tr h="386080">
                 <a:tc>
                   <a:txBody>
-                    <a:bodyPr tIns="36576" bIns="36576"/>
+                    <a:bodyPr/>
                     <a:lstStyle/>
                     <a:p>
                       <a:pPr algn="l"/>
@@ -9030,7 +9275,7 @@
                 </a:tc>
                 <a:tc>
                   <a:txBody>
-                    <a:bodyPr tIns="36576" bIns="36576"/>
+                    <a:bodyPr/>
                     <a:lstStyle/>
                     <a:p>
                       <a:pPr algn="l"/>
@@ -9053,7 +9298,7 @@
                 </a:tc>
                 <a:tc>
                   <a:txBody>
-                    <a:bodyPr tIns="36576" bIns="36576"/>
+                    <a:bodyPr/>
                     <a:lstStyle/>
                     <a:p>
                       <a:pPr algn="l"/>
@@ -9076,7 +9321,7 @@
                 </a:tc>
                 <a:tc>
                   <a:txBody>
-                    <a:bodyPr tIns="36576" bIns="36576"/>
+                    <a:bodyPr/>
                     <a:lstStyle/>
                     <a:p>
                       <a:pPr algn="l"/>
@@ -9099,7 +9344,7 @@
                 </a:tc>
                 <a:tc>
                   <a:txBody>
-                    <a:bodyPr tIns="36576" bIns="36576"/>
+                    <a:bodyPr/>
                     <a:lstStyle/>
                     <a:p>
                       <a:pPr algn="l"/>
@@ -9120,11 +9365,16 @@
                     </a:solidFill>
                   </a:tcPr>
                 </a:tc>
+                <a:extLst>
+                  <a:ext uri="{0D108BD9-81ED-4DB2-BD59-A6C34878D82A}">
+                    <a16:rowId xmlns:a16="http://schemas.microsoft.com/office/drawing/2014/main" val="10007"/>
+                  </a:ext>
+                </a:extLst>
               </a:tr>
               <a:tr h="386080">
                 <a:tc>
                   <a:txBody>
-                    <a:bodyPr tIns="36576" bIns="36576"/>
+                    <a:bodyPr/>
                     <a:lstStyle/>
                     <a:p>
                       <a:pPr algn="l"/>
@@ -9147,7 +9397,7 @@
                 </a:tc>
                 <a:tc>
                   <a:txBody>
-                    <a:bodyPr tIns="36576" bIns="36576"/>
+                    <a:bodyPr/>
                     <a:lstStyle/>
                     <a:p>
                       <a:pPr algn="l"/>
@@ -9170,7 +9420,7 @@
                 </a:tc>
                 <a:tc>
                   <a:txBody>
-                    <a:bodyPr tIns="36576" bIns="36576"/>
+                    <a:bodyPr/>
                     <a:lstStyle/>
                     <a:p>
                       <a:pPr algn="l"/>
@@ -9193,7 +9443,7 @@
                 </a:tc>
                 <a:tc>
                   <a:txBody>
-                    <a:bodyPr tIns="36576" bIns="36576"/>
+                    <a:bodyPr/>
                     <a:lstStyle/>
                     <a:p>
                       <a:pPr algn="l"/>
@@ -9216,7 +9466,7 @@
                 </a:tc>
                 <a:tc>
                   <a:txBody>
-                    <a:bodyPr tIns="36576" bIns="36576"/>
+                    <a:bodyPr/>
                     <a:lstStyle/>
                     <a:p>
                       <a:pPr algn="l"/>
@@ -9237,6 +9487,11 @@
                     </a:solidFill>
                   </a:tcPr>
                 </a:tc>
+                <a:extLst>
+                  <a:ext uri="{0D108BD9-81ED-4DB2-BD59-A6C34878D82A}">
+                    <a16:rowId xmlns:a16="http://schemas.microsoft.com/office/drawing/2014/main" val="10008"/>
+                  </a:ext>
+                </a:extLst>
               </a:tr>
             </a:tbl>
           </a:graphicData>
@@ -9285,6 +9540,7 @@
           <a:lstStyle/>
           <a:p>
             <a:pPr algn="ctr"/>
+            <a:endParaRPr/>
           </a:p>
         </p:txBody>
       </p:sp>
@@ -9305,7 +9561,7 @@
           <a:noFill/>
         </p:spPr>
         <p:txBody>
-          <a:bodyPr wrap="square" lIns="0" rIns="0" tIns="0" bIns="0" anchor="t">
+          <a:bodyPr wrap="square" lIns="0" tIns="0" rIns="0" bIns="0" anchor="t">
             <a:spAutoFit/>
           </a:bodyPr>
           <a:lstStyle/>
@@ -9340,7 +9596,7 @@
           <a:noFill/>
         </p:spPr>
         <p:txBody>
-          <a:bodyPr wrap="square" lIns="0" rIns="0" tIns="0" bIns="0" anchor="t">
+          <a:bodyPr wrap="square" lIns="0" tIns="0" rIns="0" bIns="0" anchor="t">
             <a:spAutoFit/>
           </a:bodyPr>
           <a:lstStyle/>
@@ -9401,6 +9657,7 @@
           <a:lstStyle/>
           <a:p>
             <a:pPr algn="ctr"/>
+            <a:endParaRPr/>
           </a:p>
         </p:txBody>
       </p:sp>
@@ -9421,7 +9678,7 @@
           <a:noFill/>
         </p:spPr>
         <p:txBody>
-          <a:bodyPr wrap="square" lIns="0" rIns="0" tIns="0" bIns="0" anchor="t">
+          <a:bodyPr wrap="square" lIns="0" tIns="0" rIns="0" bIns="0" anchor="t">
             <a:spAutoFit/>
           </a:bodyPr>
           <a:lstStyle/>
@@ -9456,7 +9713,7 @@
           <a:noFill/>
         </p:spPr>
         <p:txBody>
-          <a:bodyPr wrap="square" lIns="0" rIns="0" tIns="0" bIns="0" anchor="t">
+          <a:bodyPr wrap="square" lIns="0" tIns="0" rIns="0" bIns="0" anchor="t">
             <a:spAutoFit/>
           </a:bodyPr>
           <a:lstStyle/>
@@ -9483,7 +9740,7 @@
 </file>
 
 <file path=ppt/slides/slide15.xml><?xml version="1.0" encoding="utf-8"?>
-<p:sld xmlns:a="http://schemas.openxmlformats.org/drawingml/2006/main" xmlns:p="http://schemas.openxmlformats.org/presentationml/2006/main" xmlns:r="http://schemas.openxmlformats.org/officeDocument/2006/relationships">
+<p:sld xmlns:a="http://schemas.openxmlformats.org/drawingml/2006/main" xmlns:r="http://schemas.openxmlformats.org/officeDocument/2006/relationships" xmlns:p="http://schemas.openxmlformats.org/presentationml/2006/main">
   <p:cSld>
     <p:spTree>
       <p:nvGrpSpPr>
@@ -9491,7 +9748,14 @@
         <p:cNvGrpSpPr/>
         <p:nvPr/>
       </p:nvGrpSpPr>
-      <p:grpSpPr/>
+      <p:grpSpPr>
+        <a:xfrm>
+          <a:off x="0" y="0"/>
+          <a:ext cx="0" cy="0"/>
+          <a:chOff x="0" y="0"/>
+          <a:chExt cx="0" cy="0"/>
+        </a:xfrm>
+      </p:grpSpPr>
       <p:sp>
         <p:nvSpPr>
           <p:cNvPr id="2" name="Rectangle 1"/>
@@ -9533,6 +9797,7 @@
           <a:lstStyle/>
           <a:p>
             <a:pPr algn="ctr"/>
+            <a:endParaRPr/>
           </a:p>
         </p:txBody>
       </p:sp>
@@ -9553,7 +9818,7 @@
           <a:noFill/>
         </p:spPr>
         <p:txBody>
-          <a:bodyPr wrap="square" lIns="0" rIns="0" tIns="0" bIns="0" anchor="ctr">
+          <a:bodyPr wrap="square" lIns="0" tIns="0" rIns="0" bIns="0" anchor="ctr">
             <a:spAutoFit/>
           </a:bodyPr>
           <a:lstStyle/>
@@ -9588,7 +9853,7 @@
           <a:noFill/>
         </p:spPr>
         <p:txBody>
-          <a:bodyPr wrap="square" lIns="0" rIns="0" tIns="0" bIns="0" anchor="ctr">
+          <a:bodyPr wrap="square" lIns="0" tIns="0" rIns="0" bIns="0" anchor="ctr">
             <a:spAutoFit/>
           </a:bodyPr>
           <a:lstStyle/>
@@ -9623,7 +9888,7 @@
           <a:noFill/>
         </p:spPr>
         <p:txBody>
-          <a:bodyPr wrap="square" lIns="0" rIns="0" tIns="0" bIns="0" anchor="t">
+          <a:bodyPr wrap="square" lIns="0" tIns="0" rIns="0" bIns="0" anchor="t">
             <a:spAutoFit/>
           </a:bodyPr>
           <a:lstStyle/>
@@ -9658,7 +9923,7 @@
           <a:noFill/>
         </p:spPr>
         <p:txBody>
-          <a:bodyPr wrap="square" lIns="0" rIns="0" tIns="0" bIns="0" anchor="t">
+          <a:bodyPr wrap="square" lIns="0" tIns="0" rIns="0" bIns="0" anchor="t">
             <a:spAutoFit/>
           </a:bodyPr>
           <a:lstStyle/>
@@ -9693,7 +9958,7 @@
           <a:noFill/>
         </p:spPr>
         <p:txBody>
-          <a:bodyPr wrap="square" lIns="0" rIns="0" tIns="0" bIns="0" anchor="t">
+          <a:bodyPr wrap="square" lIns="0" tIns="0" rIns="0" bIns="0" anchor="t">
             <a:spAutoFit/>
           </a:bodyPr>
           <a:lstStyle/>
@@ -9752,6 +10017,7 @@
           <a:lstStyle/>
           <a:p>
             <a:pPr algn="ctr"/>
+            <a:endParaRPr/>
           </a:p>
         </p:txBody>
       </p:sp>
@@ -9796,6 +10062,7 @@
           <a:lstStyle/>
           <a:p>
             <a:pPr algn="ctr"/>
+            <a:endParaRPr/>
           </a:p>
         </p:txBody>
       </p:sp>
@@ -9816,7 +10083,7 @@
           <a:noFill/>
         </p:spPr>
         <p:txBody>
-          <a:bodyPr wrap="square" lIns="0" rIns="0" tIns="0" bIns="0" anchor="ctr">
+          <a:bodyPr wrap="square" lIns="0" tIns="0" rIns="0" bIns="0" anchor="ctr">
             <a:spAutoFit/>
           </a:bodyPr>
           <a:lstStyle/>
@@ -9877,6 +10144,7 @@
           <a:lstStyle/>
           <a:p>
             <a:pPr algn="ctr"/>
+            <a:endParaRPr/>
           </a:p>
         </p:txBody>
       </p:sp>
@@ -9921,6 +10189,7 @@
           <a:lstStyle/>
           <a:p>
             <a:pPr algn="ctr"/>
+            <a:endParaRPr/>
           </a:p>
         </p:txBody>
       </p:sp>
@@ -9941,7 +10210,7 @@
           <a:noFill/>
         </p:spPr>
         <p:txBody>
-          <a:bodyPr wrap="square" lIns="0" rIns="0" tIns="0" bIns="0" anchor="t">
+          <a:bodyPr wrap="square" lIns="0" tIns="0" rIns="0" bIns="0" anchor="t">
             <a:spAutoFit/>
           </a:bodyPr>
           <a:lstStyle/>
@@ -9976,7 +10245,7 @@
           <a:noFill/>
         </p:spPr>
         <p:txBody>
-          <a:bodyPr wrap="square" lIns="0" rIns="0" tIns="0" bIns="0" anchor="t">
+          <a:bodyPr wrap="square" lIns="0" tIns="0" rIns="0" bIns="0" anchor="t">
             <a:spAutoFit/>
           </a:bodyPr>
           <a:lstStyle/>
@@ -10011,7 +10280,7 @@
           <a:noFill/>
         </p:spPr>
         <p:txBody>
-          <a:bodyPr wrap="square" lIns="0" rIns="0" tIns="0" bIns="0" anchor="t">
+          <a:bodyPr wrap="square" lIns="0" tIns="0" rIns="0" bIns="0" anchor="t">
             <a:spAutoFit/>
           </a:bodyPr>
           <a:lstStyle/>
@@ -10072,6 +10341,7 @@
           <a:lstStyle/>
           <a:p>
             <a:pPr algn="ctr"/>
+            <a:endParaRPr/>
           </a:p>
         </p:txBody>
       </p:sp>
@@ -10116,6 +10386,7 @@
           <a:lstStyle/>
           <a:p>
             <a:pPr algn="ctr"/>
+            <a:endParaRPr/>
           </a:p>
         </p:txBody>
       </p:sp>
@@ -10136,7 +10407,7 @@
           <a:noFill/>
         </p:spPr>
         <p:txBody>
-          <a:bodyPr wrap="square" lIns="0" rIns="0" tIns="0" bIns="0" anchor="t">
+          <a:bodyPr wrap="square" lIns="0" tIns="0" rIns="0" bIns="0" anchor="t">
             <a:spAutoFit/>
           </a:bodyPr>
           <a:lstStyle/>
@@ -10171,7 +10442,7 @@
           <a:noFill/>
         </p:spPr>
         <p:txBody>
-          <a:bodyPr wrap="square" lIns="0" rIns="0" tIns="0" bIns="0" anchor="t">
+          <a:bodyPr wrap="square" lIns="0" tIns="0" rIns="0" bIns="0" anchor="t">
             <a:spAutoFit/>
           </a:bodyPr>
           <a:lstStyle/>
@@ -10206,7 +10477,7 @@
           <a:noFill/>
         </p:spPr>
         <p:txBody>
-          <a:bodyPr wrap="square" lIns="0" rIns="0" tIns="0" bIns="0" anchor="t">
+          <a:bodyPr wrap="square" lIns="0" tIns="0" rIns="0" bIns="0" anchor="t">
             <a:spAutoFit/>
           </a:bodyPr>
           <a:lstStyle/>
@@ -10267,6 +10538,7 @@
           <a:lstStyle/>
           <a:p>
             <a:pPr algn="ctr"/>
+            <a:endParaRPr/>
           </a:p>
         </p:txBody>
       </p:sp>
@@ -10311,6 +10583,7 @@
           <a:lstStyle/>
           <a:p>
             <a:pPr algn="ctr"/>
+            <a:endParaRPr/>
           </a:p>
         </p:txBody>
       </p:sp>
@@ -10331,7 +10604,7 @@
           <a:noFill/>
         </p:spPr>
         <p:txBody>
-          <a:bodyPr wrap="square" lIns="0" rIns="0" tIns="0" bIns="0" anchor="t">
+          <a:bodyPr wrap="square" lIns="0" tIns="0" rIns="0" bIns="0" anchor="t">
             <a:spAutoFit/>
           </a:bodyPr>
           <a:lstStyle/>
@@ -10366,7 +10639,7 @@
           <a:noFill/>
         </p:spPr>
         <p:txBody>
-          <a:bodyPr wrap="square" lIns="0" rIns="0" tIns="0" bIns="0" anchor="t">
+          <a:bodyPr wrap="square" lIns="0" tIns="0" rIns="0" bIns="0" anchor="t">
             <a:spAutoFit/>
           </a:bodyPr>
           <a:lstStyle/>
@@ -10401,7 +10674,7 @@
           <a:noFill/>
         </p:spPr>
         <p:txBody>
-          <a:bodyPr wrap="square" lIns="0" rIns="0" tIns="0" bIns="0" anchor="t">
+          <a:bodyPr wrap="square" lIns="0" tIns="0" rIns="0" bIns="0" anchor="t">
             <a:spAutoFit/>
           </a:bodyPr>
           <a:lstStyle/>
@@ -10462,6 +10735,7 @@
           <a:lstStyle/>
           <a:p>
             <a:pPr algn="ctr"/>
+            <a:endParaRPr/>
           </a:p>
         </p:txBody>
       </p:sp>
@@ -10506,6 +10780,7 @@
           <a:lstStyle/>
           <a:p>
             <a:pPr algn="ctr"/>
+            <a:endParaRPr/>
           </a:p>
         </p:txBody>
       </p:sp>
@@ -10526,7 +10801,7 @@
           <a:noFill/>
         </p:spPr>
         <p:txBody>
-          <a:bodyPr wrap="square" lIns="0" rIns="0" tIns="0" bIns="0" anchor="t">
+          <a:bodyPr wrap="square" lIns="0" tIns="0" rIns="0" bIns="0" anchor="t">
             <a:spAutoFit/>
           </a:bodyPr>
           <a:lstStyle/>
@@ -10561,7 +10836,7 @@
           <a:noFill/>
         </p:spPr>
         <p:txBody>
-          <a:bodyPr wrap="square" lIns="0" rIns="0" tIns="0" bIns="0" anchor="t">
+          <a:bodyPr wrap="square" lIns="0" tIns="0" rIns="0" bIns="0" anchor="t">
             <a:spAutoFit/>
           </a:bodyPr>
           <a:lstStyle/>
@@ -10596,7 +10871,7 @@
           <a:noFill/>
         </p:spPr>
         <p:txBody>
-          <a:bodyPr wrap="square" lIns="0" rIns="0" tIns="0" bIns="0" anchor="t">
+          <a:bodyPr wrap="square" lIns="0" tIns="0" rIns="0" bIns="0" anchor="t">
             <a:spAutoFit/>
           </a:bodyPr>
           <a:lstStyle/>
@@ -10657,6 +10932,7 @@
           <a:lstStyle/>
           <a:p>
             <a:pPr algn="ctr"/>
+            <a:endParaRPr/>
           </a:p>
         </p:txBody>
       </p:sp>
@@ -10701,6 +10977,7 @@
           <a:lstStyle/>
           <a:p>
             <a:pPr algn="ctr"/>
+            <a:endParaRPr/>
           </a:p>
         </p:txBody>
       </p:sp>
@@ -10721,7 +10998,7 @@
           <a:noFill/>
         </p:spPr>
         <p:txBody>
-          <a:bodyPr wrap="square" lIns="0" rIns="0" tIns="0" bIns="0" anchor="t">
+          <a:bodyPr wrap="square" lIns="0" tIns="0" rIns="0" bIns="0" anchor="t">
             <a:spAutoFit/>
           </a:bodyPr>
           <a:lstStyle/>
@@ -10899,6 +11176,7 @@
           <a:lstStyle/>
           <a:p>
             <a:pPr algn="ctr"/>
+            <a:endParaRPr/>
           </a:p>
         </p:txBody>
       </p:sp>
@@ -10919,7 +11197,7 @@
           <a:noFill/>
         </p:spPr>
         <p:txBody>
-          <a:bodyPr wrap="square" lIns="0" rIns="0" tIns="0" bIns="0" anchor="t">
+          <a:bodyPr wrap="square" lIns="0" tIns="0" rIns="0" bIns="0" anchor="t">
             <a:spAutoFit/>
           </a:bodyPr>
           <a:lstStyle/>
@@ -10946,7 +11224,7 @@
 </file>
 
 <file path=ppt/slides/slide16.xml><?xml version="1.0" encoding="utf-8"?>
-<p:sld xmlns:a="http://schemas.openxmlformats.org/drawingml/2006/main" xmlns:p="http://schemas.openxmlformats.org/presentationml/2006/main" xmlns:r="http://schemas.openxmlformats.org/officeDocument/2006/relationships">
+<p:sld xmlns:a="http://schemas.openxmlformats.org/drawingml/2006/main" xmlns:r="http://schemas.openxmlformats.org/officeDocument/2006/relationships" xmlns:p="http://schemas.openxmlformats.org/presentationml/2006/main">
   <p:cSld>
     <p:spTree>
       <p:nvGrpSpPr>
@@ -10954,7 +11232,14 @@
         <p:cNvGrpSpPr/>
         <p:nvPr/>
       </p:nvGrpSpPr>
-      <p:grpSpPr/>
+      <p:grpSpPr>
+        <a:xfrm>
+          <a:off x="0" y="0"/>
+          <a:ext cx="0" cy="0"/>
+          <a:chOff x="0" y="0"/>
+          <a:chExt cx="0" cy="0"/>
+        </a:xfrm>
+      </p:grpSpPr>
       <p:sp>
         <p:nvSpPr>
           <p:cNvPr id="2" name="Rectangle 1"/>
@@ -10996,6 +11281,7 @@
           <a:lstStyle/>
           <a:p>
             <a:pPr algn="ctr"/>
+            <a:endParaRPr/>
           </a:p>
         </p:txBody>
       </p:sp>
@@ -11016,7 +11302,7 @@
           <a:noFill/>
         </p:spPr>
         <p:txBody>
-          <a:bodyPr wrap="square" lIns="0" rIns="0" tIns="0" bIns="0" anchor="ctr">
+          <a:bodyPr wrap="square" lIns="0" tIns="0" rIns="0" bIns="0" anchor="ctr">
             <a:spAutoFit/>
           </a:bodyPr>
           <a:lstStyle/>
@@ -11051,7 +11337,7 @@
           <a:noFill/>
         </p:spPr>
         <p:txBody>
-          <a:bodyPr wrap="square" lIns="0" rIns="0" tIns="0" bIns="0" anchor="ctr">
+          <a:bodyPr wrap="square" lIns="0" tIns="0" rIns="0" bIns="0" anchor="ctr">
             <a:spAutoFit/>
           </a:bodyPr>
           <a:lstStyle/>
@@ -11086,7 +11372,7 @@
           <a:noFill/>
         </p:spPr>
         <p:txBody>
-          <a:bodyPr wrap="square" lIns="0" rIns="0" tIns="0" bIns="0" anchor="t">
+          <a:bodyPr wrap="square" lIns="0" tIns="0" rIns="0" bIns="0" anchor="t">
             <a:spAutoFit/>
           </a:bodyPr>
           <a:lstStyle/>
@@ -11121,7 +11407,7 @@
           <a:noFill/>
         </p:spPr>
         <p:txBody>
-          <a:bodyPr wrap="square" lIns="0" rIns="0" tIns="0" bIns="0" anchor="t">
+          <a:bodyPr wrap="square" lIns="0" tIns="0" rIns="0" bIns="0" anchor="t">
             <a:spAutoFit/>
           </a:bodyPr>
           <a:lstStyle/>
@@ -11156,7 +11442,7 @@
           <a:noFill/>
         </p:spPr>
         <p:txBody>
-          <a:bodyPr wrap="square" lIns="0" rIns="0" tIns="0" bIns="0" anchor="t">
+          <a:bodyPr wrap="square" lIns="0" tIns="0" rIns="0" bIns="0" anchor="t">
             <a:spAutoFit/>
           </a:bodyPr>
           <a:lstStyle/>
@@ -11215,6 +11501,7 @@
           <a:lstStyle/>
           <a:p>
             <a:pPr algn="ctr"/>
+            <a:endParaRPr/>
           </a:p>
         </p:txBody>
       </p:sp>
@@ -11259,6 +11546,7 @@
           <a:lstStyle/>
           <a:p>
             <a:pPr algn="ctr"/>
+            <a:endParaRPr/>
           </a:p>
         </p:txBody>
       </p:sp>
@@ -11279,7 +11567,7 @@
           <a:noFill/>
         </p:spPr>
         <p:txBody>
-          <a:bodyPr wrap="square" lIns="0" rIns="0" tIns="0" bIns="0" anchor="ctr">
+          <a:bodyPr wrap="square" lIns="0" tIns="0" rIns="0" bIns="0" anchor="ctr">
             <a:spAutoFit/>
           </a:bodyPr>
           <a:lstStyle/>
@@ -11316,10 +11604,34 @@
                 <a:tableStyleId>{5C22544A-7EE6-4342-B048-85BDC9FD1C3A}</a:tableStyleId>
               </a:tblPr>
               <a:tblGrid>
-                <a:gridCol w="2743200"/>
-                <a:gridCol w="1371600"/>
-                <a:gridCol w="1371600"/>
-                <a:gridCol w="5760720"/>
+                <a:gridCol w="2743200">
+                  <a:extLst>
+                    <a:ext uri="{9D8B030D-6E8A-4147-A177-3AD203B41FA5}">
+                      <a16:colId xmlns:a16="http://schemas.microsoft.com/office/drawing/2014/main" val="20000"/>
+                    </a:ext>
+                  </a:extLst>
+                </a:gridCol>
+                <a:gridCol w="1371600">
+                  <a:extLst>
+                    <a:ext uri="{9D8B030D-6E8A-4147-A177-3AD203B41FA5}">
+                      <a16:colId xmlns:a16="http://schemas.microsoft.com/office/drawing/2014/main" val="20001"/>
+                    </a:ext>
+                  </a:extLst>
+                </a:gridCol>
+                <a:gridCol w="1371600">
+                  <a:extLst>
+                    <a:ext uri="{9D8B030D-6E8A-4147-A177-3AD203B41FA5}">
+                      <a16:colId xmlns:a16="http://schemas.microsoft.com/office/drawing/2014/main" val="20002"/>
+                    </a:ext>
+                  </a:extLst>
+                </a:gridCol>
+                <a:gridCol w="5760720">
+                  <a:extLst>
+                    <a:ext uri="{9D8B030D-6E8A-4147-A177-3AD203B41FA5}">
+                      <a16:colId xmlns:a16="http://schemas.microsoft.com/office/drawing/2014/main" val="20003"/>
+                    </a:ext>
+                  </a:extLst>
+                </a:gridCol>
               </a:tblGrid>
               <a:tr h="514350">
                 <a:tc>
@@ -11414,11 +11726,16 @@
                     </a:solidFill>
                   </a:tcPr>
                 </a:tc>
+                <a:extLst>
+                  <a:ext uri="{0D108BD9-81ED-4DB2-BD59-A6C34878D82A}">
+                    <a16:rowId xmlns:a16="http://schemas.microsoft.com/office/drawing/2014/main" val="10000"/>
+                  </a:ext>
+                </a:extLst>
               </a:tr>
               <a:tr h="514350">
                 <a:tc>
                   <a:txBody>
-                    <a:bodyPr tIns="36576" bIns="36576"/>
+                    <a:bodyPr/>
                     <a:lstStyle/>
                     <a:p>
                       <a:pPr algn="l"/>
@@ -11441,7 +11758,7 @@
                 </a:tc>
                 <a:tc>
                   <a:txBody>
-                    <a:bodyPr tIns="36576" bIns="36576"/>
+                    <a:bodyPr/>
                     <a:lstStyle/>
                     <a:p>
                       <a:pPr algn="l"/>
@@ -11464,7 +11781,7 @@
                 </a:tc>
                 <a:tc>
                   <a:txBody>
-                    <a:bodyPr tIns="36576" bIns="36576"/>
+                    <a:bodyPr/>
                     <a:lstStyle/>
                     <a:p>
                       <a:pPr algn="l"/>
@@ -11487,7 +11804,7 @@
                 </a:tc>
                 <a:tc>
                   <a:txBody>
-                    <a:bodyPr tIns="36576" bIns="36576"/>
+                    <a:bodyPr/>
                     <a:lstStyle/>
                     <a:p>
                       <a:pPr algn="l"/>
@@ -11508,11 +11825,16 @@
                     </a:solidFill>
                   </a:tcPr>
                 </a:tc>
+                <a:extLst>
+                  <a:ext uri="{0D108BD9-81ED-4DB2-BD59-A6C34878D82A}">
+                    <a16:rowId xmlns:a16="http://schemas.microsoft.com/office/drawing/2014/main" val="10001"/>
+                  </a:ext>
+                </a:extLst>
               </a:tr>
               <a:tr h="514350">
                 <a:tc>
                   <a:txBody>
-                    <a:bodyPr tIns="36576" bIns="36576"/>
+                    <a:bodyPr/>
                     <a:lstStyle/>
                     <a:p>
                       <a:pPr algn="l"/>
@@ -11535,7 +11857,7 @@
                 </a:tc>
                 <a:tc>
                   <a:txBody>
-                    <a:bodyPr tIns="36576" bIns="36576"/>
+                    <a:bodyPr/>
                     <a:lstStyle/>
                     <a:p>
                       <a:pPr algn="l"/>
@@ -11558,7 +11880,7 @@
                 </a:tc>
                 <a:tc>
                   <a:txBody>
-                    <a:bodyPr tIns="36576" bIns="36576"/>
+                    <a:bodyPr/>
                     <a:lstStyle/>
                     <a:p>
                       <a:pPr algn="l"/>
@@ -11581,7 +11903,7 @@
                 </a:tc>
                 <a:tc>
                   <a:txBody>
-                    <a:bodyPr tIns="36576" bIns="36576"/>
+                    <a:bodyPr/>
                     <a:lstStyle/>
                     <a:p>
                       <a:pPr algn="l"/>
@@ -11602,11 +11924,252 @@
                     </a:solidFill>
                   </a:tcPr>
                 </a:tc>
+                <a:extLst>
+                  <a:ext uri="{0D108BD9-81ED-4DB2-BD59-A6C34878D82A}">
+                    <a16:rowId xmlns:a16="http://schemas.microsoft.com/office/drawing/2014/main" val="10002"/>
+                  </a:ext>
+                </a:extLst>
               </a:tr>
               <a:tr h="514350">
                 <a:tc>
                   <a:txBody>
-                    <a:bodyPr tIns="36576" bIns="36576"/>
+                    <a:bodyPr/>
+                    <a:lstStyle/>
+                    <a:p>
+                      <a:pPr algn="l"/>
+                      <a:r>
+                        <a:rPr sz="1050" dirty="0" err="1">
+                          <a:solidFill>
+                            <a:srgbClr val="1A1F2C"/>
+                          </a:solidFill>
+                          <a:latin typeface="맑은 고딕"/>
+                        </a:rPr>
+                        <a:t>핵심</a:t>
+                      </a:r>
+                      <a:r>
+                        <a:rPr sz="1050" dirty="0">
+                          <a:solidFill>
+                            <a:srgbClr val="1A1F2C"/>
+                          </a:solidFill>
+                          <a:latin typeface="맑은 고딕"/>
+                        </a:rPr>
+                        <a:t> </a:t>
+                      </a:r>
+                      <a:r>
+                        <a:rPr sz="1050" dirty="0" err="1">
+                          <a:solidFill>
+                            <a:srgbClr val="1A1F2C"/>
+                          </a:solidFill>
+                          <a:latin typeface="맑은 고딕"/>
+                        </a:rPr>
+                        <a:t>인력</a:t>
+                      </a:r>
+                      <a:r>
+                        <a:rPr sz="1050" dirty="0">
+                          <a:solidFill>
+                            <a:srgbClr val="1A1F2C"/>
+                          </a:solidFill>
+                          <a:latin typeface="맑은 고딕"/>
+                        </a:rPr>
+                        <a:t> </a:t>
+                      </a:r>
+                      <a:r>
+                        <a:rPr sz="1050" dirty="0" err="1">
+                          <a:solidFill>
+                            <a:srgbClr val="1A1F2C"/>
+                          </a:solidFill>
+                          <a:latin typeface="맑은 고딕"/>
+                        </a:rPr>
+                        <a:t>이탈</a:t>
+                      </a:r>
+                      <a:endParaRPr sz="1050" dirty="0">
+                        <a:solidFill>
+                          <a:srgbClr val="1A1F2C"/>
+                        </a:solidFill>
+                        <a:latin typeface="맑은 고딕"/>
+                      </a:endParaRPr>
+                    </a:p>
+                  </a:txBody>
+                  <a:tcPr>
+                    <a:solidFill>
+                      <a:srgbClr val="FFFFFF"/>
+                    </a:solidFill>
+                  </a:tcPr>
+                </a:tc>
+                <a:tc>
+                  <a:txBody>
+                    <a:bodyPr/>
+                    <a:lstStyle/>
+                    <a:p>
+                      <a:pPr algn="l"/>
+                      <a:r>
+                        <a:rPr sz="1050" dirty="0" err="1">
+                          <a:solidFill>
+                            <a:srgbClr val="1A1F2C"/>
+                          </a:solidFill>
+                          <a:latin typeface="맑은 고딕"/>
+                        </a:rPr>
+                        <a:t>중</a:t>
+                      </a:r>
+                      <a:endParaRPr sz="1050" dirty="0">
+                        <a:solidFill>
+                          <a:srgbClr val="1A1F2C"/>
+                        </a:solidFill>
+                        <a:latin typeface="맑은 고딕"/>
+                      </a:endParaRPr>
+                    </a:p>
+                  </a:txBody>
+                  <a:tcPr>
+                    <a:solidFill>
+                      <a:srgbClr val="FFFFFF"/>
+                    </a:solidFill>
+                  </a:tcPr>
+                </a:tc>
+                <a:tc>
+                  <a:txBody>
+                    <a:bodyPr/>
+                    <a:lstStyle/>
+                    <a:p>
+                      <a:pPr algn="l"/>
+                      <a:r>
+                        <a:rPr sz="1050" dirty="0" err="1">
+                          <a:solidFill>
+                            <a:srgbClr val="1A1F2C"/>
+                          </a:solidFill>
+                          <a:latin typeface="맑은 고딕"/>
+                        </a:rPr>
+                        <a:t>상</a:t>
+                      </a:r>
+                      <a:endParaRPr sz="1050" dirty="0">
+                        <a:solidFill>
+                          <a:srgbClr val="1A1F2C"/>
+                        </a:solidFill>
+                        <a:latin typeface="맑은 고딕"/>
+                      </a:endParaRPr>
+                    </a:p>
+                  </a:txBody>
+                  <a:tcPr>
+                    <a:solidFill>
+                      <a:srgbClr val="FFFFFF"/>
+                    </a:solidFill>
+                  </a:tcPr>
+                </a:tc>
+                <a:tc>
+                  <a:txBody>
+                    <a:bodyPr/>
+                    <a:lstStyle/>
+                    <a:p>
+                      <a:pPr algn="l"/>
+                      <a:r>
+                        <a:rPr sz="1050" dirty="0">
+                          <a:solidFill>
+                            <a:srgbClr val="1A1F2C"/>
+                          </a:solidFill>
+                          <a:latin typeface="맑은 고딕"/>
+                        </a:rPr>
+                        <a:t>ESOP 15% </a:t>
+                      </a:r>
+                      <a:r>
+                        <a:rPr sz="1050" dirty="0" err="1">
+                          <a:solidFill>
+                            <a:srgbClr val="1A1F2C"/>
+                          </a:solidFill>
+                          <a:latin typeface="맑은 고딕"/>
+                        </a:rPr>
+                        <a:t>풀</a:t>
+                      </a:r>
+                      <a:r>
+                        <a:rPr sz="1050" dirty="0">
+                          <a:solidFill>
+                            <a:srgbClr val="1A1F2C"/>
+                          </a:solidFill>
+                          <a:latin typeface="맑은 고딕"/>
+                        </a:rPr>
+                        <a:t> · </a:t>
+                      </a:r>
+                      <a:r>
+                        <a:rPr sz="1050" dirty="0" err="1">
+                          <a:solidFill>
+                            <a:srgbClr val="1A1F2C"/>
+                          </a:solidFill>
+                          <a:latin typeface="맑은 고딕"/>
+                        </a:rPr>
+                        <a:t>기술리드</a:t>
+                      </a:r>
+                      <a:r>
+                        <a:rPr sz="1050" dirty="0">
+                          <a:solidFill>
+                            <a:srgbClr val="1A1F2C"/>
+                          </a:solidFill>
+                          <a:latin typeface="맑은 고딕"/>
+                        </a:rPr>
+                        <a:t> 3인 2년 lock-up</a:t>
+                      </a:r>
+                    </a:p>
+                  </a:txBody>
+                  <a:tcPr>
+                    <a:solidFill>
+                      <a:srgbClr val="FFFFFF"/>
+                    </a:solidFill>
+                  </a:tcPr>
+                </a:tc>
+                <a:extLst>
+                  <a:ext uri="{0D108BD9-81ED-4DB2-BD59-A6C34878D82A}">
+                    <a16:rowId xmlns:a16="http://schemas.microsoft.com/office/drawing/2014/main" val="10003"/>
+                  </a:ext>
+                </a:extLst>
+              </a:tr>
+              <a:tr h="514350">
+                <a:tc>
+                  <a:txBody>
+                    <a:bodyPr/>
+                    <a:lstStyle/>
+                    <a:p>
+                      <a:pPr algn="l"/>
+                      <a:r>
+                        <a:rPr sz="1050" dirty="0" err="1">
+                          <a:solidFill>
+                            <a:srgbClr val="1A1F2C"/>
+                          </a:solidFill>
+                          <a:latin typeface="맑은 고딕"/>
+                        </a:rPr>
+                        <a:t>공공조달</a:t>
+                      </a:r>
+                      <a:r>
+                        <a:rPr sz="1050" dirty="0">
+                          <a:solidFill>
+                            <a:srgbClr val="1A1F2C"/>
+                          </a:solidFill>
+                          <a:latin typeface="맑은 고딕"/>
+                        </a:rPr>
+                        <a:t> </a:t>
+                      </a:r>
+                      <a:r>
+                        <a:rPr sz="1050" dirty="0" err="1">
+                          <a:solidFill>
+                            <a:srgbClr val="1A1F2C"/>
+                          </a:solidFill>
+                          <a:latin typeface="맑은 고딕"/>
+                        </a:rPr>
+                        <a:t>지연</a:t>
+                      </a:r>
+                      <a:endParaRPr sz="1050" dirty="0">
+                        <a:solidFill>
+                          <a:srgbClr val="1A1F2C"/>
+                        </a:solidFill>
+                        <a:latin typeface="맑은 고딕"/>
+                      </a:endParaRPr>
+                    </a:p>
+                  </a:txBody>
+                  <a:tcPr>
+                    <a:solidFill>
+                      <a:srgbClr val="F7F8FB"/>
+                    </a:solidFill>
+                  </a:tcPr>
+                </a:tc>
+                <a:tc>
+                  <a:txBody>
+                    <a:bodyPr/>
                     <a:lstStyle/>
                     <a:p>
                       <a:pPr algn="l"/>
@@ -11617,7 +12180,148 @@
                           </a:solidFill>
                           <a:latin typeface="맑은 고딕"/>
                         </a:rPr>
-                        <a:t>핵심 인력 이탈</a:t>
+                        <a:t>상</a:t>
+                      </a:r>
+                    </a:p>
+                  </a:txBody>
+                  <a:tcPr>
+                    <a:solidFill>
+                      <a:srgbClr val="F7F8FB"/>
+                    </a:solidFill>
+                  </a:tcPr>
+                </a:tc>
+                <a:tc>
+                  <a:txBody>
+                    <a:bodyPr/>
+                    <a:lstStyle/>
+                    <a:p>
+                      <a:pPr algn="l"/>
+                      <a:r>
+                        <a:rPr sz="1050">
+                          <a:solidFill>
+                            <a:srgbClr val="1A1F2C"/>
+                          </a:solidFill>
+                          <a:latin typeface="맑은 고딕"/>
+                        </a:rPr>
+                        <a:t>중</a:t>
+                      </a:r>
+                    </a:p>
+                  </a:txBody>
+                  <a:tcPr>
+                    <a:solidFill>
+                      <a:srgbClr val="F7F8FB"/>
+                    </a:solidFill>
+                  </a:tcPr>
+                </a:tc>
+                <a:tc>
+                  <a:txBody>
+                    <a:bodyPr/>
+                    <a:lstStyle/>
+                    <a:p>
+                      <a:pPr algn="l"/>
+                      <a:r>
+                        <a:rPr sz="1050">
+                          <a:solidFill>
+                            <a:srgbClr val="1A1F2C"/>
+                          </a:solidFill>
+                          <a:latin typeface="맑은 고딕"/>
+                        </a:rPr>
+                        <a:t>PLG 현금흐름으로 의존도 최소화. 혁신제품 병행</a:t>
+                      </a:r>
+                    </a:p>
+                  </a:txBody>
+                  <a:tcPr>
+                    <a:solidFill>
+                      <a:srgbClr val="F7F8FB"/>
+                    </a:solidFill>
+                  </a:tcPr>
+                </a:tc>
+                <a:extLst>
+                  <a:ext uri="{0D108BD9-81ED-4DB2-BD59-A6C34878D82A}">
+                    <a16:rowId xmlns:a16="http://schemas.microsoft.com/office/drawing/2014/main" val="10004"/>
+                  </a:ext>
+                </a:extLst>
+              </a:tr>
+              <a:tr h="514350">
+                <a:tc>
+                  <a:txBody>
+                    <a:bodyPr/>
+                    <a:lstStyle/>
+                    <a:p>
+                      <a:pPr algn="l"/>
+                      <a:r>
+                        <a:rPr sz="1050" dirty="0" err="1">
+                          <a:solidFill>
+                            <a:srgbClr val="1A1F2C"/>
+                          </a:solidFill>
+                          <a:latin typeface="맑은 고딕"/>
+                        </a:rPr>
+                        <a:t>대기업</a:t>
+                      </a:r>
+                      <a:r>
+                        <a:rPr sz="1050" dirty="0">
+                          <a:solidFill>
+                            <a:srgbClr val="1A1F2C"/>
+                          </a:solidFill>
+                          <a:latin typeface="맑은 고딕"/>
+                        </a:rPr>
+                        <a:t> </a:t>
+                      </a:r>
+                      <a:r>
+                        <a:rPr sz="1050" dirty="0" err="1">
+                          <a:solidFill>
+                            <a:srgbClr val="1A1F2C"/>
+                          </a:solidFill>
+                          <a:latin typeface="맑은 고딕"/>
+                        </a:rPr>
+                        <a:t>복제</a:t>
+                      </a:r>
+                      <a:r>
+                        <a:rPr sz="1050" dirty="0">
+                          <a:solidFill>
+                            <a:srgbClr val="1A1F2C"/>
+                          </a:solidFill>
+                          <a:latin typeface="맑은 고딕"/>
+                        </a:rPr>
+                        <a:t> </a:t>
+                      </a:r>
+                      <a:r>
+                        <a:rPr sz="1050" dirty="0" err="1">
+                          <a:solidFill>
+                            <a:srgbClr val="1A1F2C"/>
+                          </a:solidFill>
+                          <a:latin typeface="맑은 고딕"/>
+                        </a:rPr>
+                        <a:t>진입</a:t>
+                      </a:r>
+                      <a:endParaRPr sz="1050" dirty="0">
+                        <a:solidFill>
+                          <a:srgbClr val="1A1F2C"/>
+                        </a:solidFill>
+                        <a:latin typeface="맑은 고딕"/>
+                      </a:endParaRPr>
+                    </a:p>
+                  </a:txBody>
+                  <a:tcPr>
+                    <a:solidFill>
+                      <a:srgbClr val="FFFFFF"/>
+                    </a:solidFill>
+                  </a:tcPr>
+                </a:tc>
+                <a:tc>
+                  <a:txBody>
+                    <a:bodyPr/>
+                    <a:lstStyle/>
+                    <a:p>
+                      <a:pPr algn="l"/>
+                      <a:r>
+                        <a:rPr sz="1050">
+                          <a:solidFill>
+                            <a:srgbClr val="1A1F2C"/>
+                          </a:solidFill>
+                          <a:latin typeface="맑은 고딕"/>
+                        </a:rPr>
+                        <a:t>하</a:t>
                       </a:r>
                     </a:p>
                   </a:txBody>
@@ -11629,7 +12333,182 @@
                 </a:tc>
                 <a:tc>
                   <a:txBody>
-                    <a:bodyPr tIns="36576" bIns="36576"/>
+                    <a:bodyPr/>
+                    <a:lstStyle/>
+                    <a:p>
+                      <a:pPr algn="l"/>
+                      <a:r>
+                        <a:rPr sz="1050">
+                          <a:solidFill>
+                            <a:srgbClr val="1A1F2C"/>
+                          </a:solidFill>
+                          <a:latin typeface="맑은 고딕"/>
+                        </a:rPr>
+                        <a:t>상</a:t>
+                      </a:r>
+                    </a:p>
+                  </a:txBody>
+                  <a:tcPr>
+                    <a:solidFill>
+                      <a:srgbClr val="FFFFFF"/>
+                    </a:solidFill>
+                  </a:tcPr>
+                </a:tc>
+                <a:tc>
+                  <a:txBody>
+                    <a:bodyPr/>
+                    <a:lstStyle/>
+                    <a:p>
+                      <a:pPr algn="l"/>
+                      <a:r>
+                        <a:rPr sz="1050">
+                          <a:solidFill>
+                            <a:srgbClr val="1A1F2C"/>
+                          </a:solidFill>
+                          <a:latin typeface="맑은 고딕"/>
+                        </a:rPr>
+                        <a:t>오픈소스·커뮤니티 해자. 파트너십으로 선점</a:t>
+                      </a:r>
+                    </a:p>
+                  </a:txBody>
+                  <a:tcPr>
+                    <a:solidFill>
+                      <a:srgbClr val="FFFFFF"/>
+                    </a:solidFill>
+                  </a:tcPr>
+                </a:tc>
+                <a:extLst>
+                  <a:ext uri="{0D108BD9-81ED-4DB2-BD59-A6C34878D82A}">
+                    <a16:rowId xmlns:a16="http://schemas.microsoft.com/office/drawing/2014/main" val="10005"/>
+                  </a:ext>
+                </a:extLst>
+              </a:tr>
+              <a:tr h="514350">
+                <a:tc>
+                  <a:txBody>
+                    <a:bodyPr/>
+                    <a:lstStyle/>
+                    <a:p>
+                      <a:pPr algn="l"/>
+                      <a:r>
+                        <a:rPr sz="1050">
+                          <a:solidFill>
+                            <a:srgbClr val="1A1F2C"/>
+                          </a:solidFill>
+                          <a:latin typeface="맑은 고딕"/>
+                        </a:rPr>
+                        <a:t>개인정보·보안 이슈</a:t>
+                      </a:r>
+                    </a:p>
+                  </a:txBody>
+                  <a:tcPr>
+                    <a:solidFill>
+                      <a:srgbClr val="F7F8FB"/>
+                    </a:solidFill>
+                  </a:tcPr>
+                </a:tc>
+                <a:tc>
+                  <a:txBody>
+                    <a:bodyPr/>
+                    <a:lstStyle/>
+                    <a:p>
+                      <a:pPr algn="l"/>
+                      <a:r>
+                        <a:rPr sz="1050">
+                          <a:solidFill>
+                            <a:srgbClr val="1A1F2C"/>
+                          </a:solidFill>
+                          <a:latin typeface="맑은 고딕"/>
+                        </a:rPr>
+                        <a:t>중</a:t>
+                      </a:r>
+                    </a:p>
+                  </a:txBody>
+                  <a:tcPr>
+                    <a:solidFill>
+                      <a:srgbClr val="F7F8FB"/>
+                    </a:solidFill>
+                  </a:tcPr>
+                </a:tc>
+                <a:tc>
+                  <a:txBody>
+                    <a:bodyPr/>
+                    <a:lstStyle/>
+                    <a:p>
+                      <a:pPr algn="l"/>
+                      <a:r>
+                        <a:rPr sz="1050">
+                          <a:solidFill>
+                            <a:srgbClr val="1A1F2C"/>
+                          </a:solidFill>
+                          <a:latin typeface="맑은 고딕"/>
+                        </a:rPr>
+                        <a:t>상</a:t>
+                      </a:r>
+                    </a:p>
+                  </a:txBody>
+                  <a:tcPr>
+                    <a:solidFill>
+                      <a:srgbClr val="F7F8FB"/>
+                    </a:solidFill>
+                  </a:tcPr>
+                </a:tc>
+                <a:tc>
+                  <a:txBody>
+                    <a:bodyPr/>
+                    <a:lstStyle/>
+                    <a:p>
+                      <a:pPr algn="l"/>
+                      <a:r>
+                        <a:rPr sz="1050">
+                          <a:solidFill>
+                            <a:srgbClr val="1A1F2C"/>
+                          </a:solidFill>
+                          <a:latin typeface="맑은 고딕"/>
+                        </a:rPr>
+                        <a:t>ISMS-P 2026 취득. 온프레미스 옵션. SOC2 로드맵</a:t>
+                      </a:r>
+                    </a:p>
+                  </a:txBody>
+                  <a:tcPr>
+                    <a:solidFill>
+                      <a:srgbClr val="F7F8FB"/>
+                    </a:solidFill>
+                  </a:tcPr>
+                </a:tc>
+                <a:extLst>
+                  <a:ext uri="{0D108BD9-81ED-4DB2-BD59-A6C34878D82A}">
+                    <a16:rowId xmlns:a16="http://schemas.microsoft.com/office/drawing/2014/main" val="10006"/>
+                  </a:ext>
+                </a:extLst>
+              </a:tr>
+              <a:tr h="514350">
+                <a:tc>
+                  <a:txBody>
+                    <a:bodyPr/>
+                    <a:lstStyle/>
+                    <a:p>
+                      <a:pPr algn="l"/>
+                      <a:r>
+                        <a:rPr sz="1050">
+                          <a:solidFill>
+                            <a:srgbClr val="1A1F2C"/>
+                          </a:solidFill>
+                          <a:latin typeface="맑은 고딕"/>
+                        </a:rPr>
+                        <a:t>환율·거시 경기</a:t>
+                      </a:r>
+                    </a:p>
+                  </a:txBody>
+                  <a:tcPr>
+                    <a:solidFill>
+                      <a:srgbClr val="FFFFFF"/>
+                    </a:solidFill>
+                  </a:tcPr>
+                </a:tc>
+                <a:tc>
+                  <a:txBody>
+                    <a:bodyPr/>
                     <a:lstStyle/>
                     <a:p>
                       <a:pPr algn="l"/>
@@ -11652,360 +12531,7 @@
                 </a:tc>
                 <a:tc>
                   <a:txBody>
-                    <a:bodyPr tIns="36576" bIns="36576"/>
-                    <a:lstStyle/>
-                    <a:p>
-                      <a:pPr algn="l"/>
-                      <a:r>
-                        <a:rPr sz="1050">
-                          <a:solidFill>
-                            <a:srgbClr val="1A1F2C"/>
-                          </a:solidFill>
-                          <a:latin typeface="맑은 고딕"/>
-                        </a:rPr>
-                        <a:t>상</a:t>
-                      </a:r>
-                    </a:p>
-                  </a:txBody>
-                  <a:tcPr>
-                    <a:solidFill>
-                      <a:srgbClr val="FFFFFF"/>
-                    </a:solidFill>
-                  </a:tcPr>
-                </a:tc>
-                <a:tc>
-                  <a:txBody>
-                    <a:bodyPr tIns="36576" bIns="36576"/>
-                    <a:lstStyle/>
-                    <a:p>
-                      <a:pPr algn="l"/>
-                      <a:r>
-                        <a:rPr sz="1050">
-                          <a:solidFill>
-                            <a:srgbClr val="1A1F2C"/>
-                          </a:solidFill>
-                          <a:latin typeface="맑은 고딕"/>
-                        </a:rPr>
-                        <a:t>ESOP 15% 풀 · 기술리드 3인 2년 lock-up</a:t>
-                      </a:r>
-                    </a:p>
-                  </a:txBody>
-                  <a:tcPr>
-                    <a:solidFill>
-                      <a:srgbClr val="FFFFFF"/>
-                    </a:solidFill>
-                  </a:tcPr>
-                </a:tc>
-              </a:tr>
-              <a:tr h="514350">
-                <a:tc>
-                  <a:txBody>
-                    <a:bodyPr tIns="36576" bIns="36576"/>
-                    <a:lstStyle/>
-                    <a:p>
-                      <a:pPr algn="l"/>
-                      <a:r>
-                        <a:rPr sz="1050">
-                          <a:solidFill>
-                            <a:srgbClr val="1A1F2C"/>
-                          </a:solidFill>
-                          <a:latin typeface="맑은 고딕"/>
-                        </a:rPr>
-                        <a:t>공공조달 지연</a:t>
-                      </a:r>
-                    </a:p>
-                  </a:txBody>
-                  <a:tcPr>
-                    <a:solidFill>
-                      <a:srgbClr val="F7F8FB"/>
-                    </a:solidFill>
-                  </a:tcPr>
-                </a:tc>
-                <a:tc>
-                  <a:txBody>
-                    <a:bodyPr tIns="36576" bIns="36576"/>
-                    <a:lstStyle/>
-                    <a:p>
-                      <a:pPr algn="l"/>
-                      <a:r>
-                        <a:rPr sz="1050">
-                          <a:solidFill>
-                            <a:srgbClr val="1A1F2C"/>
-                          </a:solidFill>
-                          <a:latin typeface="맑은 고딕"/>
-                        </a:rPr>
-                        <a:t>상</a:t>
-                      </a:r>
-                    </a:p>
-                  </a:txBody>
-                  <a:tcPr>
-                    <a:solidFill>
-                      <a:srgbClr val="F7F8FB"/>
-                    </a:solidFill>
-                  </a:tcPr>
-                </a:tc>
-                <a:tc>
-                  <a:txBody>
-                    <a:bodyPr tIns="36576" bIns="36576"/>
-                    <a:lstStyle/>
-                    <a:p>
-                      <a:pPr algn="l"/>
-                      <a:r>
-                        <a:rPr sz="1050">
-                          <a:solidFill>
-                            <a:srgbClr val="1A1F2C"/>
-                          </a:solidFill>
-                          <a:latin typeface="맑은 고딕"/>
-                        </a:rPr>
-                        <a:t>중</a:t>
-                      </a:r>
-                    </a:p>
-                  </a:txBody>
-                  <a:tcPr>
-                    <a:solidFill>
-                      <a:srgbClr val="F7F8FB"/>
-                    </a:solidFill>
-                  </a:tcPr>
-                </a:tc>
-                <a:tc>
-                  <a:txBody>
-                    <a:bodyPr tIns="36576" bIns="36576"/>
-                    <a:lstStyle/>
-                    <a:p>
-                      <a:pPr algn="l"/>
-                      <a:r>
-                        <a:rPr sz="1050">
-                          <a:solidFill>
-                            <a:srgbClr val="1A1F2C"/>
-                          </a:solidFill>
-                          <a:latin typeface="맑은 고딕"/>
-                        </a:rPr>
-                        <a:t>PLG 현금흐름으로 의존도 최소화. 혁신제품 병행</a:t>
-                      </a:r>
-                    </a:p>
-                  </a:txBody>
-                  <a:tcPr>
-                    <a:solidFill>
-                      <a:srgbClr val="F7F8FB"/>
-                    </a:solidFill>
-                  </a:tcPr>
-                </a:tc>
-              </a:tr>
-              <a:tr h="514350">
-                <a:tc>
-                  <a:txBody>
-                    <a:bodyPr tIns="36576" bIns="36576"/>
-                    <a:lstStyle/>
-                    <a:p>
-                      <a:pPr algn="l"/>
-                      <a:r>
-                        <a:rPr sz="1050">
-                          <a:solidFill>
-                            <a:srgbClr val="1A1F2C"/>
-                          </a:solidFill>
-                          <a:latin typeface="맑은 고딕"/>
-                        </a:rPr>
-                        <a:t>대기업 복제 진입</a:t>
-                      </a:r>
-                    </a:p>
-                  </a:txBody>
-                  <a:tcPr>
-                    <a:solidFill>
-                      <a:srgbClr val="FFFFFF"/>
-                    </a:solidFill>
-                  </a:tcPr>
-                </a:tc>
-                <a:tc>
-                  <a:txBody>
-                    <a:bodyPr tIns="36576" bIns="36576"/>
-                    <a:lstStyle/>
-                    <a:p>
-                      <a:pPr algn="l"/>
-                      <a:r>
-                        <a:rPr sz="1050">
-                          <a:solidFill>
-                            <a:srgbClr val="1A1F2C"/>
-                          </a:solidFill>
-                          <a:latin typeface="맑은 고딕"/>
-                        </a:rPr>
-                        <a:t>하</a:t>
-                      </a:r>
-                    </a:p>
-                  </a:txBody>
-                  <a:tcPr>
-                    <a:solidFill>
-                      <a:srgbClr val="FFFFFF"/>
-                    </a:solidFill>
-                  </a:tcPr>
-                </a:tc>
-                <a:tc>
-                  <a:txBody>
-                    <a:bodyPr tIns="36576" bIns="36576"/>
-                    <a:lstStyle/>
-                    <a:p>
-                      <a:pPr algn="l"/>
-                      <a:r>
-                        <a:rPr sz="1050">
-                          <a:solidFill>
-                            <a:srgbClr val="1A1F2C"/>
-                          </a:solidFill>
-                          <a:latin typeface="맑은 고딕"/>
-                        </a:rPr>
-                        <a:t>상</a:t>
-                      </a:r>
-                    </a:p>
-                  </a:txBody>
-                  <a:tcPr>
-                    <a:solidFill>
-                      <a:srgbClr val="FFFFFF"/>
-                    </a:solidFill>
-                  </a:tcPr>
-                </a:tc>
-                <a:tc>
-                  <a:txBody>
-                    <a:bodyPr tIns="36576" bIns="36576"/>
-                    <a:lstStyle/>
-                    <a:p>
-                      <a:pPr algn="l"/>
-                      <a:r>
-                        <a:rPr sz="1050">
-                          <a:solidFill>
-                            <a:srgbClr val="1A1F2C"/>
-                          </a:solidFill>
-                          <a:latin typeface="맑은 고딕"/>
-                        </a:rPr>
-                        <a:t>오픈소스·커뮤니티 해자. 파트너십으로 선점</a:t>
-                      </a:r>
-                    </a:p>
-                  </a:txBody>
-                  <a:tcPr>
-                    <a:solidFill>
-                      <a:srgbClr val="FFFFFF"/>
-                    </a:solidFill>
-                  </a:tcPr>
-                </a:tc>
-              </a:tr>
-              <a:tr h="514350">
-                <a:tc>
-                  <a:txBody>
-                    <a:bodyPr tIns="36576" bIns="36576"/>
-                    <a:lstStyle/>
-                    <a:p>
-                      <a:pPr algn="l"/>
-                      <a:r>
-                        <a:rPr sz="1050">
-                          <a:solidFill>
-                            <a:srgbClr val="1A1F2C"/>
-                          </a:solidFill>
-                          <a:latin typeface="맑은 고딕"/>
-                        </a:rPr>
-                        <a:t>개인정보·보안 이슈</a:t>
-                      </a:r>
-                    </a:p>
-                  </a:txBody>
-                  <a:tcPr>
-                    <a:solidFill>
-                      <a:srgbClr val="F7F8FB"/>
-                    </a:solidFill>
-                  </a:tcPr>
-                </a:tc>
-                <a:tc>
-                  <a:txBody>
-                    <a:bodyPr tIns="36576" bIns="36576"/>
-                    <a:lstStyle/>
-                    <a:p>
-                      <a:pPr algn="l"/>
-                      <a:r>
-                        <a:rPr sz="1050">
-                          <a:solidFill>
-                            <a:srgbClr val="1A1F2C"/>
-                          </a:solidFill>
-                          <a:latin typeface="맑은 고딕"/>
-                        </a:rPr>
-                        <a:t>중</a:t>
-                      </a:r>
-                    </a:p>
-                  </a:txBody>
-                  <a:tcPr>
-                    <a:solidFill>
-                      <a:srgbClr val="F7F8FB"/>
-                    </a:solidFill>
-                  </a:tcPr>
-                </a:tc>
-                <a:tc>
-                  <a:txBody>
-                    <a:bodyPr tIns="36576" bIns="36576"/>
-                    <a:lstStyle/>
-                    <a:p>
-                      <a:pPr algn="l"/>
-                      <a:r>
-                        <a:rPr sz="1050">
-                          <a:solidFill>
-                            <a:srgbClr val="1A1F2C"/>
-                          </a:solidFill>
-                          <a:latin typeface="맑은 고딕"/>
-                        </a:rPr>
-                        <a:t>상</a:t>
-                      </a:r>
-                    </a:p>
-                  </a:txBody>
-                  <a:tcPr>
-                    <a:solidFill>
-                      <a:srgbClr val="F7F8FB"/>
-                    </a:solidFill>
-                  </a:tcPr>
-                </a:tc>
-                <a:tc>
-                  <a:txBody>
-                    <a:bodyPr tIns="36576" bIns="36576"/>
-                    <a:lstStyle/>
-                    <a:p>
-                      <a:pPr algn="l"/>
-                      <a:r>
-                        <a:rPr sz="1050">
-                          <a:solidFill>
-                            <a:srgbClr val="1A1F2C"/>
-                          </a:solidFill>
-                          <a:latin typeface="맑은 고딕"/>
-                        </a:rPr>
-                        <a:t>ISMS-P 2026 취득. 온프레미스 옵션. SOC2 로드맵</a:t>
-                      </a:r>
-                    </a:p>
-                  </a:txBody>
-                  <a:tcPr>
-                    <a:solidFill>
-                      <a:srgbClr val="F7F8FB"/>
-                    </a:solidFill>
-                  </a:tcPr>
-                </a:tc>
-              </a:tr>
-              <a:tr h="514350">
-                <a:tc>
-                  <a:txBody>
-                    <a:bodyPr tIns="36576" bIns="36576"/>
-                    <a:lstStyle/>
-                    <a:p>
-                      <a:pPr algn="l"/>
-                      <a:r>
-                        <a:rPr sz="1050">
-                          <a:solidFill>
-                            <a:srgbClr val="1A1F2C"/>
-                          </a:solidFill>
-                          <a:latin typeface="맑은 고딕"/>
-                        </a:rPr>
-                        <a:t>환율·거시 경기</a:t>
-                      </a:r>
-                    </a:p>
-                  </a:txBody>
-                  <a:tcPr>
-                    <a:solidFill>
-                      <a:srgbClr val="FFFFFF"/>
-                    </a:solidFill>
-                  </a:tcPr>
-                </a:tc>
-                <a:tc>
-                  <a:txBody>
-                    <a:bodyPr tIns="36576" bIns="36576"/>
+                    <a:bodyPr/>
                     <a:lstStyle/>
                     <a:p>
                       <a:pPr algn="l"/>
@@ -12028,18 +12554,99 @@
                 </a:tc>
                 <a:tc>
                   <a:txBody>
-                    <a:bodyPr tIns="36576" bIns="36576"/>
+                    <a:bodyPr/>
                     <a:lstStyle/>
                     <a:p>
                       <a:pPr algn="l"/>
                       <a:r>
-                        <a:rPr sz="1050">
+                        <a:rPr sz="1050" dirty="0" err="1">
                           <a:solidFill>
                             <a:srgbClr val="1A1F2C"/>
                           </a:solidFill>
                           <a:latin typeface="맑은 고딕"/>
                         </a:rPr>
-                        <a:t>중</a:t>
+                        <a:t>국내</a:t>
+                      </a:r>
+                      <a:r>
+                        <a:rPr sz="1050" dirty="0">
+                          <a:solidFill>
+                            <a:srgbClr val="1A1F2C"/>
+                          </a:solidFill>
+                          <a:latin typeface="맑은 고딕"/>
+                        </a:rPr>
+                        <a:t> </a:t>
+                      </a:r>
+                      <a:r>
+                        <a:rPr sz="1050" dirty="0" err="1">
+                          <a:solidFill>
+                            <a:srgbClr val="1A1F2C"/>
+                          </a:solidFill>
+                          <a:latin typeface="맑은 고딕"/>
+                        </a:rPr>
+                        <a:t>매출</a:t>
+                      </a:r>
+                      <a:r>
+                        <a:rPr sz="1050" dirty="0">
+                          <a:solidFill>
+                            <a:srgbClr val="1A1F2C"/>
+                          </a:solidFill>
+                          <a:latin typeface="맑은 고딕"/>
+                        </a:rPr>
+                        <a:t> 90%로 </a:t>
+                      </a:r>
+                      <a:r>
+                        <a:rPr sz="1050" dirty="0" err="1">
+                          <a:solidFill>
+                            <a:srgbClr val="1A1F2C"/>
+                          </a:solidFill>
+                          <a:latin typeface="맑은 고딕"/>
+                        </a:rPr>
+                        <a:t>환리스크</a:t>
+                      </a:r>
+                      <a:r>
+                        <a:rPr sz="1050" dirty="0">
+                          <a:solidFill>
+                            <a:srgbClr val="1A1F2C"/>
+                          </a:solidFill>
+                          <a:latin typeface="맑은 고딕"/>
+                        </a:rPr>
+                        <a:t> </a:t>
+                      </a:r>
+                      <a:r>
+                        <a:rPr sz="1050" dirty="0" err="1">
+                          <a:solidFill>
+                            <a:srgbClr val="1A1F2C"/>
+                          </a:solidFill>
+                          <a:latin typeface="맑은 고딕"/>
+                        </a:rPr>
+                        <a:t>낮음</a:t>
+                      </a:r>
+                      <a:r>
+                        <a:rPr sz="1050" dirty="0">
+                          <a:solidFill>
+                            <a:srgbClr val="1A1F2C"/>
+                          </a:solidFill>
+                          <a:latin typeface="맑은 고딕"/>
+                        </a:rPr>
+                        <a:t>. </a:t>
+                      </a:r>
+                      <a:r>
+                        <a:rPr sz="1050" dirty="0" err="1">
+                          <a:solidFill>
+                            <a:srgbClr val="1A1F2C"/>
+                          </a:solidFill>
+                          <a:latin typeface="맑은 고딕"/>
+                        </a:rPr>
+                        <a:t>고정비</a:t>
+                      </a:r>
+                      <a:r>
+                        <a:rPr sz="1050" dirty="0">
+                          <a:solidFill>
+                            <a:srgbClr val="1A1F2C"/>
+                          </a:solidFill>
+                          <a:latin typeface="맑은 고딕"/>
+                        </a:rPr>
+                        <a:t> slim</a:t>
                       </a:r>
                     </a:p>
                   </a:txBody>
@@ -12049,29 +12656,11 @@
                     </a:solidFill>
                   </a:tcPr>
                 </a:tc>
-                <a:tc>
-                  <a:txBody>
-                    <a:bodyPr tIns="36576" bIns="36576"/>
-                    <a:lstStyle/>
-                    <a:p>
-                      <a:pPr algn="l"/>
-                      <a:r>
-                        <a:rPr sz="1050">
-                          <a:solidFill>
-                            <a:srgbClr val="1A1F2C"/>
-                          </a:solidFill>
-                          <a:latin typeface="맑은 고딕"/>
-                        </a:rPr>
-                        <a:t>국내 매출 90%로 환리스크 낮음. 고정비 slim</a:t>
-                      </a:r>
-                    </a:p>
-                  </a:txBody>
-                  <a:tcPr>
-                    <a:solidFill>
-                      <a:srgbClr val="FFFFFF"/>
-                    </a:solidFill>
-                  </a:tcPr>
-                </a:tc>
+                <a:extLst>
+                  <a:ext uri="{0D108BD9-81ED-4DB2-BD59-A6C34878D82A}">
+                    <a16:rowId xmlns:a16="http://schemas.microsoft.com/office/drawing/2014/main" val="10007"/>
+                  </a:ext>
+                </a:extLst>
               </a:tr>
             </a:tbl>
           </a:graphicData>
@@ -12086,7 +12675,7 @@
 </file>
 
 <file path=ppt/slides/slide17.xml><?xml version="1.0" encoding="utf-8"?>
-<p:sld xmlns:a="http://schemas.openxmlformats.org/drawingml/2006/main" xmlns:p="http://schemas.openxmlformats.org/presentationml/2006/main" xmlns:r="http://schemas.openxmlformats.org/officeDocument/2006/relationships">
+<p:sld xmlns:a="http://schemas.openxmlformats.org/drawingml/2006/main" xmlns:r="http://schemas.openxmlformats.org/officeDocument/2006/relationships" xmlns:p="http://schemas.openxmlformats.org/presentationml/2006/main">
   <p:cSld>
     <p:spTree>
       <p:nvGrpSpPr>
@@ -12094,7 +12683,14 @@
         <p:cNvGrpSpPr/>
         <p:nvPr/>
       </p:nvGrpSpPr>
-      <p:grpSpPr/>
+      <p:grpSpPr>
+        <a:xfrm>
+          <a:off x="0" y="0"/>
+          <a:ext cx="0" cy="0"/>
+          <a:chOff x="0" y="0"/>
+          <a:chExt cx="0" cy="0"/>
+        </a:xfrm>
+      </p:grpSpPr>
       <p:sp>
         <p:nvSpPr>
           <p:cNvPr id="2" name="Rectangle 1"/>
@@ -12136,6 +12732,7 @@
           <a:lstStyle/>
           <a:p>
             <a:pPr algn="ctr"/>
+            <a:endParaRPr/>
           </a:p>
         </p:txBody>
       </p:sp>
@@ -12156,7 +12753,7 @@
           <a:noFill/>
         </p:spPr>
         <p:txBody>
-          <a:bodyPr wrap="square" lIns="0" rIns="0" tIns="0" bIns="0" anchor="ctr">
+          <a:bodyPr wrap="square" lIns="0" tIns="0" rIns="0" bIns="0" anchor="ctr">
             <a:spAutoFit/>
           </a:bodyPr>
           <a:lstStyle/>
@@ -12191,7 +12788,7 @@
           <a:noFill/>
         </p:spPr>
         <p:txBody>
-          <a:bodyPr wrap="square" lIns="0" rIns="0" tIns="0" bIns="0" anchor="ctr">
+          <a:bodyPr wrap="square" lIns="0" tIns="0" rIns="0" bIns="0" anchor="ctr">
             <a:spAutoFit/>
           </a:bodyPr>
           <a:lstStyle/>
@@ -12226,7 +12823,7 @@
           <a:noFill/>
         </p:spPr>
         <p:txBody>
-          <a:bodyPr wrap="square" lIns="0" rIns="0" tIns="0" bIns="0" anchor="t">
+          <a:bodyPr wrap="square" lIns="0" tIns="0" rIns="0" bIns="0" anchor="t">
             <a:spAutoFit/>
           </a:bodyPr>
           <a:lstStyle/>
@@ -12261,7 +12858,7 @@
           <a:noFill/>
         </p:spPr>
         <p:txBody>
-          <a:bodyPr wrap="square" lIns="0" rIns="0" tIns="0" bIns="0" anchor="t">
+          <a:bodyPr wrap="square" lIns="0" tIns="0" rIns="0" bIns="0" anchor="t">
             <a:spAutoFit/>
           </a:bodyPr>
           <a:lstStyle/>
@@ -12296,7 +12893,7 @@
           <a:noFill/>
         </p:spPr>
         <p:txBody>
-          <a:bodyPr wrap="square" lIns="0" rIns="0" tIns="0" bIns="0" anchor="t">
+          <a:bodyPr wrap="square" lIns="0" tIns="0" rIns="0" bIns="0" anchor="t">
             <a:spAutoFit/>
           </a:bodyPr>
           <a:lstStyle/>
@@ -12355,6 +12952,7 @@
           <a:lstStyle/>
           <a:p>
             <a:pPr algn="ctr"/>
+            <a:endParaRPr/>
           </a:p>
         </p:txBody>
       </p:sp>
@@ -12399,6 +12997,7 @@
           <a:lstStyle/>
           <a:p>
             <a:pPr algn="ctr"/>
+            <a:endParaRPr/>
           </a:p>
         </p:txBody>
       </p:sp>
@@ -12419,7 +13018,7 @@
           <a:noFill/>
         </p:spPr>
         <p:txBody>
-          <a:bodyPr wrap="square" lIns="0" rIns="0" tIns="0" bIns="0" anchor="ctr">
+          <a:bodyPr wrap="square" lIns="0" tIns="0" rIns="0" bIns="0" anchor="ctr">
             <a:spAutoFit/>
           </a:bodyPr>
           <a:lstStyle/>
@@ -12480,6 +13079,7 @@
           <a:lstStyle/>
           <a:p>
             <a:pPr algn="ctr"/>
+            <a:endParaRPr/>
           </a:p>
         </p:txBody>
       </p:sp>
@@ -12524,6 +13124,7 @@
           <a:lstStyle/>
           <a:p>
             <a:pPr algn="ctr"/>
+            <a:endParaRPr/>
           </a:p>
         </p:txBody>
       </p:sp>
@@ -12544,7 +13145,7 @@
           <a:noFill/>
         </p:spPr>
         <p:txBody>
-          <a:bodyPr wrap="square" lIns="0" rIns="0" tIns="0" bIns="0" anchor="t">
+          <a:bodyPr wrap="square" lIns="0" tIns="0" rIns="0" bIns="0" anchor="t">
             <a:spAutoFit/>
           </a:bodyPr>
           <a:lstStyle/>
@@ -12740,6 +13341,7 @@
           <a:lstStyle/>
           <a:p>
             <a:pPr algn="ctr"/>
+            <a:endParaRPr/>
           </a:p>
         </p:txBody>
       </p:sp>
@@ -12784,6 +13386,7 @@
           <a:lstStyle/>
           <a:p>
             <a:pPr algn="ctr"/>
+            <a:endParaRPr/>
           </a:p>
         </p:txBody>
       </p:sp>
@@ -12804,7 +13407,7 @@
           <a:noFill/>
         </p:spPr>
         <p:txBody>
-          <a:bodyPr wrap="square" lIns="0" rIns="0" tIns="0" bIns="0" anchor="t">
+          <a:bodyPr wrap="square" lIns="0" tIns="0" rIns="0" bIns="0" anchor="t">
             <a:spAutoFit/>
           </a:bodyPr>
           <a:lstStyle/>
@@ -12998,7 +13601,7 @@
 </file>
 
 <file path=ppt/slides/slide18.xml><?xml version="1.0" encoding="utf-8"?>
-<p:sld xmlns:a="http://schemas.openxmlformats.org/drawingml/2006/main" xmlns:p="http://schemas.openxmlformats.org/presentationml/2006/main" xmlns:r="http://schemas.openxmlformats.org/officeDocument/2006/relationships">
+<p:sld xmlns:a="http://schemas.openxmlformats.org/drawingml/2006/main" xmlns:r="http://schemas.openxmlformats.org/officeDocument/2006/relationships" xmlns:p="http://schemas.openxmlformats.org/presentationml/2006/main">
   <p:cSld>
     <p:spTree>
       <p:nvGrpSpPr>
@@ -13006,7 +13609,14 @@
         <p:cNvGrpSpPr/>
         <p:nvPr/>
       </p:nvGrpSpPr>
-      <p:grpSpPr/>
+      <p:grpSpPr>
+        <a:xfrm>
+          <a:off x="0" y="0"/>
+          <a:ext cx="0" cy="0"/>
+          <a:chOff x="0" y="0"/>
+          <a:chExt cx="0" cy="0"/>
+        </a:xfrm>
+      </p:grpSpPr>
       <p:sp>
         <p:nvSpPr>
           <p:cNvPr id="2" name="Rectangle 1"/>
@@ -13015,7 +13625,7 @@
         </p:nvSpPr>
         <p:spPr>
           <a:xfrm>
-            <a:off x="0" y="0"/>
+            <a:off x="0" y="294290"/>
             <a:ext cx="12191695" cy="6858000"/>
           </a:xfrm>
           <a:prstGeom prst="rect">
@@ -13048,6 +13658,7 @@
           <a:lstStyle/>
           <a:p>
             <a:pPr algn="ctr"/>
+            <a:endParaRPr/>
           </a:p>
         </p:txBody>
       </p:sp>
@@ -13092,6 +13703,7 @@
           <a:lstStyle/>
           <a:p>
             <a:pPr algn="ctr"/>
+            <a:endParaRPr/>
           </a:p>
         </p:txBody>
       </p:sp>
@@ -13112,7 +13724,7 @@
           <a:noFill/>
         </p:spPr>
         <p:txBody>
-          <a:bodyPr wrap="square" lIns="0" rIns="0" tIns="0" bIns="0" anchor="t">
+          <a:bodyPr wrap="square" lIns="0" tIns="0" rIns="0" bIns="0" anchor="t">
             <a:spAutoFit/>
           </a:bodyPr>
           <a:lstStyle/>
@@ -13139,7 +13751,7 @@
         <p:spPr>
           <a:xfrm>
             <a:off x="731520" y="1371600"/>
-            <a:ext cx="10972800" cy="1188720"/>
+            <a:ext cx="10972800" cy="923330"/>
           </a:xfrm>
           <a:prstGeom prst="rect">
             <a:avLst/>
@@ -13147,21 +13759,36 @@
           <a:noFill/>
         </p:spPr>
         <p:txBody>
-          <a:bodyPr wrap="square" lIns="0" rIns="0" tIns="0" bIns="0" anchor="t">
+          <a:bodyPr wrap="square" lIns="0" tIns="0" rIns="0" bIns="0" anchor="t">
             <a:spAutoFit/>
           </a:bodyPr>
           <a:lstStyle/>
           <a:p>
             <a:pPr algn="l"/>
             <a:r>
-              <a:rPr sz="6000" b="1">
+              <a:rPr lang="ko-KR" altLang="en-US" sz="6000" b="1" dirty="0">
                 <a:solidFill>
                   <a:srgbClr val="FFFFFF"/>
                 </a:solidFill>
                 <a:latin typeface="맑은 고딕"/>
               </a:rPr>
-              <a:t>함께 가시겠습니까?</a:t>
-            </a:r>
+              <a:t>가자</a:t>
+            </a:r>
+            <a:r>
+              <a:rPr lang="en-US" altLang="ko-KR" sz="6000" b="1" dirty="0">
+                <a:solidFill>
+                  <a:srgbClr val="FFFFFF"/>
+                </a:solidFill>
+                <a:latin typeface="맑은 고딕"/>
+              </a:rPr>
+              <a:t>~</a:t>
+            </a:r>
+            <a:endParaRPr sz="6000" b="1" dirty="0">
+              <a:solidFill>
+                <a:srgbClr val="FFFFFF"/>
+              </a:solidFill>
+              <a:latin typeface="맑은 고딕"/>
+            </a:endParaRPr>
           </a:p>
         </p:txBody>
       </p:sp>
@@ -13182,7 +13809,7 @@
           <a:noFill/>
         </p:spPr>
         <p:txBody>
-          <a:bodyPr wrap="square" lIns="0" rIns="0" tIns="0" bIns="0" anchor="t">
+          <a:bodyPr wrap="square" lIns="0" tIns="0" rIns="0" bIns="0" anchor="t">
             <a:spAutoFit/>
           </a:bodyPr>
           <a:lstStyle/>
@@ -13200,6 +13827,15 @@
           </a:p>
           <a:p>
             <a:pPr algn="l"/>
+            <a:endParaRPr sz="1600" b="0">
+              <a:solidFill>
+                <a:srgbClr val="E8ECF2"/>
+              </a:solidFill>
+              <a:latin typeface="맑은 고딕"/>
+            </a:endParaRPr>
+          </a:p>
+          <a:p>
+            <a:pPr algn="l"/>
             <a:r>
               <a:rPr sz="1600" b="0">
                 <a:solidFill>
@@ -13207,7 +13843,7 @@
                 </a:solidFill>
                 <a:latin typeface="맑은 고딕"/>
               </a:rPr>
-              <a:t/>
+              <a:t>· Seed ₩15억, Pre-money ₩60억</a:t>
             </a:r>
           </a:p>
           <a:p>
@@ -13219,7 +13855,7 @@
                 </a:solidFill>
                 <a:latin typeface="맑은 고딕"/>
               </a:rPr>
-              <a:t>· Seed ₩15억, Pre-money ₩60억</a:t>
+              <a:t>· 18개월 내 ARR ₩74억, Series A Ready</a:t>
             </a:r>
           </a:p>
           <a:p>
@@ -13231,32 +13867,17 @@
                 </a:solidFill>
                 <a:latin typeface="맑은 고딕"/>
               </a:rPr>
-              <a:t>· 18개월 내 ARR ₩74억, Series A Ready</a:t>
+              <a:t>· '공공·법률·세무'를 장악하고 일본·아시아로 확장</a:t>
             </a:r>
           </a:p>
           <a:p>
             <a:pPr algn="l"/>
-            <a:r>
-              <a:rPr sz="1600" b="0">
-                <a:solidFill>
-                  <a:srgbClr val="E8ECF2"/>
-                </a:solidFill>
-                <a:latin typeface="맑은 고딕"/>
-              </a:rPr>
-              <a:t>· '공공·법률·세무'를 장악하고 일본·아시아로 확장</a:t>
-            </a:r>
-          </a:p>
-          <a:p>
-            <a:pPr algn="l"/>
-            <a:r>
-              <a:rPr sz="1600" b="0">
-                <a:solidFill>
-                  <a:srgbClr val="E8ECF2"/>
-                </a:solidFill>
-                <a:latin typeface="맑은 고딕"/>
-              </a:rPr>
-              <a:t/>
-            </a:r>
+            <a:endParaRPr sz="1600" b="0">
+              <a:solidFill>
+                <a:srgbClr val="E8ECF2"/>
+              </a:solidFill>
+              <a:latin typeface="맑은 고딕"/>
+            </a:endParaRPr>
           </a:p>
           <a:p>
             <a:pPr algn="l"/>
@@ -13313,6 +13934,7 @@
           <a:lstStyle/>
           <a:p>
             <a:pPr algn="ctr"/>
+            <a:endParaRPr/>
           </a:p>
         </p:txBody>
       </p:sp>
@@ -13333,7 +13955,7 @@
           <a:noFill/>
         </p:spPr>
         <p:txBody>
-          <a:bodyPr wrap="square" lIns="0" rIns="0" tIns="0" bIns="0" anchor="t">
+          <a:bodyPr wrap="square" lIns="0" tIns="0" rIns="0" bIns="0" anchor="t">
             <a:spAutoFit/>
           </a:bodyPr>
           <a:lstStyle/>
@@ -13368,7 +13990,7 @@
           <a:noFill/>
         </p:spPr>
         <p:txBody>
-          <a:bodyPr wrap="square" lIns="0" rIns="0" tIns="0" bIns="0" anchor="t">
+          <a:bodyPr wrap="square" lIns="0" tIns="0" rIns="0" bIns="0" anchor="t">
             <a:spAutoFit/>
           </a:bodyPr>
           <a:lstStyle/>
@@ -13395,7 +14017,7 @@
 </file>
 
 <file path=ppt/slides/slide2.xml><?xml version="1.0" encoding="utf-8"?>
-<p:sld xmlns:a="http://schemas.openxmlformats.org/drawingml/2006/main" xmlns:p="http://schemas.openxmlformats.org/presentationml/2006/main" xmlns:r="http://schemas.openxmlformats.org/officeDocument/2006/relationships">
+<p:sld xmlns:a="http://schemas.openxmlformats.org/drawingml/2006/main" xmlns:r="http://schemas.openxmlformats.org/officeDocument/2006/relationships" xmlns:p="http://schemas.openxmlformats.org/presentationml/2006/main">
   <p:cSld>
     <p:spTree>
       <p:nvGrpSpPr>
@@ -13403,7 +14025,14 @@
         <p:cNvGrpSpPr/>
         <p:nvPr/>
       </p:nvGrpSpPr>
-      <p:grpSpPr/>
+      <p:grpSpPr>
+        <a:xfrm>
+          <a:off x="0" y="0"/>
+          <a:ext cx="0" cy="0"/>
+          <a:chOff x="0" y="0"/>
+          <a:chExt cx="0" cy="0"/>
+        </a:xfrm>
+      </p:grpSpPr>
       <p:sp>
         <p:nvSpPr>
           <p:cNvPr id="2" name="Rectangle 1"/>
@@ -13445,6 +14074,7 @@
           <a:lstStyle/>
           <a:p>
             <a:pPr algn="ctr"/>
+            <a:endParaRPr/>
           </a:p>
         </p:txBody>
       </p:sp>
@@ -13465,7 +14095,7 @@
           <a:noFill/>
         </p:spPr>
         <p:txBody>
-          <a:bodyPr wrap="square" lIns="0" rIns="0" tIns="0" bIns="0" anchor="ctr">
+          <a:bodyPr wrap="square" lIns="0" tIns="0" rIns="0" bIns="0" anchor="ctr">
             <a:spAutoFit/>
           </a:bodyPr>
           <a:lstStyle/>
@@ -13500,7 +14130,7 @@
           <a:noFill/>
         </p:spPr>
         <p:txBody>
-          <a:bodyPr wrap="square" lIns="0" rIns="0" tIns="0" bIns="0" anchor="ctr">
+          <a:bodyPr wrap="square" lIns="0" tIns="0" rIns="0" bIns="0" anchor="ctr">
             <a:spAutoFit/>
           </a:bodyPr>
           <a:lstStyle/>
@@ -13535,7 +14165,7 @@
           <a:noFill/>
         </p:spPr>
         <p:txBody>
-          <a:bodyPr wrap="square" lIns="0" rIns="0" tIns="0" bIns="0" anchor="t">
+          <a:bodyPr wrap="square" lIns="0" tIns="0" rIns="0" bIns="0" anchor="t">
             <a:spAutoFit/>
           </a:bodyPr>
           <a:lstStyle/>
@@ -13570,7 +14200,7 @@
           <a:noFill/>
         </p:spPr>
         <p:txBody>
-          <a:bodyPr wrap="square" lIns="0" rIns="0" tIns="0" bIns="0" anchor="t">
+          <a:bodyPr wrap="square" lIns="0" tIns="0" rIns="0" bIns="0" anchor="t">
             <a:spAutoFit/>
           </a:bodyPr>
           <a:lstStyle/>
@@ -13605,7 +14235,7 @@
           <a:noFill/>
         </p:spPr>
         <p:txBody>
-          <a:bodyPr wrap="square" lIns="0" rIns="0" tIns="0" bIns="0" anchor="t">
+          <a:bodyPr wrap="square" lIns="0" tIns="0" rIns="0" bIns="0" anchor="t">
             <a:spAutoFit/>
           </a:bodyPr>
           <a:lstStyle/>
@@ -13664,6 +14294,7 @@
           <a:lstStyle/>
           <a:p>
             <a:pPr algn="ctr"/>
+            <a:endParaRPr/>
           </a:p>
         </p:txBody>
       </p:sp>
@@ -13708,6 +14339,7 @@
           <a:lstStyle/>
           <a:p>
             <a:pPr algn="ctr"/>
+            <a:endParaRPr/>
           </a:p>
         </p:txBody>
       </p:sp>
@@ -13728,7 +14360,7 @@
           <a:noFill/>
         </p:spPr>
         <p:txBody>
-          <a:bodyPr wrap="square" lIns="0" rIns="0" tIns="0" bIns="0" anchor="ctr">
+          <a:bodyPr wrap="square" lIns="0" tIns="0" rIns="0" bIns="0" anchor="ctr">
             <a:spAutoFit/>
           </a:bodyPr>
           <a:lstStyle/>
@@ -13789,6 +14421,7 @@
           <a:lstStyle/>
           <a:p>
             <a:pPr algn="ctr"/>
+            <a:endParaRPr/>
           </a:p>
         </p:txBody>
       </p:sp>
@@ -13833,6 +14466,7 @@
           <a:lstStyle/>
           <a:p>
             <a:pPr algn="ctr"/>
+            <a:endParaRPr/>
           </a:p>
         </p:txBody>
       </p:sp>
@@ -13853,7 +14487,7 @@
           <a:noFill/>
         </p:spPr>
         <p:txBody>
-          <a:bodyPr wrap="square" lIns="0" rIns="0" tIns="0" bIns="0" anchor="t">
+          <a:bodyPr wrap="square" lIns="0" tIns="0" rIns="0" bIns="0" anchor="t">
             <a:spAutoFit/>
           </a:bodyPr>
           <a:lstStyle/>
@@ -13888,7 +14522,7 @@
           <a:noFill/>
         </p:spPr>
         <p:txBody>
-          <a:bodyPr wrap="square" lIns="0" rIns="0" tIns="0" bIns="0" anchor="t">
+          <a:bodyPr wrap="square" lIns="0" tIns="0" rIns="0" bIns="0" anchor="t">
             <a:spAutoFit/>
           </a:bodyPr>
           <a:lstStyle/>
@@ -13949,6 +14583,7 @@
           <a:lstStyle/>
           <a:p>
             <a:pPr algn="ctr"/>
+            <a:endParaRPr/>
           </a:p>
         </p:txBody>
       </p:sp>
@@ -13993,6 +14628,7 @@
           <a:lstStyle/>
           <a:p>
             <a:pPr algn="ctr"/>
+            <a:endParaRPr/>
           </a:p>
         </p:txBody>
       </p:sp>
@@ -14013,7 +14649,7 @@
           <a:noFill/>
         </p:spPr>
         <p:txBody>
-          <a:bodyPr wrap="square" lIns="0" rIns="0" tIns="0" bIns="0" anchor="t">
+          <a:bodyPr wrap="square" lIns="0" tIns="0" rIns="0" bIns="0" anchor="t">
             <a:spAutoFit/>
           </a:bodyPr>
           <a:lstStyle/>
@@ -14048,7 +14684,7 @@
           <a:noFill/>
         </p:spPr>
         <p:txBody>
-          <a:bodyPr wrap="square" lIns="0" rIns="0" tIns="0" bIns="0" anchor="t">
+          <a:bodyPr wrap="square" lIns="0" tIns="0" rIns="0" bIns="0" anchor="t">
             <a:spAutoFit/>
           </a:bodyPr>
           <a:lstStyle/>
@@ -14109,6 +14745,7 @@
           <a:lstStyle/>
           <a:p>
             <a:pPr algn="ctr"/>
+            <a:endParaRPr/>
           </a:p>
         </p:txBody>
       </p:sp>
@@ -14153,6 +14790,7 @@
           <a:lstStyle/>
           <a:p>
             <a:pPr algn="ctr"/>
+            <a:endParaRPr/>
           </a:p>
         </p:txBody>
       </p:sp>
@@ -14173,7 +14811,7 @@
           <a:noFill/>
         </p:spPr>
         <p:txBody>
-          <a:bodyPr wrap="square" lIns="0" rIns="0" tIns="0" bIns="0" anchor="t">
+          <a:bodyPr wrap="square" lIns="0" tIns="0" rIns="0" bIns="0" anchor="t">
             <a:spAutoFit/>
           </a:bodyPr>
           <a:lstStyle/>
@@ -14208,7 +14846,7 @@
           <a:noFill/>
         </p:spPr>
         <p:txBody>
-          <a:bodyPr wrap="square" lIns="0" rIns="0" tIns="0" bIns="0" anchor="t">
+          <a:bodyPr wrap="square" lIns="0" tIns="0" rIns="0" bIns="0" anchor="t">
             <a:spAutoFit/>
           </a:bodyPr>
           <a:lstStyle/>
@@ -14269,6 +14907,7 @@
           <a:lstStyle/>
           <a:p>
             <a:pPr algn="ctr"/>
+            <a:endParaRPr/>
           </a:p>
         </p:txBody>
       </p:sp>
@@ -14313,6 +14952,7 @@
           <a:lstStyle/>
           <a:p>
             <a:pPr algn="ctr"/>
+            <a:endParaRPr/>
           </a:p>
         </p:txBody>
       </p:sp>
@@ -14333,7 +14973,7 @@
           <a:noFill/>
         </p:spPr>
         <p:txBody>
-          <a:bodyPr wrap="square" lIns="0" rIns="0" tIns="0" bIns="0" anchor="t">
+          <a:bodyPr wrap="square" lIns="0" tIns="0" rIns="0" bIns="0" anchor="t">
             <a:spAutoFit/>
           </a:bodyPr>
           <a:lstStyle/>
@@ -14368,7 +15008,7 @@
           <a:noFill/>
         </p:spPr>
         <p:txBody>
-          <a:bodyPr wrap="square" lIns="0" rIns="0" tIns="0" bIns="0" anchor="t">
+          <a:bodyPr wrap="square" lIns="0" tIns="0" rIns="0" bIns="0" anchor="t">
             <a:spAutoFit/>
           </a:bodyPr>
           <a:lstStyle/>
@@ -14429,6 +15069,7 @@
           <a:lstStyle/>
           <a:p>
             <a:pPr algn="ctr"/>
+            <a:endParaRPr/>
           </a:p>
         </p:txBody>
       </p:sp>
@@ -14473,6 +15114,7 @@
           <a:lstStyle/>
           <a:p>
             <a:pPr algn="ctr"/>
+            <a:endParaRPr/>
           </a:p>
         </p:txBody>
       </p:sp>
@@ -14493,7 +15135,7 @@
           <a:noFill/>
         </p:spPr>
         <p:txBody>
-          <a:bodyPr wrap="square" lIns="0" rIns="0" tIns="0" bIns="0" anchor="t">
+          <a:bodyPr wrap="square" lIns="0" tIns="0" rIns="0" bIns="0" anchor="t">
             <a:spAutoFit/>
           </a:bodyPr>
           <a:lstStyle/>
@@ -14657,6 +15299,7 @@
           <a:lstStyle/>
           <a:p>
             <a:pPr algn="ctr"/>
+            <a:endParaRPr/>
           </a:p>
         </p:txBody>
       </p:sp>
@@ -14701,6 +15344,7 @@
           <a:lstStyle/>
           <a:p>
             <a:pPr algn="ctr"/>
+            <a:endParaRPr/>
           </a:p>
         </p:txBody>
       </p:sp>
@@ -14721,7 +15365,7 @@
           <a:noFill/>
         </p:spPr>
         <p:txBody>
-          <a:bodyPr wrap="square" lIns="0" rIns="0" tIns="0" bIns="0" anchor="t">
+          <a:bodyPr wrap="square" lIns="0" tIns="0" rIns="0" bIns="0" anchor="t">
             <a:spAutoFit/>
           </a:bodyPr>
           <a:lstStyle/>
@@ -14851,7 +15495,7 @@
 </file>
 
 <file path=ppt/slides/slide3.xml><?xml version="1.0" encoding="utf-8"?>
-<p:sld xmlns:a="http://schemas.openxmlformats.org/drawingml/2006/main" xmlns:p="http://schemas.openxmlformats.org/presentationml/2006/main" xmlns:r="http://schemas.openxmlformats.org/officeDocument/2006/relationships">
+<p:sld xmlns:a="http://schemas.openxmlformats.org/drawingml/2006/main" xmlns:r="http://schemas.openxmlformats.org/officeDocument/2006/relationships" xmlns:p="http://schemas.openxmlformats.org/presentationml/2006/main">
   <p:cSld>
     <p:spTree>
       <p:nvGrpSpPr>
@@ -14859,7 +15503,14 @@
         <p:cNvGrpSpPr/>
         <p:nvPr/>
       </p:nvGrpSpPr>
-      <p:grpSpPr/>
+      <p:grpSpPr>
+        <a:xfrm>
+          <a:off x="0" y="0"/>
+          <a:ext cx="0" cy="0"/>
+          <a:chOff x="0" y="0"/>
+          <a:chExt cx="0" cy="0"/>
+        </a:xfrm>
+      </p:grpSpPr>
       <p:sp>
         <p:nvSpPr>
           <p:cNvPr id="2" name="Rectangle 1"/>
@@ -14901,6 +15552,7 @@
           <a:lstStyle/>
           <a:p>
             <a:pPr algn="ctr"/>
+            <a:endParaRPr/>
           </a:p>
         </p:txBody>
       </p:sp>
@@ -14921,7 +15573,7 @@
           <a:noFill/>
         </p:spPr>
         <p:txBody>
-          <a:bodyPr wrap="square" lIns="0" rIns="0" tIns="0" bIns="0" anchor="ctr">
+          <a:bodyPr wrap="square" lIns="0" tIns="0" rIns="0" bIns="0" anchor="ctr">
             <a:spAutoFit/>
           </a:bodyPr>
           <a:lstStyle/>
@@ -14956,7 +15608,7 @@
           <a:noFill/>
         </p:spPr>
         <p:txBody>
-          <a:bodyPr wrap="square" lIns="0" rIns="0" tIns="0" bIns="0" anchor="ctr">
+          <a:bodyPr wrap="square" lIns="0" tIns="0" rIns="0" bIns="0" anchor="ctr">
             <a:spAutoFit/>
           </a:bodyPr>
           <a:lstStyle/>
@@ -14991,7 +15643,7 @@
           <a:noFill/>
         </p:spPr>
         <p:txBody>
-          <a:bodyPr wrap="square" lIns="0" rIns="0" tIns="0" bIns="0" anchor="t">
+          <a:bodyPr wrap="square" lIns="0" tIns="0" rIns="0" bIns="0" anchor="t">
             <a:spAutoFit/>
           </a:bodyPr>
           <a:lstStyle/>
@@ -15026,7 +15678,7 @@
           <a:noFill/>
         </p:spPr>
         <p:txBody>
-          <a:bodyPr wrap="square" lIns="0" rIns="0" tIns="0" bIns="0" anchor="t">
+          <a:bodyPr wrap="square" lIns="0" tIns="0" rIns="0" bIns="0" anchor="t">
             <a:spAutoFit/>
           </a:bodyPr>
           <a:lstStyle/>
@@ -15061,7 +15713,7 @@
           <a:noFill/>
         </p:spPr>
         <p:txBody>
-          <a:bodyPr wrap="square" lIns="0" rIns="0" tIns="0" bIns="0" anchor="t">
+          <a:bodyPr wrap="square" lIns="0" tIns="0" rIns="0" bIns="0" anchor="t">
             <a:spAutoFit/>
           </a:bodyPr>
           <a:lstStyle/>
@@ -15120,6 +15772,7 @@
           <a:lstStyle/>
           <a:p>
             <a:pPr algn="ctr"/>
+            <a:endParaRPr/>
           </a:p>
         </p:txBody>
       </p:sp>
@@ -15164,6 +15817,7 @@
           <a:lstStyle/>
           <a:p>
             <a:pPr algn="ctr"/>
+            <a:endParaRPr/>
           </a:p>
         </p:txBody>
       </p:sp>
@@ -15184,7 +15838,7 @@
           <a:noFill/>
         </p:spPr>
         <p:txBody>
-          <a:bodyPr wrap="square" lIns="0" rIns="0" tIns="0" bIns="0" anchor="ctr">
+          <a:bodyPr wrap="square" lIns="0" tIns="0" rIns="0" bIns="0" anchor="ctr">
             <a:spAutoFit/>
           </a:bodyPr>
           <a:lstStyle/>
@@ -15221,9 +15875,27 @@
                 <a:tableStyleId>{5C22544A-7EE6-4342-B048-85BDC9FD1C3A}</a:tableStyleId>
               </a:tblPr>
               <a:tblGrid>
-                <a:gridCol w="1874520"/>
-                <a:gridCol w="5623560"/>
-                <a:gridCol w="3749040"/>
+                <a:gridCol w="1874520">
+                  <a:extLst>
+                    <a:ext uri="{9D8B030D-6E8A-4147-A177-3AD203B41FA5}">
+                      <a16:colId xmlns:a16="http://schemas.microsoft.com/office/drawing/2014/main" val="20000"/>
+                    </a:ext>
+                  </a:extLst>
+                </a:gridCol>
+                <a:gridCol w="5623560">
+                  <a:extLst>
+                    <a:ext uri="{9D8B030D-6E8A-4147-A177-3AD203B41FA5}">
+                      <a16:colId xmlns:a16="http://schemas.microsoft.com/office/drawing/2014/main" val="20001"/>
+                    </a:ext>
+                  </a:extLst>
+                </a:gridCol>
+                <a:gridCol w="3749040">
+                  <a:extLst>
+                    <a:ext uri="{9D8B030D-6E8A-4147-A177-3AD203B41FA5}">
+                      <a16:colId xmlns:a16="http://schemas.microsoft.com/office/drawing/2014/main" val="20002"/>
+                    </a:ext>
+                  </a:extLst>
+                </a:gridCol>
               </a:tblGrid>
               <a:tr h="502920">
                 <a:tc>
@@ -15295,11 +15967,16 @@
                     </a:solidFill>
                   </a:tcPr>
                 </a:tc>
+                <a:extLst>
+                  <a:ext uri="{0D108BD9-81ED-4DB2-BD59-A6C34878D82A}">
+                    <a16:rowId xmlns:a16="http://schemas.microsoft.com/office/drawing/2014/main" val="10000"/>
+                  </a:ext>
+                </a:extLst>
               </a:tr>
               <a:tr h="502920">
                 <a:tc>
                   <a:txBody>
-                    <a:bodyPr tIns="36576" bIns="36576"/>
+                    <a:bodyPr/>
                     <a:lstStyle/>
                     <a:p>
                       <a:pPr algn="l"/>
@@ -15322,7 +15999,7 @@
                 </a:tc>
                 <a:tc>
                   <a:txBody>
-                    <a:bodyPr tIns="36576" bIns="36576"/>
+                    <a:bodyPr/>
                     <a:lstStyle/>
                     <a:p>
                       <a:pPr algn="l"/>
@@ -15345,7 +16022,7 @@
                 </a:tc>
                 <a:tc>
                   <a:txBody>
-                    <a:bodyPr tIns="36576" bIns="36576"/>
+                    <a:bodyPr/>
                     <a:lstStyle/>
                     <a:p>
                       <a:pPr algn="l"/>
@@ -15366,11 +16043,16 @@
                     </a:solidFill>
                   </a:tcPr>
                 </a:tc>
+                <a:extLst>
+                  <a:ext uri="{0D108BD9-81ED-4DB2-BD59-A6C34878D82A}">
+                    <a16:rowId xmlns:a16="http://schemas.microsoft.com/office/drawing/2014/main" val="10001"/>
+                  </a:ext>
+                </a:extLst>
               </a:tr>
               <a:tr h="502920">
                 <a:tc>
                   <a:txBody>
-                    <a:bodyPr tIns="36576" bIns="36576"/>
+                    <a:bodyPr/>
                     <a:lstStyle/>
                     <a:p>
                       <a:pPr algn="l"/>
@@ -15393,7 +16075,7 @@
                 </a:tc>
                 <a:tc>
                   <a:txBody>
-                    <a:bodyPr tIns="36576" bIns="36576"/>
+                    <a:bodyPr/>
                     <a:lstStyle/>
                     <a:p>
                       <a:pPr algn="l"/>
@@ -15416,7 +16098,7 @@
                 </a:tc>
                 <a:tc>
                   <a:txBody>
-                    <a:bodyPr tIns="36576" bIns="36576"/>
+                    <a:bodyPr/>
                     <a:lstStyle/>
                     <a:p>
                       <a:pPr algn="l"/>
@@ -15437,11 +16119,16 @@
                     </a:solidFill>
                   </a:tcPr>
                 </a:tc>
+                <a:extLst>
+                  <a:ext uri="{0D108BD9-81ED-4DB2-BD59-A6C34878D82A}">
+                    <a16:rowId xmlns:a16="http://schemas.microsoft.com/office/drawing/2014/main" val="10002"/>
+                  </a:ext>
+                </a:extLst>
               </a:tr>
               <a:tr h="502920">
                 <a:tc>
                   <a:txBody>
-                    <a:bodyPr tIns="36576" bIns="36576"/>
+                    <a:bodyPr/>
                     <a:lstStyle/>
                     <a:p>
                       <a:pPr algn="l"/>
@@ -15464,7 +16151,7 @@
                 </a:tc>
                 <a:tc>
                   <a:txBody>
-                    <a:bodyPr tIns="36576" bIns="36576"/>
+                    <a:bodyPr/>
                     <a:lstStyle/>
                     <a:p>
                       <a:pPr algn="l"/>
@@ -15487,7 +16174,7 @@
                 </a:tc>
                 <a:tc>
                   <a:txBody>
-                    <a:bodyPr tIns="36576" bIns="36576"/>
+                    <a:bodyPr/>
                     <a:lstStyle/>
                     <a:p>
                       <a:pPr algn="l"/>
@@ -15508,11 +16195,16 @@
                     </a:solidFill>
                   </a:tcPr>
                 </a:tc>
+                <a:extLst>
+                  <a:ext uri="{0D108BD9-81ED-4DB2-BD59-A6C34878D82A}">
+                    <a16:rowId xmlns:a16="http://schemas.microsoft.com/office/drawing/2014/main" val="10003"/>
+                  </a:ext>
+                </a:extLst>
               </a:tr>
               <a:tr h="502920">
                 <a:tc>
                   <a:txBody>
-                    <a:bodyPr tIns="36576" bIns="36576"/>
+                    <a:bodyPr/>
                     <a:lstStyle/>
                     <a:p>
                       <a:pPr algn="l"/>
@@ -15535,7 +16227,7 @@
                 </a:tc>
                 <a:tc>
                   <a:txBody>
-                    <a:bodyPr tIns="36576" bIns="36576"/>
+                    <a:bodyPr/>
                     <a:lstStyle/>
                     <a:p>
                       <a:pPr algn="l"/>
@@ -15558,7 +16250,7 @@
                 </a:tc>
                 <a:tc>
                   <a:txBody>
-                    <a:bodyPr tIns="36576" bIns="36576"/>
+                    <a:bodyPr/>
                     <a:lstStyle/>
                     <a:p>
                       <a:pPr algn="l"/>
@@ -15579,11 +16271,16 @@
                     </a:solidFill>
                   </a:tcPr>
                 </a:tc>
+                <a:extLst>
+                  <a:ext uri="{0D108BD9-81ED-4DB2-BD59-A6C34878D82A}">
+                    <a16:rowId xmlns:a16="http://schemas.microsoft.com/office/drawing/2014/main" val="10004"/>
+                  </a:ext>
+                </a:extLst>
               </a:tr>
               <a:tr h="502920">
                 <a:tc>
                   <a:txBody>
-                    <a:bodyPr tIns="36576" bIns="36576"/>
+                    <a:bodyPr/>
                     <a:lstStyle/>
                     <a:p>
                       <a:pPr algn="l"/>
@@ -15606,7 +16303,7 @@
                 </a:tc>
                 <a:tc>
                   <a:txBody>
-                    <a:bodyPr tIns="36576" bIns="36576"/>
+                    <a:bodyPr/>
                     <a:lstStyle/>
                     <a:p>
                       <a:pPr algn="l"/>
@@ -15629,7 +16326,7 @@
                 </a:tc>
                 <a:tc>
                   <a:txBody>
-                    <a:bodyPr tIns="36576" bIns="36576"/>
+                    <a:bodyPr/>
                     <a:lstStyle/>
                     <a:p>
                       <a:pPr algn="l"/>
@@ -15650,6 +16347,11 @@
                     </a:solidFill>
                   </a:tcPr>
                 </a:tc>
+                <a:extLst>
+                  <a:ext uri="{0D108BD9-81ED-4DB2-BD59-A6C34878D82A}">
+                    <a16:rowId xmlns:a16="http://schemas.microsoft.com/office/drawing/2014/main" val="10005"/>
+                  </a:ext>
+                </a:extLst>
               </a:tr>
             </a:tbl>
           </a:graphicData>
@@ -15696,6 +16398,7 @@
           <a:lstStyle/>
           <a:p>
             <a:pPr algn="ctr"/>
+            <a:endParaRPr/>
           </a:p>
         </p:txBody>
       </p:sp>
@@ -15716,7 +16419,7 @@
           <a:noFill/>
         </p:spPr>
         <p:txBody>
-          <a:bodyPr wrap="square" lIns="0" rIns="0" tIns="0" bIns="0" anchor="t">
+          <a:bodyPr wrap="square" lIns="0" tIns="0" rIns="0" bIns="0" anchor="t">
             <a:spAutoFit/>
           </a:bodyPr>
           <a:lstStyle/>
@@ -15751,7 +16454,7 @@
           <a:noFill/>
         </p:spPr>
         <p:txBody>
-          <a:bodyPr wrap="square" lIns="0" rIns="0" tIns="0" bIns="0" anchor="t">
+          <a:bodyPr wrap="square" lIns="0" tIns="0" rIns="0" bIns="0" anchor="t">
             <a:spAutoFit/>
           </a:bodyPr>
           <a:lstStyle/>
@@ -15778,7 +16481,7 @@
 </file>
 
 <file path=ppt/slides/slide4.xml><?xml version="1.0" encoding="utf-8"?>
-<p:sld xmlns:a="http://schemas.openxmlformats.org/drawingml/2006/main" xmlns:p="http://schemas.openxmlformats.org/presentationml/2006/main" xmlns:r="http://schemas.openxmlformats.org/officeDocument/2006/relationships">
+<p:sld xmlns:a="http://schemas.openxmlformats.org/drawingml/2006/main" xmlns:r="http://schemas.openxmlformats.org/officeDocument/2006/relationships" xmlns:p="http://schemas.openxmlformats.org/presentationml/2006/main">
   <p:cSld>
     <p:spTree>
       <p:nvGrpSpPr>
@@ -15786,7 +16489,14 @@
         <p:cNvGrpSpPr/>
         <p:nvPr/>
       </p:nvGrpSpPr>
-      <p:grpSpPr/>
+      <p:grpSpPr>
+        <a:xfrm>
+          <a:off x="0" y="0"/>
+          <a:ext cx="0" cy="0"/>
+          <a:chOff x="0" y="0"/>
+          <a:chExt cx="0" cy="0"/>
+        </a:xfrm>
+      </p:grpSpPr>
       <p:sp>
         <p:nvSpPr>
           <p:cNvPr id="2" name="Rectangle 1"/>
@@ -15828,6 +16538,7 @@
           <a:lstStyle/>
           <a:p>
             <a:pPr algn="ctr"/>
+            <a:endParaRPr/>
           </a:p>
         </p:txBody>
       </p:sp>
@@ -15848,7 +16559,7 @@
           <a:noFill/>
         </p:spPr>
         <p:txBody>
-          <a:bodyPr wrap="square" lIns="0" rIns="0" tIns="0" bIns="0" anchor="ctr">
+          <a:bodyPr wrap="square" lIns="0" tIns="0" rIns="0" bIns="0" anchor="ctr">
             <a:spAutoFit/>
           </a:bodyPr>
           <a:lstStyle/>
@@ -15883,7 +16594,7 @@
           <a:noFill/>
         </p:spPr>
         <p:txBody>
-          <a:bodyPr wrap="square" lIns="0" rIns="0" tIns="0" bIns="0" anchor="ctr">
+          <a:bodyPr wrap="square" lIns="0" tIns="0" rIns="0" bIns="0" anchor="ctr">
             <a:spAutoFit/>
           </a:bodyPr>
           <a:lstStyle/>
@@ -15918,7 +16629,7 @@
           <a:noFill/>
         </p:spPr>
         <p:txBody>
-          <a:bodyPr wrap="square" lIns="0" rIns="0" tIns="0" bIns="0" anchor="t">
+          <a:bodyPr wrap="square" lIns="0" tIns="0" rIns="0" bIns="0" anchor="t">
             <a:spAutoFit/>
           </a:bodyPr>
           <a:lstStyle/>
@@ -15953,7 +16664,7 @@
           <a:noFill/>
         </p:spPr>
         <p:txBody>
-          <a:bodyPr wrap="square" lIns="0" rIns="0" tIns="0" bIns="0" anchor="t">
+          <a:bodyPr wrap="square" lIns="0" tIns="0" rIns="0" bIns="0" anchor="t">
             <a:spAutoFit/>
           </a:bodyPr>
           <a:lstStyle/>
@@ -15988,7 +16699,7 @@
           <a:noFill/>
         </p:spPr>
         <p:txBody>
-          <a:bodyPr wrap="square" lIns="0" rIns="0" tIns="0" bIns="0" anchor="t">
+          <a:bodyPr wrap="square" lIns="0" tIns="0" rIns="0" bIns="0" anchor="t">
             <a:spAutoFit/>
           </a:bodyPr>
           <a:lstStyle/>
@@ -16047,6 +16758,7 @@
           <a:lstStyle/>
           <a:p>
             <a:pPr algn="ctr"/>
+            <a:endParaRPr/>
           </a:p>
         </p:txBody>
       </p:sp>
@@ -16091,6 +16803,7 @@
           <a:lstStyle/>
           <a:p>
             <a:pPr algn="ctr"/>
+            <a:endParaRPr/>
           </a:p>
         </p:txBody>
       </p:sp>
@@ -16111,7 +16824,7 @@
           <a:noFill/>
         </p:spPr>
         <p:txBody>
-          <a:bodyPr wrap="square" lIns="0" rIns="0" tIns="0" bIns="0" anchor="ctr">
+          <a:bodyPr wrap="square" lIns="0" tIns="0" rIns="0" bIns="0" anchor="ctr">
             <a:spAutoFit/>
           </a:bodyPr>
           <a:lstStyle/>
@@ -16172,6 +16885,7 @@
           <a:lstStyle/>
           <a:p>
             <a:pPr algn="ctr"/>
+            <a:endParaRPr/>
           </a:p>
         </p:txBody>
       </p:sp>
@@ -16216,6 +16930,7 @@
           <a:lstStyle/>
           <a:p>
             <a:pPr algn="ctr"/>
+            <a:endParaRPr/>
           </a:p>
         </p:txBody>
       </p:sp>
@@ -16236,7 +16951,7 @@
           <a:noFill/>
         </p:spPr>
         <p:txBody>
-          <a:bodyPr wrap="square" lIns="0" rIns="0" tIns="0" bIns="0" anchor="t">
+          <a:bodyPr wrap="square" lIns="0" tIns="0" rIns="0" bIns="0" anchor="t">
             <a:spAutoFit/>
           </a:bodyPr>
           <a:lstStyle/>
@@ -16271,7 +16986,7 @@
           <a:noFill/>
         </p:spPr>
         <p:txBody>
-          <a:bodyPr wrap="square" lIns="0" rIns="0" tIns="0" bIns="0" anchor="t">
+          <a:bodyPr wrap="square" lIns="0" tIns="0" rIns="0" bIns="0" anchor="t">
             <a:spAutoFit/>
           </a:bodyPr>
           <a:lstStyle/>
@@ -16332,6 +17047,7 @@
           <a:lstStyle/>
           <a:p>
             <a:pPr algn="ctr"/>
+            <a:endParaRPr/>
           </a:p>
         </p:txBody>
       </p:sp>
@@ -16376,6 +17092,7 @@
           <a:lstStyle/>
           <a:p>
             <a:pPr algn="ctr"/>
+            <a:endParaRPr/>
           </a:p>
         </p:txBody>
       </p:sp>
@@ -16396,7 +17113,7 @@
           <a:noFill/>
         </p:spPr>
         <p:txBody>
-          <a:bodyPr wrap="square" lIns="0" rIns="0" tIns="0" bIns="0" anchor="t">
+          <a:bodyPr wrap="square" lIns="0" tIns="0" rIns="0" bIns="0" anchor="t">
             <a:spAutoFit/>
           </a:bodyPr>
           <a:lstStyle/>
@@ -16431,7 +17148,7 @@
           <a:noFill/>
         </p:spPr>
         <p:txBody>
-          <a:bodyPr wrap="square" lIns="0" rIns="0" tIns="0" bIns="0" anchor="t">
+          <a:bodyPr wrap="square" lIns="0" tIns="0" rIns="0" bIns="0" anchor="t">
             <a:spAutoFit/>
           </a:bodyPr>
           <a:lstStyle/>
@@ -16492,6 +17209,7 @@
           <a:lstStyle/>
           <a:p>
             <a:pPr algn="ctr"/>
+            <a:endParaRPr/>
           </a:p>
         </p:txBody>
       </p:sp>
@@ -16536,6 +17254,7 @@
           <a:lstStyle/>
           <a:p>
             <a:pPr algn="ctr"/>
+            <a:endParaRPr/>
           </a:p>
         </p:txBody>
       </p:sp>
@@ -16556,7 +17275,7 @@
           <a:noFill/>
         </p:spPr>
         <p:txBody>
-          <a:bodyPr wrap="square" lIns="0" rIns="0" tIns="0" bIns="0" anchor="t">
+          <a:bodyPr wrap="square" lIns="0" tIns="0" rIns="0" bIns="0" anchor="t">
             <a:spAutoFit/>
           </a:bodyPr>
           <a:lstStyle/>
@@ -16591,7 +17310,7 @@
           <a:noFill/>
         </p:spPr>
         <p:txBody>
-          <a:bodyPr wrap="square" lIns="0" rIns="0" tIns="0" bIns="0" anchor="t">
+          <a:bodyPr wrap="square" lIns="0" tIns="0" rIns="0" bIns="0" anchor="t">
             <a:spAutoFit/>
           </a:bodyPr>
           <a:lstStyle/>
@@ -16652,6 +17371,7 @@
           <a:lstStyle/>
           <a:p>
             <a:pPr algn="ctr"/>
+            <a:endParaRPr/>
           </a:p>
         </p:txBody>
       </p:sp>
@@ -16696,6 +17416,7 @@
           <a:lstStyle/>
           <a:p>
             <a:pPr algn="ctr"/>
+            <a:endParaRPr/>
           </a:p>
         </p:txBody>
       </p:sp>
@@ -16716,7 +17437,7 @@
           <a:noFill/>
         </p:spPr>
         <p:txBody>
-          <a:bodyPr wrap="square" lIns="0" rIns="0" tIns="0" bIns="0" anchor="t">
+          <a:bodyPr wrap="square" lIns="0" tIns="0" rIns="0" bIns="0" anchor="t">
             <a:spAutoFit/>
           </a:bodyPr>
           <a:lstStyle/>
@@ -16751,7 +17472,7 @@
           <a:noFill/>
         </p:spPr>
         <p:txBody>
-          <a:bodyPr wrap="square" lIns="0" rIns="0" tIns="0" bIns="0" anchor="t">
+          <a:bodyPr wrap="square" lIns="0" tIns="0" rIns="0" bIns="0" anchor="t">
             <a:spAutoFit/>
           </a:bodyPr>
           <a:lstStyle/>
@@ -16812,6 +17533,7 @@
           <a:lstStyle/>
           <a:p>
             <a:pPr algn="ctr"/>
+            <a:endParaRPr/>
           </a:p>
         </p:txBody>
       </p:sp>
@@ -16856,6 +17578,7 @@
           <a:lstStyle/>
           <a:p>
             <a:pPr algn="ctr"/>
+            <a:endParaRPr/>
           </a:p>
         </p:txBody>
       </p:sp>
@@ -16876,7 +17599,7 @@
           <a:noFill/>
         </p:spPr>
         <p:txBody>
-          <a:bodyPr wrap="square" lIns="0" rIns="0" tIns="0" bIns="0" anchor="t">
+          <a:bodyPr wrap="square" lIns="0" tIns="0" rIns="0" bIns="0" anchor="t">
             <a:spAutoFit/>
           </a:bodyPr>
           <a:lstStyle/>
@@ -17022,7 +17745,7 @@
 </file>
 
 <file path=ppt/slides/slide5.xml><?xml version="1.0" encoding="utf-8"?>
-<p:sld xmlns:a="http://schemas.openxmlformats.org/drawingml/2006/main" xmlns:p="http://schemas.openxmlformats.org/presentationml/2006/main" xmlns:r="http://schemas.openxmlformats.org/officeDocument/2006/relationships">
+<p:sld xmlns:a="http://schemas.openxmlformats.org/drawingml/2006/main" xmlns:r="http://schemas.openxmlformats.org/officeDocument/2006/relationships" xmlns:p="http://schemas.openxmlformats.org/presentationml/2006/main">
   <p:cSld>
     <p:spTree>
       <p:nvGrpSpPr>
@@ -17030,7 +17753,14 @@
         <p:cNvGrpSpPr/>
         <p:nvPr/>
       </p:nvGrpSpPr>
-      <p:grpSpPr/>
+      <p:grpSpPr>
+        <a:xfrm>
+          <a:off x="0" y="0"/>
+          <a:ext cx="0" cy="0"/>
+          <a:chOff x="0" y="0"/>
+          <a:chExt cx="0" cy="0"/>
+        </a:xfrm>
+      </p:grpSpPr>
       <p:sp>
         <p:nvSpPr>
           <p:cNvPr id="2" name="Rectangle 1"/>
@@ -17072,6 +17802,7 @@
           <a:lstStyle/>
           <a:p>
             <a:pPr algn="ctr"/>
+            <a:endParaRPr/>
           </a:p>
         </p:txBody>
       </p:sp>
@@ -17092,7 +17823,7 @@
           <a:noFill/>
         </p:spPr>
         <p:txBody>
-          <a:bodyPr wrap="square" lIns="0" rIns="0" tIns="0" bIns="0" anchor="ctr">
+          <a:bodyPr wrap="square" lIns="0" tIns="0" rIns="0" bIns="0" anchor="ctr">
             <a:spAutoFit/>
           </a:bodyPr>
           <a:lstStyle/>
@@ -17127,7 +17858,7 @@
           <a:noFill/>
         </p:spPr>
         <p:txBody>
-          <a:bodyPr wrap="square" lIns="0" rIns="0" tIns="0" bIns="0" anchor="ctr">
+          <a:bodyPr wrap="square" lIns="0" tIns="0" rIns="0" bIns="0" anchor="ctr">
             <a:spAutoFit/>
           </a:bodyPr>
           <a:lstStyle/>
@@ -17162,7 +17893,7 @@
           <a:noFill/>
         </p:spPr>
         <p:txBody>
-          <a:bodyPr wrap="square" lIns="0" rIns="0" tIns="0" bIns="0" anchor="t">
+          <a:bodyPr wrap="square" lIns="0" tIns="0" rIns="0" bIns="0" anchor="t">
             <a:spAutoFit/>
           </a:bodyPr>
           <a:lstStyle/>
@@ -17197,7 +17928,7 @@
           <a:noFill/>
         </p:spPr>
         <p:txBody>
-          <a:bodyPr wrap="square" lIns="0" rIns="0" tIns="0" bIns="0" anchor="t">
+          <a:bodyPr wrap="square" lIns="0" tIns="0" rIns="0" bIns="0" anchor="t">
             <a:spAutoFit/>
           </a:bodyPr>
           <a:lstStyle/>
@@ -17232,7 +17963,7 @@
           <a:noFill/>
         </p:spPr>
         <p:txBody>
-          <a:bodyPr wrap="square" lIns="0" rIns="0" tIns="0" bIns="0" anchor="t">
+          <a:bodyPr wrap="square" lIns="0" tIns="0" rIns="0" bIns="0" anchor="t">
             <a:spAutoFit/>
           </a:bodyPr>
           <a:lstStyle/>
@@ -17291,6 +18022,7 @@
           <a:lstStyle/>
           <a:p>
             <a:pPr algn="ctr"/>
+            <a:endParaRPr/>
           </a:p>
         </p:txBody>
       </p:sp>
@@ -17335,6 +18067,7 @@
           <a:lstStyle/>
           <a:p>
             <a:pPr algn="ctr"/>
+            <a:endParaRPr/>
           </a:p>
         </p:txBody>
       </p:sp>
@@ -17355,7 +18088,7 @@
           <a:noFill/>
         </p:spPr>
         <p:txBody>
-          <a:bodyPr wrap="square" lIns="0" rIns="0" tIns="0" bIns="0" anchor="ctr">
+          <a:bodyPr wrap="square" lIns="0" tIns="0" rIns="0" bIns="0" anchor="ctr">
             <a:spAutoFit/>
           </a:bodyPr>
           <a:lstStyle/>
@@ -17414,6 +18147,7 @@
           <a:lstStyle/>
           <a:p>
             <a:pPr algn="ctr"/>
+            <a:endParaRPr/>
           </a:p>
         </p:txBody>
       </p:sp>
@@ -17458,6 +18192,7 @@
           <a:lstStyle/>
           <a:p>
             <a:pPr algn="ctr"/>
+            <a:endParaRPr/>
           </a:p>
         </p:txBody>
       </p:sp>
@@ -17502,6 +18237,7 @@
           <a:lstStyle/>
           <a:p>
             <a:pPr algn="ctr"/>
+            <a:endParaRPr/>
           </a:p>
         </p:txBody>
       </p:sp>
@@ -17522,7 +18258,7 @@
           <a:noFill/>
         </p:spPr>
         <p:txBody>
-          <a:bodyPr wrap="square" lIns="0" rIns="0" tIns="0" bIns="0" anchor="t">
+          <a:bodyPr wrap="square" lIns="0" tIns="0" rIns="0" bIns="0" anchor="t">
             <a:spAutoFit/>
           </a:bodyPr>
           <a:lstStyle/>
@@ -17557,7 +18293,7 @@
           <a:noFill/>
         </p:spPr>
         <p:txBody>
-          <a:bodyPr wrap="square" lIns="0" rIns="0" tIns="0" bIns="0" anchor="t">
+          <a:bodyPr wrap="square" lIns="0" tIns="0" rIns="0" bIns="0" anchor="t">
             <a:spAutoFit/>
           </a:bodyPr>
           <a:lstStyle/>
@@ -17592,7 +18328,7 @@
           <a:noFill/>
         </p:spPr>
         <p:txBody>
-          <a:bodyPr wrap="square" lIns="0" rIns="0" tIns="0" bIns="0" anchor="t">
+          <a:bodyPr wrap="square" lIns="0" tIns="0" rIns="0" bIns="0" anchor="t">
             <a:spAutoFit/>
           </a:bodyPr>
           <a:lstStyle/>
@@ -17627,7 +18363,7 @@
           <a:noFill/>
         </p:spPr>
         <p:txBody>
-          <a:bodyPr wrap="square" lIns="0" rIns="0" tIns="0" bIns="0" anchor="t">
+          <a:bodyPr wrap="square" lIns="0" tIns="0" rIns="0" bIns="0" anchor="t">
             <a:spAutoFit/>
           </a:bodyPr>
           <a:lstStyle/>
@@ -17662,7 +18398,7 @@
           <a:noFill/>
         </p:spPr>
         <p:txBody>
-          <a:bodyPr wrap="square" lIns="0" rIns="0" tIns="0" bIns="0" anchor="t">
+          <a:bodyPr wrap="square" lIns="0" tIns="0" rIns="0" bIns="0" anchor="t">
             <a:spAutoFit/>
           </a:bodyPr>
           <a:lstStyle/>
@@ -17697,7 +18433,7 @@
           <a:noFill/>
         </p:spPr>
         <p:txBody>
-          <a:bodyPr wrap="square" lIns="0" rIns="0" tIns="0" bIns="0" anchor="t">
+          <a:bodyPr wrap="square" lIns="0" tIns="0" rIns="0" bIns="0" anchor="t">
             <a:spAutoFit/>
           </a:bodyPr>
           <a:lstStyle/>
@@ -17732,7 +18468,7 @@
           <a:noFill/>
         </p:spPr>
         <p:txBody>
-          <a:bodyPr wrap="square" lIns="0" rIns="0" tIns="0" bIns="0" anchor="t">
+          <a:bodyPr wrap="square" lIns="0" tIns="0" rIns="0" bIns="0" anchor="t">
             <a:spAutoFit/>
           </a:bodyPr>
           <a:lstStyle/>
@@ -17767,7 +18503,7 @@
           <a:noFill/>
         </p:spPr>
         <p:txBody>
-          <a:bodyPr wrap="square" lIns="0" rIns="0" tIns="0" bIns="0" anchor="t">
+          <a:bodyPr wrap="square" lIns="0" tIns="0" rIns="0" bIns="0" anchor="t">
             <a:spAutoFit/>
           </a:bodyPr>
           <a:lstStyle/>
@@ -17802,7 +18538,7 @@
           <a:noFill/>
         </p:spPr>
         <p:txBody>
-          <a:bodyPr wrap="square" lIns="0" rIns="0" tIns="0" bIns="0" anchor="t">
+          <a:bodyPr wrap="square" lIns="0" tIns="0" rIns="0" bIns="0" anchor="t">
             <a:spAutoFit/>
           </a:bodyPr>
           <a:lstStyle/>
@@ -17837,7 +18573,7 @@
           <a:noFill/>
         </p:spPr>
         <p:txBody>
-          <a:bodyPr wrap="square" lIns="0" rIns="0" tIns="0" bIns="0" anchor="t">
+          <a:bodyPr wrap="square" lIns="0" tIns="0" rIns="0" bIns="0" anchor="t">
             <a:spAutoFit/>
           </a:bodyPr>
           <a:lstStyle/>
@@ -17898,6 +18634,7 @@
           <a:lstStyle/>
           <a:p>
             <a:pPr algn="ctr"/>
+            <a:endParaRPr/>
           </a:p>
         </p:txBody>
       </p:sp>
@@ -17918,7 +18655,7 @@
           <a:noFill/>
         </p:spPr>
         <p:txBody>
-          <a:bodyPr wrap="square" lIns="0" rIns="0" tIns="0" bIns="0" anchor="t">
+          <a:bodyPr wrap="square" lIns="0" tIns="0" rIns="0" bIns="0" anchor="t">
             <a:spAutoFit/>
           </a:bodyPr>
           <a:lstStyle/>
@@ -17945,7 +18682,7 @@
 </file>
 
 <file path=ppt/slides/slide6.xml><?xml version="1.0" encoding="utf-8"?>
-<p:sld xmlns:a="http://schemas.openxmlformats.org/drawingml/2006/main" xmlns:p="http://schemas.openxmlformats.org/presentationml/2006/main" xmlns:r="http://schemas.openxmlformats.org/officeDocument/2006/relationships">
+<p:sld xmlns:a="http://schemas.openxmlformats.org/drawingml/2006/main" xmlns:r="http://schemas.openxmlformats.org/officeDocument/2006/relationships" xmlns:p="http://schemas.openxmlformats.org/presentationml/2006/main">
   <p:cSld>
     <p:spTree>
       <p:nvGrpSpPr>
@@ -17953,7 +18690,14 @@
         <p:cNvGrpSpPr/>
         <p:nvPr/>
       </p:nvGrpSpPr>
-      <p:grpSpPr/>
+      <p:grpSpPr>
+        <a:xfrm>
+          <a:off x="0" y="0"/>
+          <a:ext cx="0" cy="0"/>
+          <a:chOff x="0" y="0"/>
+          <a:chExt cx="0" cy="0"/>
+        </a:xfrm>
+      </p:grpSpPr>
       <p:sp>
         <p:nvSpPr>
           <p:cNvPr id="2" name="Rectangle 1"/>
@@ -17995,6 +18739,7 @@
           <a:lstStyle/>
           <a:p>
             <a:pPr algn="ctr"/>
+            <a:endParaRPr/>
           </a:p>
         </p:txBody>
       </p:sp>
@@ -18015,7 +18760,7 @@
           <a:noFill/>
         </p:spPr>
         <p:txBody>
-          <a:bodyPr wrap="square" lIns="0" rIns="0" tIns="0" bIns="0" anchor="ctr">
+          <a:bodyPr wrap="square" lIns="0" tIns="0" rIns="0" bIns="0" anchor="ctr">
             <a:spAutoFit/>
           </a:bodyPr>
           <a:lstStyle/>
@@ -18050,7 +18795,7 @@
           <a:noFill/>
         </p:spPr>
         <p:txBody>
-          <a:bodyPr wrap="square" lIns="0" rIns="0" tIns="0" bIns="0" anchor="ctr">
+          <a:bodyPr wrap="square" lIns="0" tIns="0" rIns="0" bIns="0" anchor="ctr">
             <a:spAutoFit/>
           </a:bodyPr>
           <a:lstStyle/>
@@ -18085,7 +18830,7 @@
           <a:noFill/>
         </p:spPr>
         <p:txBody>
-          <a:bodyPr wrap="square" lIns="0" rIns="0" tIns="0" bIns="0" anchor="t">
+          <a:bodyPr wrap="square" lIns="0" tIns="0" rIns="0" bIns="0" anchor="t">
             <a:spAutoFit/>
           </a:bodyPr>
           <a:lstStyle/>
@@ -18120,7 +18865,7 @@
           <a:noFill/>
         </p:spPr>
         <p:txBody>
-          <a:bodyPr wrap="square" lIns="0" rIns="0" tIns="0" bIns="0" anchor="t">
+          <a:bodyPr wrap="square" lIns="0" tIns="0" rIns="0" bIns="0" anchor="t">
             <a:spAutoFit/>
           </a:bodyPr>
           <a:lstStyle/>
@@ -18155,7 +18900,7 @@
           <a:noFill/>
         </p:spPr>
         <p:txBody>
-          <a:bodyPr wrap="square" lIns="0" rIns="0" tIns="0" bIns="0" anchor="t">
+          <a:bodyPr wrap="square" lIns="0" tIns="0" rIns="0" bIns="0" anchor="t">
             <a:spAutoFit/>
           </a:bodyPr>
           <a:lstStyle/>
@@ -18214,6 +18959,7 @@
           <a:lstStyle/>
           <a:p>
             <a:pPr algn="ctr"/>
+            <a:endParaRPr/>
           </a:p>
         </p:txBody>
       </p:sp>
@@ -18258,6 +19004,7 @@
           <a:lstStyle/>
           <a:p>
             <a:pPr algn="ctr"/>
+            <a:endParaRPr/>
           </a:p>
         </p:txBody>
       </p:sp>
@@ -18278,7 +19025,7 @@
           <a:noFill/>
         </p:spPr>
         <p:txBody>
-          <a:bodyPr wrap="square" lIns="0" rIns="0" tIns="0" bIns="0" anchor="ctr">
+          <a:bodyPr wrap="square" lIns="0" tIns="0" rIns="0" bIns="0" anchor="ctr">
             <a:spAutoFit/>
           </a:bodyPr>
           <a:lstStyle/>
@@ -18339,6 +19086,7 @@
           <a:lstStyle/>
           <a:p>
             <a:pPr algn="ctr"/>
+            <a:endParaRPr/>
           </a:p>
         </p:txBody>
       </p:sp>
@@ -18383,6 +19131,7 @@
           <a:lstStyle/>
           <a:p>
             <a:pPr algn="ctr"/>
+            <a:endParaRPr/>
           </a:p>
         </p:txBody>
       </p:sp>
@@ -18403,7 +19152,7 @@
           <a:noFill/>
         </p:spPr>
         <p:txBody>
-          <a:bodyPr wrap="square" lIns="0" rIns="0" tIns="0" bIns="0" anchor="t">
+          <a:bodyPr wrap="square" lIns="0" tIns="0" rIns="0" bIns="0" anchor="t">
             <a:spAutoFit/>
           </a:bodyPr>
           <a:lstStyle/>
@@ -18438,7 +19187,7 @@
           <a:noFill/>
         </p:spPr>
         <p:txBody>
-          <a:bodyPr wrap="square" lIns="0" rIns="0" tIns="0" bIns="0" anchor="t">
+          <a:bodyPr wrap="square" lIns="0" tIns="0" rIns="0" bIns="0" anchor="t">
             <a:spAutoFit/>
           </a:bodyPr>
           <a:lstStyle/>
@@ -18473,7 +19222,7 @@
           <a:noFill/>
         </p:spPr>
         <p:txBody>
-          <a:bodyPr wrap="square" lIns="0" rIns="0" tIns="0" bIns="0" anchor="t">
+          <a:bodyPr wrap="square" lIns="0" tIns="0" rIns="0" bIns="0" anchor="t">
             <a:spAutoFit/>
           </a:bodyPr>
           <a:lstStyle/>
@@ -18508,7 +19257,7 @@
           <a:noFill/>
         </p:spPr>
         <p:txBody>
-          <a:bodyPr wrap="square" lIns="0" rIns="0" tIns="0" bIns="0" anchor="t">
+          <a:bodyPr wrap="square" lIns="0" tIns="0" rIns="0" bIns="0" anchor="t">
             <a:spAutoFit/>
           </a:bodyPr>
           <a:lstStyle/>
@@ -18569,6 +19318,7 @@
           <a:lstStyle/>
           <a:p>
             <a:pPr algn="ctr"/>
+            <a:endParaRPr/>
           </a:p>
         </p:txBody>
       </p:sp>
@@ -18613,6 +19363,7 @@
           <a:lstStyle/>
           <a:p>
             <a:pPr algn="ctr"/>
+            <a:endParaRPr/>
           </a:p>
         </p:txBody>
       </p:sp>
@@ -18633,7 +19384,7 @@
           <a:noFill/>
         </p:spPr>
         <p:txBody>
-          <a:bodyPr wrap="square" lIns="0" rIns="0" tIns="0" bIns="0" anchor="t">
+          <a:bodyPr wrap="square" lIns="0" tIns="0" rIns="0" bIns="0" anchor="t">
             <a:spAutoFit/>
           </a:bodyPr>
           <a:lstStyle/>
@@ -18668,7 +19419,7 @@
           <a:noFill/>
         </p:spPr>
         <p:txBody>
-          <a:bodyPr wrap="square" lIns="0" rIns="0" tIns="0" bIns="0" anchor="t">
+          <a:bodyPr wrap="square" lIns="0" tIns="0" rIns="0" bIns="0" anchor="t">
             <a:spAutoFit/>
           </a:bodyPr>
           <a:lstStyle/>
@@ -18703,7 +19454,7 @@
           <a:noFill/>
         </p:spPr>
         <p:txBody>
-          <a:bodyPr wrap="square" lIns="0" rIns="0" tIns="0" bIns="0" anchor="t">
+          <a:bodyPr wrap="square" lIns="0" tIns="0" rIns="0" bIns="0" anchor="t">
             <a:spAutoFit/>
           </a:bodyPr>
           <a:lstStyle/>
@@ -18738,7 +19489,7 @@
           <a:noFill/>
         </p:spPr>
         <p:txBody>
-          <a:bodyPr wrap="square" lIns="0" rIns="0" tIns="0" bIns="0" anchor="t">
+          <a:bodyPr wrap="square" lIns="0" tIns="0" rIns="0" bIns="0" anchor="t">
             <a:spAutoFit/>
           </a:bodyPr>
           <a:lstStyle/>
@@ -18799,6 +19550,7 @@
           <a:lstStyle/>
           <a:p>
             <a:pPr algn="ctr"/>
+            <a:endParaRPr/>
           </a:p>
         </p:txBody>
       </p:sp>
@@ -18843,6 +19595,7 @@
           <a:lstStyle/>
           <a:p>
             <a:pPr algn="ctr"/>
+            <a:endParaRPr/>
           </a:p>
         </p:txBody>
       </p:sp>
@@ -18863,7 +19616,7 @@
           <a:noFill/>
         </p:spPr>
         <p:txBody>
-          <a:bodyPr wrap="square" lIns="0" rIns="0" tIns="0" bIns="0" anchor="t">
+          <a:bodyPr wrap="square" lIns="0" tIns="0" rIns="0" bIns="0" anchor="t">
             <a:spAutoFit/>
           </a:bodyPr>
           <a:lstStyle/>
@@ -18898,7 +19651,7 @@
           <a:noFill/>
         </p:spPr>
         <p:txBody>
-          <a:bodyPr wrap="square" lIns="0" rIns="0" tIns="0" bIns="0" anchor="t">
+          <a:bodyPr wrap="square" lIns="0" tIns="0" rIns="0" bIns="0" anchor="t">
             <a:spAutoFit/>
           </a:bodyPr>
           <a:lstStyle/>
@@ -18933,7 +19686,7 @@
           <a:noFill/>
         </p:spPr>
         <p:txBody>
-          <a:bodyPr wrap="square" lIns="0" rIns="0" tIns="0" bIns="0" anchor="t">
+          <a:bodyPr wrap="square" lIns="0" tIns="0" rIns="0" bIns="0" anchor="t">
             <a:spAutoFit/>
           </a:bodyPr>
           <a:lstStyle/>
@@ -18968,7 +19721,7 @@
           <a:noFill/>
         </p:spPr>
         <p:txBody>
-          <a:bodyPr wrap="square" lIns="0" rIns="0" tIns="0" bIns="0" anchor="t">
+          <a:bodyPr wrap="square" lIns="0" tIns="0" rIns="0" bIns="0" anchor="t">
             <a:spAutoFit/>
           </a:bodyPr>
           <a:lstStyle/>
@@ -19029,6 +19782,7 @@
           <a:lstStyle/>
           <a:p>
             <a:pPr algn="ctr"/>
+            <a:endParaRPr/>
           </a:p>
         </p:txBody>
       </p:sp>
@@ -19073,6 +19827,7 @@
           <a:lstStyle/>
           <a:p>
             <a:pPr algn="ctr"/>
+            <a:endParaRPr/>
           </a:p>
         </p:txBody>
       </p:sp>
@@ -19093,7 +19848,7 @@
           <a:noFill/>
         </p:spPr>
         <p:txBody>
-          <a:bodyPr wrap="square" lIns="0" rIns="0" tIns="0" bIns="0" anchor="t">
+          <a:bodyPr wrap="square" lIns="0" tIns="0" rIns="0" bIns="0" anchor="t">
             <a:spAutoFit/>
           </a:bodyPr>
           <a:lstStyle/>
@@ -19128,7 +19883,7 @@
           <a:noFill/>
         </p:spPr>
         <p:txBody>
-          <a:bodyPr wrap="square" lIns="0" rIns="0" tIns="0" bIns="0" anchor="t">
+          <a:bodyPr wrap="square" lIns="0" tIns="0" rIns="0" bIns="0" anchor="t">
             <a:spAutoFit/>
           </a:bodyPr>
           <a:lstStyle/>
@@ -19163,7 +19918,7 @@
           <a:noFill/>
         </p:spPr>
         <p:txBody>
-          <a:bodyPr wrap="square" lIns="0" rIns="0" tIns="0" bIns="0" anchor="t">
+          <a:bodyPr wrap="square" lIns="0" tIns="0" rIns="0" bIns="0" anchor="t">
             <a:spAutoFit/>
           </a:bodyPr>
           <a:lstStyle/>
@@ -19198,7 +19953,7 @@
           <a:noFill/>
         </p:spPr>
         <p:txBody>
-          <a:bodyPr wrap="square" lIns="0" rIns="0" tIns="0" bIns="0" anchor="t">
+          <a:bodyPr wrap="square" lIns="0" tIns="0" rIns="0" bIns="0" anchor="t">
             <a:spAutoFit/>
           </a:bodyPr>
           <a:lstStyle/>
@@ -19225,7 +19980,7 @@
 </file>
 
 <file path=ppt/slides/slide7.xml><?xml version="1.0" encoding="utf-8"?>
-<p:sld xmlns:a="http://schemas.openxmlformats.org/drawingml/2006/main" xmlns:p="http://schemas.openxmlformats.org/presentationml/2006/main" xmlns:r="http://schemas.openxmlformats.org/officeDocument/2006/relationships">
+<p:sld xmlns:a="http://schemas.openxmlformats.org/drawingml/2006/main" xmlns:r="http://schemas.openxmlformats.org/officeDocument/2006/relationships" xmlns:p="http://schemas.openxmlformats.org/presentationml/2006/main">
   <p:cSld>
     <p:spTree>
       <p:nvGrpSpPr>
@@ -19233,7 +19988,14 @@
         <p:cNvGrpSpPr/>
         <p:nvPr/>
       </p:nvGrpSpPr>
-      <p:grpSpPr/>
+      <p:grpSpPr>
+        <a:xfrm>
+          <a:off x="0" y="0"/>
+          <a:ext cx="0" cy="0"/>
+          <a:chOff x="0" y="0"/>
+          <a:chExt cx="0" cy="0"/>
+        </a:xfrm>
+      </p:grpSpPr>
       <p:sp>
         <p:nvSpPr>
           <p:cNvPr id="2" name="Rectangle 1"/>
@@ -19275,6 +20037,7 @@
           <a:lstStyle/>
           <a:p>
             <a:pPr algn="ctr"/>
+            <a:endParaRPr/>
           </a:p>
         </p:txBody>
       </p:sp>
@@ -19295,7 +20058,7 @@
           <a:noFill/>
         </p:spPr>
         <p:txBody>
-          <a:bodyPr wrap="square" lIns="0" rIns="0" tIns="0" bIns="0" anchor="ctr">
+          <a:bodyPr wrap="square" lIns="0" tIns="0" rIns="0" bIns="0" anchor="ctr">
             <a:spAutoFit/>
           </a:bodyPr>
           <a:lstStyle/>
@@ -19330,7 +20093,7 @@
           <a:noFill/>
         </p:spPr>
         <p:txBody>
-          <a:bodyPr wrap="square" lIns="0" rIns="0" tIns="0" bIns="0" anchor="ctr">
+          <a:bodyPr wrap="square" lIns="0" tIns="0" rIns="0" bIns="0" anchor="ctr">
             <a:spAutoFit/>
           </a:bodyPr>
           <a:lstStyle/>
@@ -19365,7 +20128,7 @@
           <a:noFill/>
         </p:spPr>
         <p:txBody>
-          <a:bodyPr wrap="square" lIns="0" rIns="0" tIns="0" bIns="0" anchor="t">
+          <a:bodyPr wrap="square" lIns="0" tIns="0" rIns="0" bIns="0" anchor="t">
             <a:spAutoFit/>
           </a:bodyPr>
           <a:lstStyle/>
@@ -19400,7 +20163,7 @@
           <a:noFill/>
         </p:spPr>
         <p:txBody>
-          <a:bodyPr wrap="square" lIns="0" rIns="0" tIns="0" bIns="0" anchor="t">
+          <a:bodyPr wrap="square" lIns="0" tIns="0" rIns="0" bIns="0" anchor="t">
             <a:spAutoFit/>
           </a:bodyPr>
           <a:lstStyle/>
@@ -19435,7 +20198,7 @@
           <a:noFill/>
         </p:spPr>
         <p:txBody>
-          <a:bodyPr wrap="square" lIns="0" rIns="0" tIns="0" bIns="0" anchor="t">
+          <a:bodyPr wrap="square" lIns="0" tIns="0" rIns="0" bIns="0" anchor="t">
             <a:spAutoFit/>
           </a:bodyPr>
           <a:lstStyle/>
@@ -19494,6 +20257,7 @@
           <a:lstStyle/>
           <a:p>
             <a:pPr algn="ctr"/>
+            <a:endParaRPr/>
           </a:p>
         </p:txBody>
       </p:sp>
@@ -19538,6 +20302,7 @@
           <a:lstStyle/>
           <a:p>
             <a:pPr algn="ctr"/>
+            <a:endParaRPr/>
           </a:p>
         </p:txBody>
       </p:sp>
@@ -19558,7 +20323,7 @@
           <a:noFill/>
         </p:spPr>
         <p:txBody>
-          <a:bodyPr wrap="square" lIns="0" rIns="0" tIns="0" bIns="0" anchor="ctr">
+          <a:bodyPr wrap="square" lIns="0" tIns="0" rIns="0" bIns="0" anchor="ctr">
             <a:spAutoFit/>
           </a:bodyPr>
           <a:lstStyle/>
@@ -19619,6 +20384,7 @@
           <a:lstStyle/>
           <a:p>
             <a:pPr algn="ctr"/>
+            <a:endParaRPr/>
           </a:p>
         </p:txBody>
       </p:sp>
@@ -19663,6 +20429,7 @@
           <a:lstStyle/>
           <a:p>
             <a:pPr algn="ctr"/>
+            <a:endParaRPr/>
           </a:p>
         </p:txBody>
       </p:sp>
@@ -19683,7 +20450,7 @@
           <a:noFill/>
         </p:spPr>
         <p:txBody>
-          <a:bodyPr wrap="square" lIns="0" rIns="0" tIns="0" bIns="0" anchor="t">
+          <a:bodyPr wrap="square" lIns="0" tIns="0" rIns="0" bIns="0" anchor="t">
             <a:spAutoFit/>
           </a:bodyPr>
           <a:lstStyle/>
@@ -19863,6 +20630,7 @@
           <a:lstStyle/>
           <a:p>
             <a:pPr algn="ctr"/>
+            <a:endParaRPr/>
           </a:p>
         </p:txBody>
       </p:sp>
@@ -19907,6 +20675,7 @@
           <a:lstStyle/>
           <a:p>
             <a:pPr algn="ctr"/>
+            <a:endParaRPr/>
           </a:p>
         </p:txBody>
       </p:sp>
@@ -19927,7 +20696,7 @@
           <a:noFill/>
         </p:spPr>
         <p:txBody>
-          <a:bodyPr wrap="square" lIns="0" rIns="0" tIns="0" bIns="0" anchor="t">
+          <a:bodyPr wrap="square" lIns="0" tIns="0" rIns="0" bIns="0" anchor="t">
             <a:spAutoFit/>
           </a:bodyPr>
           <a:lstStyle/>
@@ -20107,6 +20876,7 @@
           <a:lstStyle/>
           <a:p>
             <a:pPr algn="ctr"/>
+            <a:endParaRPr/>
           </a:p>
         </p:txBody>
       </p:sp>
@@ -20151,6 +20921,7 @@
           <a:lstStyle/>
           <a:p>
             <a:pPr algn="ctr"/>
+            <a:endParaRPr/>
           </a:p>
         </p:txBody>
       </p:sp>
@@ -20171,7 +20942,7 @@
           <a:noFill/>
         </p:spPr>
         <p:txBody>
-          <a:bodyPr wrap="square" lIns="0" rIns="0" tIns="0" bIns="0" anchor="t">
+          <a:bodyPr wrap="square" lIns="0" tIns="0" rIns="0" bIns="0" anchor="t">
             <a:spAutoFit/>
           </a:bodyPr>
           <a:lstStyle/>
@@ -20317,7 +21088,7 @@
 </file>
 
 <file path=ppt/slides/slide8.xml><?xml version="1.0" encoding="utf-8"?>
-<p:sld xmlns:a="http://schemas.openxmlformats.org/drawingml/2006/main" xmlns:p="http://schemas.openxmlformats.org/presentationml/2006/main" xmlns:r="http://schemas.openxmlformats.org/officeDocument/2006/relationships">
+<p:sld xmlns:a="http://schemas.openxmlformats.org/drawingml/2006/main" xmlns:r="http://schemas.openxmlformats.org/officeDocument/2006/relationships" xmlns:p="http://schemas.openxmlformats.org/presentationml/2006/main">
   <p:cSld>
     <p:spTree>
       <p:nvGrpSpPr>
@@ -20325,7 +21096,14 @@
         <p:cNvGrpSpPr/>
         <p:nvPr/>
       </p:nvGrpSpPr>
-      <p:grpSpPr/>
+      <p:grpSpPr>
+        <a:xfrm>
+          <a:off x="0" y="0"/>
+          <a:ext cx="0" cy="0"/>
+          <a:chOff x="0" y="0"/>
+          <a:chExt cx="0" cy="0"/>
+        </a:xfrm>
+      </p:grpSpPr>
       <p:sp>
         <p:nvSpPr>
           <p:cNvPr id="2" name="Rectangle 1"/>
@@ -20367,6 +21145,7 @@
           <a:lstStyle/>
           <a:p>
             <a:pPr algn="ctr"/>
+            <a:endParaRPr/>
           </a:p>
         </p:txBody>
       </p:sp>
@@ -20387,7 +21166,7 @@
           <a:noFill/>
         </p:spPr>
         <p:txBody>
-          <a:bodyPr wrap="square" lIns="0" rIns="0" tIns="0" bIns="0" anchor="ctr">
+          <a:bodyPr wrap="square" lIns="0" tIns="0" rIns="0" bIns="0" anchor="ctr">
             <a:spAutoFit/>
           </a:bodyPr>
           <a:lstStyle/>
@@ -20422,7 +21201,7 @@
           <a:noFill/>
         </p:spPr>
         <p:txBody>
-          <a:bodyPr wrap="square" lIns="0" rIns="0" tIns="0" bIns="0" anchor="ctr">
+          <a:bodyPr wrap="square" lIns="0" tIns="0" rIns="0" bIns="0" anchor="ctr">
             <a:spAutoFit/>
           </a:bodyPr>
           <a:lstStyle/>
@@ -20457,7 +21236,7 @@
           <a:noFill/>
         </p:spPr>
         <p:txBody>
-          <a:bodyPr wrap="square" lIns="0" rIns="0" tIns="0" bIns="0" anchor="t">
+          <a:bodyPr wrap="square" lIns="0" tIns="0" rIns="0" bIns="0" anchor="t">
             <a:spAutoFit/>
           </a:bodyPr>
           <a:lstStyle/>
@@ -20492,7 +21271,7 @@
           <a:noFill/>
         </p:spPr>
         <p:txBody>
-          <a:bodyPr wrap="square" lIns="0" rIns="0" tIns="0" bIns="0" anchor="t">
+          <a:bodyPr wrap="square" lIns="0" tIns="0" rIns="0" bIns="0" anchor="t">
             <a:spAutoFit/>
           </a:bodyPr>
           <a:lstStyle/>
@@ -20527,7 +21306,7 @@
           <a:noFill/>
         </p:spPr>
         <p:txBody>
-          <a:bodyPr wrap="square" lIns="0" rIns="0" tIns="0" bIns="0" anchor="t">
+          <a:bodyPr wrap="square" lIns="0" tIns="0" rIns="0" bIns="0" anchor="t">
             <a:spAutoFit/>
           </a:bodyPr>
           <a:lstStyle/>
@@ -20586,6 +21365,7 @@
           <a:lstStyle/>
           <a:p>
             <a:pPr algn="ctr"/>
+            <a:endParaRPr/>
           </a:p>
         </p:txBody>
       </p:sp>
@@ -20630,6 +21410,7 @@
           <a:lstStyle/>
           <a:p>
             <a:pPr algn="ctr"/>
+            <a:endParaRPr/>
           </a:p>
         </p:txBody>
       </p:sp>
@@ -20650,7 +21431,7 @@
           <a:noFill/>
         </p:spPr>
         <p:txBody>
-          <a:bodyPr wrap="square" lIns="0" rIns="0" tIns="0" bIns="0" anchor="ctr">
+          <a:bodyPr wrap="square" lIns="0" tIns="0" rIns="0" bIns="0" anchor="ctr">
             <a:spAutoFit/>
           </a:bodyPr>
           <a:lstStyle/>
@@ -20687,11 +21468,41 @@
                 <a:tableStyleId>{5C22544A-7EE6-4342-B048-85BDC9FD1C3A}</a:tableStyleId>
               </a:tblPr>
               <a:tblGrid>
-                <a:gridCol w="1169700"/>
-                <a:gridCol w="1619585"/>
-                <a:gridCol w="1619585"/>
-                <a:gridCol w="4678801"/>
-                <a:gridCol w="2159447"/>
+                <a:gridCol w="1169700">
+                  <a:extLst>
+                    <a:ext uri="{9D8B030D-6E8A-4147-A177-3AD203B41FA5}">
+                      <a16:colId xmlns:a16="http://schemas.microsoft.com/office/drawing/2014/main" val="20000"/>
+                    </a:ext>
+                  </a:extLst>
+                </a:gridCol>
+                <a:gridCol w="1619585">
+                  <a:extLst>
+                    <a:ext uri="{9D8B030D-6E8A-4147-A177-3AD203B41FA5}">
+                      <a16:colId xmlns:a16="http://schemas.microsoft.com/office/drawing/2014/main" val="20001"/>
+                    </a:ext>
+                  </a:extLst>
+                </a:gridCol>
+                <a:gridCol w="1619585">
+                  <a:extLst>
+                    <a:ext uri="{9D8B030D-6E8A-4147-A177-3AD203B41FA5}">
+                      <a16:colId xmlns:a16="http://schemas.microsoft.com/office/drawing/2014/main" val="20002"/>
+                    </a:ext>
+                  </a:extLst>
+                </a:gridCol>
+                <a:gridCol w="4678801">
+                  <a:extLst>
+                    <a:ext uri="{9D8B030D-6E8A-4147-A177-3AD203B41FA5}">
+                      <a16:colId xmlns:a16="http://schemas.microsoft.com/office/drawing/2014/main" val="20003"/>
+                    </a:ext>
+                  </a:extLst>
+                </a:gridCol>
+                <a:gridCol w="2159447">
+                  <a:extLst>
+                    <a:ext uri="{9D8B030D-6E8A-4147-A177-3AD203B41FA5}">
+                      <a16:colId xmlns:a16="http://schemas.microsoft.com/office/drawing/2014/main" val="20004"/>
+                    </a:ext>
+                  </a:extLst>
+                </a:gridCol>
               </a:tblGrid>
               <a:tr h="457200">
                 <a:tc>
@@ -20809,11 +21620,16 @@
                     </a:solidFill>
                   </a:tcPr>
                 </a:tc>
+                <a:extLst>
+                  <a:ext uri="{0D108BD9-81ED-4DB2-BD59-A6C34878D82A}">
+                    <a16:rowId xmlns:a16="http://schemas.microsoft.com/office/drawing/2014/main" val="10000"/>
+                  </a:ext>
+                </a:extLst>
               </a:tr>
               <a:tr h="457200">
                 <a:tc>
                   <a:txBody>
-                    <a:bodyPr tIns="36576" bIns="36576"/>
+                    <a:bodyPr/>
                     <a:lstStyle/>
                     <a:p>
                       <a:pPr algn="l"/>
@@ -20836,7 +21652,7 @@
                 </a:tc>
                 <a:tc>
                   <a:txBody>
-                    <a:bodyPr tIns="36576" bIns="36576"/>
+                    <a:bodyPr/>
                     <a:lstStyle/>
                     <a:p>
                       <a:pPr algn="l"/>
@@ -20859,7 +21675,7 @@
                 </a:tc>
                 <a:tc>
                   <a:txBody>
-                    <a:bodyPr tIns="36576" bIns="36576"/>
+                    <a:bodyPr/>
                     <a:lstStyle/>
                     <a:p>
                       <a:pPr algn="l"/>
@@ -20882,7 +21698,7 @@
                 </a:tc>
                 <a:tc>
                   <a:txBody>
-                    <a:bodyPr tIns="36576" bIns="36576"/>
+                    <a:bodyPr/>
                     <a:lstStyle/>
                     <a:p>
                       <a:pPr algn="l"/>
@@ -20905,7 +21721,7 @@
                 </a:tc>
                 <a:tc>
                   <a:txBody>
-                    <a:bodyPr tIns="36576" bIns="36576"/>
+                    <a:bodyPr/>
                     <a:lstStyle/>
                     <a:p>
                       <a:pPr algn="l"/>
@@ -20926,11 +21742,16 @@
                     </a:solidFill>
                   </a:tcPr>
                 </a:tc>
+                <a:extLst>
+                  <a:ext uri="{0D108BD9-81ED-4DB2-BD59-A6C34878D82A}">
+                    <a16:rowId xmlns:a16="http://schemas.microsoft.com/office/drawing/2014/main" val="10001"/>
+                  </a:ext>
+                </a:extLst>
               </a:tr>
               <a:tr h="457200">
                 <a:tc>
                   <a:txBody>
-                    <a:bodyPr tIns="36576" bIns="36576"/>
+                    <a:bodyPr/>
                     <a:lstStyle/>
                     <a:p>
                       <a:pPr algn="l"/>
@@ -20953,7 +21774,7 @@
                 </a:tc>
                 <a:tc>
                   <a:txBody>
-                    <a:bodyPr tIns="36576" bIns="36576"/>
+                    <a:bodyPr/>
                     <a:lstStyle/>
                     <a:p>
                       <a:pPr algn="l"/>
@@ -20976,7 +21797,7 @@
                 </a:tc>
                 <a:tc>
                   <a:txBody>
-                    <a:bodyPr tIns="36576" bIns="36576"/>
+                    <a:bodyPr/>
                     <a:lstStyle/>
                     <a:p>
                       <a:pPr algn="l"/>
@@ -20999,7 +21820,7 @@
                 </a:tc>
                 <a:tc>
                   <a:txBody>
-                    <a:bodyPr tIns="36576" bIns="36576"/>
+                    <a:bodyPr/>
                     <a:lstStyle/>
                     <a:p>
                       <a:pPr algn="l"/>
@@ -21022,7 +21843,7 @@
                 </a:tc>
                 <a:tc>
                   <a:txBody>
-                    <a:bodyPr tIns="36576" bIns="36576"/>
+                    <a:bodyPr/>
                     <a:lstStyle/>
                     <a:p>
                       <a:pPr algn="l"/>
@@ -21043,11 +21864,16 @@
                     </a:solidFill>
                   </a:tcPr>
                 </a:tc>
+                <a:extLst>
+                  <a:ext uri="{0D108BD9-81ED-4DB2-BD59-A6C34878D82A}">
+                    <a16:rowId xmlns:a16="http://schemas.microsoft.com/office/drawing/2014/main" val="10002"/>
+                  </a:ext>
+                </a:extLst>
               </a:tr>
               <a:tr h="457200">
                 <a:tc>
                   <a:txBody>
-                    <a:bodyPr tIns="36576" bIns="36576"/>
+                    <a:bodyPr/>
                     <a:lstStyle/>
                     <a:p>
                       <a:pPr algn="l"/>
@@ -21070,7 +21896,7 @@
                 </a:tc>
                 <a:tc>
                   <a:txBody>
-                    <a:bodyPr tIns="36576" bIns="36576"/>
+                    <a:bodyPr/>
                     <a:lstStyle/>
                     <a:p>
                       <a:pPr algn="l"/>
@@ -21093,7 +21919,7 @@
                 </a:tc>
                 <a:tc>
                   <a:txBody>
-                    <a:bodyPr tIns="36576" bIns="36576"/>
+                    <a:bodyPr/>
                     <a:lstStyle/>
                     <a:p>
                       <a:pPr algn="l"/>
@@ -21116,7 +21942,7 @@
                 </a:tc>
                 <a:tc>
                   <a:txBody>
-                    <a:bodyPr tIns="36576" bIns="36576"/>
+                    <a:bodyPr/>
                     <a:lstStyle/>
                     <a:p>
                       <a:pPr algn="l"/>
@@ -21139,7 +21965,7 @@
                 </a:tc>
                 <a:tc>
                   <a:txBody>
-                    <a:bodyPr tIns="36576" bIns="36576"/>
+                    <a:bodyPr/>
                     <a:lstStyle/>
                     <a:p>
                       <a:pPr algn="l"/>
@@ -21160,11 +21986,16 @@
                     </a:solidFill>
                   </a:tcPr>
                 </a:tc>
+                <a:extLst>
+                  <a:ext uri="{0D108BD9-81ED-4DB2-BD59-A6C34878D82A}">
+                    <a16:rowId xmlns:a16="http://schemas.microsoft.com/office/drawing/2014/main" val="10003"/>
+                  </a:ext>
+                </a:extLst>
               </a:tr>
               <a:tr h="457200">
                 <a:tc>
                   <a:txBody>
-                    <a:bodyPr tIns="36576" bIns="36576"/>
+                    <a:bodyPr/>
                     <a:lstStyle/>
                     <a:p>
                       <a:pPr algn="l"/>
@@ -21187,7 +22018,7 @@
                 </a:tc>
                 <a:tc>
                   <a:txBody>
-                    <a:bodyPr tIns="36576" bIns="36576"/>
+                    <a:bodyPr/>
                     <a:lstStyle/>
                     <a:p>
                       <a:pPr algn="l"/>
@@ -21210,7 +22041,7 @@
                 </a:tc>
                 <a:tc>
                   <a:txBody>
-                    <a:bodyPr tIns="36576" bIns="36576"/>
+                    <a:bodyPr/>
                     <a:lstStyle/>
                     <a:p>
                       <a:pPr algn="l"/>
@@ -21233,7 +22064,7 @@
                 </a:tc>
                 <a:tc>
                   <a:txBody>
-                    <a:bodyPr tIns="36576" bIns="36576"/>
+                    <a:bodyPr/>
                     <a:lstStyle/>
                     <a:p>
                       <a:pPr algn="l"/>
@@ -21256,7 +22087,7 @@
                 </a:tc>
                 <a:tc>
                   <a:txBody>
-                    <a:bodyPr tIns="36576" bIns="36576"/>
+                    <a:bodyPr/>
                     <a:lstStyle/>
                     <a:p>
                       <a:pPr algn="l"/>
@@ -21277,11 +22108,16 @@
                     </a:solidFill>
                   </a:tcPr>
                 </a:tc>
+                <a:extLst>
+                  <a:ext uri="{0D108BD9-81ED-4DB2-BD59-A6C34878D82A}">
+                    <a16:rowId xmlns:a16="http://schemas.microsoft.com/office/drawing/2014/main" val="10004"/>
+                  </a:ext>
+                </a:extLst>
               </a:tr>
               <a:tr h="457200">
                 <a:tc>
                   <a:txBody>
-                    <a:bodyPr tIns="36576" bIns="36576"/>
+                    <a:bodyPr/>
                     <a:lstStyle/>
                     <a:p>
                       <a:pPr algn="l"/>
@@ -21304,7 +22140,7 @@
                 </a:tc>
                 <a:tc>
                   <a:txBody>
-                    <a:bodyPr tIns="36576" bIns="36576"/>
+                    <a:bodyPr/>
                     <a:lstStyle/>
                     <a:p>
                       <a:pPr algn="l"/>
@@ -21327,7 +22163,7 @@
                 </a:tc>
                 <a:tc>
                   <a:txBody>
-                    <a:bodyPr tIns="36576" bIns="36576"/>
+                    <a:bodyPr/>
                     <a:lstStyle/>
                     <a:p>
                       <a:pPr algn="l"/>
@@ -21350,7 +22186,7 @@
                 </a:tc>
                 <a:tc>
                   <a:txBody>
-                    <a:bodyPr tIns="36576" bIns="36576"/>
+                    <a:bodyPr/>
                     <a:lstStyle/>
                     <a:p>
                       <a:pPr algn="l"/>
@@ -21373,7 +22209,7 @@
                 </a:tc>
                 <a:tc>
                   <a:txBody>
-                    <a:bodyPr tIns="36576" bIns="36576"/>
+                    <a:bodyPr/>
                     <a:lstStyle/>
                     <a:p>
                       <a:pPr algn="l"/>
@@ -21394,6 +22230,11 @@
                     </a:solidFill>
                   </a:tcPr>
                 </a:tc>
+                <a:extLst>
+                  <a:ext uri="{0D108BD9-81ED-4DB2-BD59-A6C34878D82A}">
+                    <a16:rowId xmlns:a16="http://schemas.microsoft.com/office/drawing/2014/main" val="10005"/>
+                  </a:ext>
+                </a:extLst>
               </a:tr>
             </a:tbl>
           </a:graphicData>
@@ -21442,6 +22283,7 @@
           <a:lstStyle/>
           <a:p>
             <a:pPr algn="ctr"/>
+            <a:endParaRPr/>
           </a:p>
         </p:txBody>
       </p:sp>
@@ -21462,7 +22304,7 @@
           <a:noFill/>
         </p:spPr>
         <p:txBody>
-          <a:bodyPr wrap="square" lIns="0" rIns="0" tIns="0" bIns="0" anchor="t">
+          <a:bodyPr wrap="square" lIns="0" tIns="0" rIns="0" bIns="0" anchor="t">
             <a:spAutoFit/>
           </a:bodyPr>
           <a:lstStyle/>
@@ -21497,7 +22339,7 @@
           <a:noFill/>
         </p:spPr>
         <p:txBody>
-          <a:bodyPr wrap="square" lIns="0" rIns="0" tIns="0" bIns="0" anchor="t">
+          <a:bodyPr wrap="square" lIns="0" tIns="0" rIns="0" bIns="0" anchor="t">
             <a:spAutoFit/>
           </a:bodyPr>
           <a:lstStyle/>
@@ -21548,7 +22390,7 @@
 </file>
 
 <file path=ppt/slides/slide9.xml><?xml version="1.0" encoding="utf-8"?>
-<p:sld xmlns:a="http://schemas.openxmlformats.org/drawingml/2006/main" xmlns:p="http://schemas.openxmlformats.org/presentationml/2006/main" xmlns:r="http://schemas.openxmlformats.org/officeDocument/2006/relationships">
+<p:sld xmlns:a="http://schemas.openxmlformats.org/drawingml/2006/main" xmlns:r="http://schemas.openxmlformats.org/officeDocument/2006/relationships" xmlns:p="http://schemas.openxmlformats.org/presentationml/2006/main">
   <p:cSld>
     <p:spTree>
       <p:nvGrpSpPr>
@@ -21556,7 +22398,14 @@
         <p:cNvGrpSpPr/>
         <p:nvPr/>
       </p:nvGrpSpPr>
-      <p:grpSpPr/>
+      <p:grpSpPr>
+        <a:xfrm>
+          <a:off x="0" y="0"/>
+          <a:ext cx="0" cy="0"/>
+          <a:chOff x="0" y="0"/>
+          <a:chExt cx="0" cy="0"/>
+        </a:xfrm>
+      </p:grpSpPr>
       <p:sp>
         <p:nvSpPr>
           <p:cNvPr id="2" name="Rectangle 1"/>
@@ -21598,6 +22447,7 @@
           <a:lstStyle/>
           <a:p>
             <a:pPr algn="ctr"/>
+            <a:endParaRPr/>
           </a:p>
         </p:txBody>
       </p:sp>
@@ -21618,7 +22468,7 @@
           <a:noFill/>
         </p:spPr>
         <p:txBody>
-          <a:bodyPr wrap="square" lIns="0" rIns="0" tIns="0" bIns="0" anchor="ctr">
+          <a:bodyPr wrap="square" lIns="0" tIns="0" rIns="0" bIns="0" anchor="ctr">
             <a:spAutoFit/>
           </a:bodyPr>
           <a:lstStyle/>
@@ -21653,7 +22503,7 @@
           <a:noFill/>
         </p:spPr>
         <p:txBody>
-          <a:bodyPr wrap="square" lIns="0" rIns="0" tIns="0" bIns="0" anchor="ctr">
+          <a:bodyPr wrap="square" lIns="0" tIns="0" rIns="0" bIns="0" anchor="ctr">
             <a:spAutoFit/>
           </a:bodyPr>
           <a:lstStyle/>
@@ -21688,7 +22538,7 @@
           <a:noFill/>
         </p:spPr>
         <p:txBody>
-          <a:bodyPr wrap="square" lIns="0" rIns="0" tIns="0" bIns="0" anchor="t">
+          <a:bodyPr wrap="square" lIns="0" tIns="0" rIns="0" bIns="0" anchor="t">
             <a:spAutoFit/>
           </a:bodyPr>
           <a:lstStyle/>
@@ -21723,7 +22573,7 @@
           <a:noFill/>
         </p:spPr>
         <p:txBody>
-          <a:bodyPr wrap="square" lIns="0" rIns="0" tIns="0" bIns="0" anchor="t">
+          <a:bodyPr wrap="square" lIns="0" tIns="0" rIns="0" bIns="0" anchor="t">
             <a:spAutoFit/>
           </a:bodyPr>
           <a:lstStyle/>
@@ -21758,7 +22608,7 @@
           <a:noFill/>
         </p:spPr>
         <p:txBody>
-          <a:bodyPr wrap="square" lIns="0" rIns="0" tIns="0" bIns="0" anchor="t">
+          <a:bodyPr wrap="square" lIns="0" tIns="0" rIns="0" bIns="0" anchor="t">
             <a:spAutoFit/>
           </a:bodyPr>
           <a:lstStyle/>
@@ -21817,6 +22667,7 @@
           <a:lstStyle/>
           <a:p>
             <a:pPr algn="ctr"/>
+            <a:endParaRPr/>
           </a:p>
         </p:txBody>
       </p:sp>
@@ -21861,6 +22712,7 @@
           <a:lstStyle/>
           <a:p>
             <a:pPr algn="ctr"/>
+            <a:endParaRPr/>
           </a:p>
         </p:txBody>
       </p:sp>
@@ -21881,7 +22733,7 @@
           <a:noFill/>
         </p:spPr>
         <p:txBody>
-          <a:bodyPr wrap="square" lIns="0" rIns="0" tIns="0" bIns="0" anchor="ctr">
+          <a:bodyPr wrap="square" lIns="0" tIns="0" rIns="0" bIns="0" anchor="ctr">
             <a:spAutoFit/>
           </a:bodyPr>
           <a:lstStyle/>
@@ -21942,6 +22794,7 @@
           <a:lstStyle/>
           <a:p>
             <a:pPr algn="ctr"/>
+            <a:endParaRPr/>
           </a:p>
         </p:txBody>
       </p:sp>
@@ -21986,6 +22839,7 @@
           <a:lstStyle/>
           <a:p>
             <a:pPr algn="ctr"/>
+            <a:endParaRPr/>
           </a:p>
         </p:txBody>
       </p:sp>
@@ -22006,7 +22860,7 @@
           <a:noFill/>
         </p:spPr>
         <p:txBody>
-          <a:bodyPr wrap="square" lIns="0" rIns="0" tIns="0" bIns="0" anchor="t">
+          <a:bodyPr wrap="square" lIns="0" tIns="0" rIns="0" bIns="0" anchor="t">
             <a:spAutoFit/>
           </a:bodyPr>
           <a:lstStyle/>
@@ -22041,7 +22895,7 @@
           <a:noFill/>
         </p:spPr>
         <p:txBody>
-          <a:bodyPr wrap="square" lIns="0" rIns="0" tIns="0" bIns="0" anchor="t">
+          <a:bodyPr wrap="square" lIns="0" tIns="0" rIns="0" bIns="0" anchor="t">
             <a:spAutoFit/>
           </a:bodyPr>
           <a:lstStyle/>
@@ -22111,6 +22965,7 @@
           <a:lstStyle/>
           <a:p>
             <a:pPr algn="ctr"/>
+            <a:endParaRPr/>
           </a:p>
         </p:txBody>
       </p:sp>
@@ -22157,6 +23012,7 @@
           <a:lstStyle/>
           <a:p>
             <a:pPr algn="ctr"/>
+            <a:endParaRPr/>
           </a:p>
         </p:txBody>
       </p:sp>
@@ -22201,6 +23057,7 @@
           <a:lstStyle/>
           <a:p>
             <a:pPr algn="ctr"/>
+            <a:endParaRPr/>
           </a:p>
         </p:txBody>
       </p:sp>
@@ -22221,7 +23078,7 @@
           <a:noFill/>
         </p:spPr>
         <p:txBody>
-          <a:bodyPr wrap="square" lIns="0" rIns="0" tIns="0" bIns="0" anchor="t">
+          <a:bodyPr wrap="square" lIns="0" tIns="0" rIns="0" bIns="0" anchor="t">
             <a:spAutoFit/>
           </a:bodyPr>
           <a:lstStyle/>
@@ -22256,7 +23113,7 @@
           <a:noFill/>
         </p:spPr>
         <p:txBody>
-          <a:bodyPr wrap="square" lIns="0" rIns="0" tIns="0" bIns="0" anchor="t">
+          <a:bodyPr wrap="square" lIns="0" tIns="0" rIns="0" bIns="0" anchor="t">
             <a:spAutoFit/>
           </a:bodyPr>
           <a:lstStyle/>
@@ -22326,6 +23183,7 @@
           <a:lstStyle/>
           <a:p>
             <a:pPr algn="ctr"/>
+            <a:endParaRPr/>
           </a:p>
         </p:txBody>
       </p:sp>
@@ -22372,6 +23230,7 @@
           <a:lstStyle/>
           <a:p>
             <a:pPr algn="ctr"/>
+            <a:endParaRPr/>
           </a:p>
         </p:txBody>
       </p:sp>
@@ -22416,6 +23275,7 @@
           <a:lstStyle/>
           <a:p>
             <a:pPr algn="ctr"/>
+            <a:endParaRPr/>
           </a:p>
         </p:txBody>
       </p:sp>
@@ -22436,7 +23296,7 @@
           <a:noFill/>
         </p:spPr>
         <p:txBody>
-          <a:bodyPr wrap="square" lIns="0" rIns="0" tIns="0" bIns="0" anchor="t">
+          <a:bodyPr wrap="square" lIns="0" tIns="0" rIns="0" bIns="0" anchor="t">
             <a:spAutoFit/>
           </a:bodyPr>
           <a:lstStyle/>
@@ -22471,7 +23331,7 @@
           <a:noFill/>
         </p:spPr>
         <p:txBody>
-          <a:bodyPr wrap="square" lIns="0" rIns="0" tIns="0" bIns="0" anchor="t">
+          <a:bodyPr wrap="square" lIns="0" tIns="0" rIns="0" bIns="0" anchor="t">
             <a:spAutoFit/>
           </a:bodyPr>
           <a:lstStyle/>
@@ -22541,6 +23401,7 @@
           <a:lstStyle/>
           <a:p>
             <a:pPr algn="ctr"/>
+            <a:endParaRPr/>
           </a:p>
         </p:txBody>
       </p:sp>
@@ -22587,6 +23448,7 @@
           <a:lstStyle/>
           <a:p>
             <a:pPr algn="ctr"/>
+            <a:endParaRPr/>
           </a:p>
         </p:txBody>
       </p:sp>
@@ -22631,6 +23493,7 @@
           <a:lstStyle/>
           <a:p>
             <a:pPr algn="ctr"/>
+            <a:endParaRPr/>
           </a:p>
         </p:txBody>
       </p:sp>
@@ -22651,7 +23514,7 @@
           <a:noFill/>
         </p:spPr>
         <p:txBody>
-          <a:bodyPr wrap="square" lIns="0" rIns="0" tIns="0" bIns="0" anchor="t">
+          <a:bodyPr wrap="square" lIns="0" tIns="0" rIns="0" bIns="0" anchor="t">
             <a:spAutoFit/>
           </a:bodyPr>
           <a:lstStyle/>
@@ -22686,7 +23549,7 @@
           <a:noFill/>
         </p:spPr>
         <p:txBody>
-          <a:bodyPr wrap="square" lIns="0" rIns="0" tIns="0" bIns="0" anchor="t">
+          <a:bodyPr wrap="square" lIns="0" tIns="0" rIns="0" bIns="0" anchor="t">
             <a:spAutoFit/>
           </a:bodyPr>
           <a:lstStyle/>
@@ -22756,6 +23619,7 @@
           <a:lstStyle/>
           <a:p>
             <a:pPr algn="ctr"/>
+            <a:endParaRPr/>
           </a:p>
         </p:txBody>
       </p:sp>
@@ -22802,6 +23666,7 @@
           <a:lstStyle/>
           <a:p>
             <a:pPr algn="ctr"/>
+            <a:endParaRPr/>
           </a:p>
         </p:txBody>
       </p:sp>
@@ -22846,6 +23711,7 @@
           <a:lstStyle/>
           <a:p>
             <a:pPr algn="ctr"/>
+            <a:endParaRPr/>
           </a:p>
         </p:txBody>
       </p:sp>
@@ -22866,7 +23732,7 @@
           <a:noFill/>
         </p:spPr>
         <p:txBody>
-          <a:bodyPr wrap="square" lIns="0" rIns="0" tIns="0" bIns="0" anchor="t">
+          <a:bodyPr wrap="square" lIns="0" tIns="0" rIns="0" bIns="0" anchor="t">
             <a:spAutoFit/>
           </a:bodyPr>
           <a:lstStyle/>
@@ -22901,7 +23767,7 @@
           <a:noFill/>
         </p:spPr>
         <p:txBody>
-          <a:bodyPr wrap="square" lIns="0" rIns="0" tIns="0" bIns="0" anchor="t">
+          <a:bodyPr wrap="square" lIns="0" tIns="0" rIns="0" bIns="0" anchor="t">
             <a:spAutoFit/>
           </a:bodyPr>
           <a:lstStyle/>
@@ -22974,6 +23840,7 @@
           <a:lstStyle/>
           <a:p>
             <a:pPr algn="ctr"/>
+            <a:endParaRPr/>
           </a:p>
         </p:txBody>
       </p:sp>
@@ -23018,6 +23885,7 @@
           <a:lstStyle/>
           <a:p>
             <a:pPr algn="ctr"/>
+            <a:endParaRPr/>
           </a:p>
         </p:txBody>
       </p:sp>
@@ -23038,7 +23906,7 @@
           <a:noFill/>
         </p:spPr>
         <p:txBody>
-          <a:bodyPr wrap="square" lIns="0" rIns="0" tIns="0" bIns="0" anchor="t">
+          <a:bodyPr wrap="square" lIns="0" tIns="0" rIns="0" bIns="0" anchor="t">
             <a:spAutoFit/>
           </a:bodyPr>
           <a:lstStyle/>
